--- a/Capstone Mid-Quarter Update_Bryce Rooney.pptx
+++ b/Capstone Mid-Quarter Update_Bryce Rooney.pptx
@@ -14,10 +14,11 @@
     <p:sldId id="266" r:id="rId8"/>
     <p:sldId id="267" r:id="rId9"/>
     <p:sldId id="269" r:id="rId10"/>
-    <p:sldId id="270" r:id="rId11"/>
-    <p:sldId id="271" r:id="rId12"/>
-    <p:sldId id="272" r:id="rId13"/>
-    <p:sldId id="273" r:id="rId14"/>
+    <p:sldId id="274" r:id="rId11"/>
+    <p:sldId id="270" r:id="rId12"/>
+    <p:sldId id="271" r:id="rId13"/>
+    <p:sldId id="272" r:id="rId14"/>
+    <p:sldId id="273" r:id="rId15"/>
   </p:sldIdLst>
   <p:sldSz cx="12192000" cy="6858000"/>
   <p:notesSz cx="6858000" cy="9144000"/>
@@ -127,7 +128,7 @@
 <file path=ppt/revisionInfo.xml><?xml version="1.0" encoding="utf-8"?>
 <p1510:revInfo xmlns:a="http://schemas.openxmlformats.org/drawingml/2006/main" xmlns:r="http://schemas.openxmlformats.org/officeDocument/2006/relationships" xmlns:p1510="http://schemas.microsoft.com/office/powerpoint/2015/10/main">
   <p1510:revLst>
-    <p1510:client id="{0A4800FB-C729-43D8-B8FA-AF6F4E65F618}" v="1" dt="2026-03-31T21:40:29.549"/>
+    <p1510:client id="{1E636ACD-020F-4D73-8CFB-5E79BCD32D5A}" v="3" dt="2026-05-07T22:16:53.401"/>
   </p1510:revLst>
 </p1510:revInfo>
 </file>
@@ -135,56 +136,203 @@
 <file path=ppt/changesInfos/changesInfo1.xml><?xml version="1.0" encoding="utf-8"?>
 <pc:chgInfo xmlns:a="http://schemas.openxmlformats.org/drawingml/2006/main" xmlns:r="http://schemas.openxmlformats.org/officeDocument/2006/relationships" xmlns:ac="http://schemas.microsoft.com/office/drawing/2013/main/command" xmlns:pc="http://schemas.microsoft.com/office/powerpoint/2013/main/command">
   <pc:docChgLst>
-    <pc:chgData name="Rooney, Bryce Edward (53520) CIV USN NIWC PACIFIC CA (USA)" userId="802230dc-da13-4caa-9b75-cf409dfca0cb" providerId="ADAL" clId="{408BF972-AAF0-4B87-AAE0-4584C3E8F925}"/>
-    <pc:docChg chg="custSel modSld">
-      <pc:chgData name="Rooney, Bryce Edward (53520) CIV USN NIWC PACIFIC CA (USA)" userId="802230dc-da13-4caa-9b75-cf409dfca0cb" providerId="ADAL" clId="{408BF972-AAF0-4B87-AAE0-4584C3E8F925}" dt="2026-03-31T21:41:18.573" v="925" actId="20577"/>
+    <pc:chgData name="Rooney, Bryce Edward (53520) CIV USN NIWC PACIFIC CA (USA)" userId="802230dc-da13-4caa-9b75-cf409dfca0cb" providerId="ADAL" clId="{14E4AD74-DF90-47DB-80EB-A94A3623429B}"/>
+    <pc:docChg chg="custSel addSld modSld sldOrd">
+      <pc:chgData name="Rooney, Bryce Edward (53520) CIV USN NIWC PACIFIC CA (USA)" userId="802230dc-da13-4caa-9b75-cf409dfca0cb" providerId="ADAL" clId="{14E4AD74-DF90-47DB-80EB-A94A3623429B}" dt="2026-05-07T22:31:15.661" v="1232" actId="1076"/>
       <pc:docMkLst>
         <pc:docMk/>
       </pc:docMkLst>
       <pc:sldChg chg="modSp mod">
-        <pc:chgData name="Rooney, Bryce Edward (53520) CIV USN NIWC PACIFIC CA (USA)" userId="802230dc-da13-4caa-9b75-cf409dfca0cb" providerId="ADAL" clId="{408BF972-AAF0-4B87-AAE0-4584C3E8F925}" dt="2026-03-31T20:56:25.168" v="10" actId="20577"/>
+        <pc:chgData name="Rooney, Bryce Edward (53520) CIV USN NIWC PACIFIC CA (USA)" userId="802230dc-da13-4caa-9b75-cf409dfca0cb" providerId="ADAL" clId="{14E4AD74-DF90-47DB-80EB-A94A3623429B}" dt="2026-05-07T22:02:10.455" v="436" actId="20577"/>
         <pc:sldMkLst>
           <pc:docMk/>
-          <pc:sldMk cId="291941122" sldId="256"/>
+          <pc:sldMk cId="1204101300" sldId="264"/>
         </pc:sldMkLst>
         <pc:spChg chg="mod">
-          <ac:chgData name="Rooney, Bryce Edward (53520) CIV USN NIWC PACIFIC CA (USA)" userId="802230dc-da13-4caa-9b75-cf409dfca0cb" providerId="ADAL" clId="{408BF972-AAF0-4B87-AAE0-4584C3E8F925}" dt="2026-03-31T20:56:25.168" v="10" actId="20577"/>
+          <ac:chgData name="Rooney, Bryce Edward (53520) CIV USN NIWC PACIFIC CA (USA)" userId="802230dc-da13-4caa-9b75-cf409dfca0cb" providerId="ADAL" clId="{14E4AD74-DF90-47DB-80EB-A94A3623429B}" dt="2026-05-07T22:02:10.455" v="436" actId="20577"/>
           <ac:spMkLst>
             <pc:docMk/>
-            <pc:sldMk cId="291941122" sldId="256"/>
-            <ac:spMk id="2" creationId="{DF18180A-64C9-2A9B-CFB0-FCF2F7E35BB6}"/>
+            <pc:sldMk cId="1204101300" sldId="264"/>
+            <ac:spMk id="14" creationId="{C60E67CD-3ABA-843D-DA36-A35E3AB8CE74}"/>
+          </ac:spMkLst>
+        </pc:spChg>
+      </pc:sldChg>
+      <pc:sldChg chg="addSp delSp modSp mod ord">
+        <pc:chgData name="Rooney, Bryce Edward (53520) CIV USN NIWC PACIFIC CA (USA)" userId="802230dc-da13-4caa-9b75-cf409dfca0cb" providerId="ADAL" clId="{14E4AD74-DF90-47DB-80EB-A94A3623429B}" dt="2026-05-07T22:28:19.202" v="1075" actId="20577"/>
+        <pc:sldMkLst>
+          <pc:docMk/>
+          <pc:sldMk cId="331372439" sldId="266"/>
+        </pc:sldMkLst>
+        <pc:spChg chg="mod">
+          <ac:chgData name="Rooney, Bryce Edward (53520) CIV USN NIWC PACIFIC CA (USA)" userId="802230dc-da13-4caa-9b75-cf409dfca0cb" providerId="ADAL" clId="{14E4AD74-DF90-47DB-80EB-A94A3623429B}" dt="2026-05-07T22:28:19.202" v="1075" actId="20577"/>
+          <ac:spMkLst>
+            <pc:docMk/>
+            <pc:sldMk cId="331372439" sldId="266"/>
+            <ac:spMk id="14" creationId="{DC779FE1-AC4B-B488-A0E6-0869FB038228}"/>
+          </ac:spMkLst>
+        </pc:spChg>
+        <pc:picChg chg="del">
+          <ac:chgData name="Rooney, Bryce Edward (53520) CIV USN NIWC PACIFIC CA (USA)" userId="802230dc-da13-4caa-9b75-cf409dfca0cb" providerId="ADAL" clId="{14E4AD74-DF90-47DB-80EB-A94A3623429B}" dt="2026-05-07T21:18:23.390" v="0" actId="478"/>
+          <ac:picMkLst>
+            <pc:docMk/>
+            <pc:sldMk cId="331372439" sldId="266"/>
+            <ac:picMk id="3" creationId="{435219F0-6DE1-D15B-DBD9-D9FE1B5AB25A}"/>
+          </ac:picMkLst>
+        </pc:picChg>
+        <pc:picChg chg="add mod">
+          <ac:chgData name="Rooney, Bryce Edward (53520) CIV USN NIWC PACIFIC CA (USA)" userId="802230dc-da13-4caa-9b75-cf409dfca0cb" providerId="ADAL" clId="{14E4AD74-DF90-47DB-80EB-A94A3623429B}" dt="2026-05-07T21:18:27.315" v="2" actId="1076"/>
+          <ac:picMkLst>
+            <pc:docMk/>
+            <pc:sldMk cId="331372439" sldId="266"/>
+            <ac:picMk id="5" creationId="{D24C00B3-07C1-771D-E661-7992508B7C13}"/>
+          </ac:picMkLst>
+        </pc:picChg>
+      </pc:sldChg>
+      <pc:sldChg chg="modSp mod">
+        <pc:chgData name="Rooney, Bryce Edward (53520) CIV USN NIWC PACIFIC CA (USA)" userId="802230dc-da13-4caa-9b75-cf409dfca0cb" providerId="ADAL" clId="{14E4AD74-DF90-47DB-80EB-A94A3623429B}" dt="2026-05-07T22:01:20.444" v="434" actId="20577"/>
+        <pc:sldMkLst>
+          <pc:docMk/>
+          <pc:sldMk cId="1001622560" sldId="268"/>
+        </pc:sldMkLst>
+        <pc:spChg chg="mod">
+          <ac:chgData name="Rooney, Bryce Edward (53520) CIV USN NIWC PACIFIC CA (USA)" userId="802230dc-da13-4caa-9b75-cf409dfca0cb" providerId="ADAL" clId="{14E4AD74-DF90-47DB-80EB-A94A3623429B}" dt="2026-05-07T22:01:20.444" v="434" actId="20577"/>
+          <ac:spMkLst>
+            <pc:docMk/>
+            <pc:sldMk cId="1001622560" sldId="268"/>
+            <ac:spMk id="3" creationId="{97FA8454-F80C-0215-BB29-E1C218B7C933}"/>
           </ac:spMkLst>
         </pc:spChg>
       </pc:sldChg>
       <pc:sldChg chg="modSp mod">
-        <pc:chgData name="Rooney, Bryce Edward (53520) CIV USN NIWC PACIFIC CA (USA)" userId="802230dc-da13-4caa-9b75-cf409dfca0cb" providerId="ADAL" clId="{408BF972-AAF0-4B87-AAE0-4584C3E8F925}" dt="2026-03-31T21:36:26.590" v="354" actId="313"/>
+        <pc:chgData name="Rooney, Bryce Edward (53520) CIV USN NIWC PACIFIC CA (USA)" userId="802230dc-da13-4caa-9b75-cf409dfca0cb" providerId="ADAL" clId="{14E4AD74-DF90-47DB-80EB-A94A3623429B}" dt="2026-05-07T22:02:42.174" v="460" actId="20577"/>
         <pc:sldMkLst>
           <pc:docMk/>
-          <pc:sldMk cId="3639129086" sldId="258"/>
+          <pc:sldMk cId="967501478" sldId="269"/>
         </pc:sldMkLst>
         <pc:spChg chg="mod">
-          <ac:chgData name="Rooney, Bryce Edward (53520) CIV USN NIWC PACIFIC CA (USA)" userId="802230dc-da13-4caa-9b75-cf409dfca0cb" providerId="ADAL" clId="{408BF972-AAF0-4B87-AAE0-4584C3E8F925}" dt="2026-03-31T21:36:26.590" v="354" actId="313"/>
+          <ac:chgData name="Rooney, Bryce Edward (53520) CIV USN NIWC PACIFIC CA (USA)" userId="802230dc-da13-4caa-9b75-cf409dfca0cb" providerId="ADAL" clId="{14E4AD74-DF90-47DB-80EB-A94A3623429B}" dt="2026-05-07T22:02:42.174" v="460" actId="20577"/>
           <ac:spMkLst>
             <pc:docMk/>
-            <pc:sldMk cId="3639129086" sldId="258"/>
-            <ac:spMk id="3" creationId="{385A155F-AFE3-CC5F-DB02-E9B060701EC0}"/>
+            <pc:sldMk cId="967501478" sldId="269"/>
+            <ac:spMk id="2" creationId="{2D909B1D-3B3B-11E5-06CB-5D00EBCD7B0C}"/>
           </ac:spMkLst>
         </pc:spChg>
       </pc:sldChg>
       <pc:sldChg chg="modSp mod">
-        <pc:chgData name="Rooney, Bryce Edward (53520) CIV USN NIWC PACIFIC CA (USA)" userId="802230dc-da13-4caa-9b75-cf409dfca0cb" providerId="ADAL" clId="{408BF972-AAF0-4B87-AAE0-4584C3E8F925}" dt="2026-03-31T21:41:18.573" v="925" actId="20577"/>
+        <pc:chgData name="Rooney, Bryce Edward (53520) CIV USN NIWC PACIFIC CA (USA)" userId="802230dc-da13-4caa-9b75-cf409dfca0cb" providerId="ADAL" clId="{14E4AD74-DF90-47DB-80EB-A94A3623429B}" dt="2026-05-07T22:31:15.661" v="1232" actId="1076"/>
         <pc:sldMkLst>
           <pc:docMk/>
-          <pc:sldMk cId="2549184229" sldId="260"/>
+          <pc:sldMk cId="3184687460" sldId="270"/>
         </pc:sldMkLst>
         <pc:spChg chg="mod">
-          <ac:chgData name="Rooney, Bryce Edward (53520) CIV USN NIWC PACIFIC CA (USA)" userId="802230dc-da13-4caa-9b75-cf409dfca0cb" providerId="ADAL" clId="{408BF972-AAF0-4B87-AAE0-4584C3E8F925}" dt="2026-03-31T21:41:18.573" v="925" actId="20577"/>
+          <ac:chgData name="Rooney, Bryce Edward (53520) CIV USN NIWC PACIFIC CA (USA)" userId="802230dc-da13-4caa-9b75-cf409dfca0cb" providerId="ADAL" clId="{14E4AD74-DF90-47DB-80EB-A94A3623429B}" dt="2026-05-07T22:31:15.661" v="1232" actId="1076"/>
           <ac:spMkLst>
             <pc:docMk/>
-            <pc:sldMk cId="2549184229" sldId="260"/>
-            <ac:spMk id="3" creationId="{00AA322A-38FF-0EFA-C77A-16CA9991EC42}"/>
+            <pc:sldMk cId="3184687460" sldId="270"/>
+            <ac:spMk id="7" creationId="{1B0AED33-CE42-BE71-5C63-18A838072787}"/>
           </ac:spMkLst>
         </pc:spChg>
+        <pc:spChg chg="mod">
+          <ac:chgData name="Rooney, Bryce Edward (53520) CIV USN NIWC PACIFIC CA (USA)" userId="802230dc-da13-4caa-9b75-cf409dfca0cb" providerId="ADAL" clId="{14E4AD74-DF90-47DB-80EB-A94A3623429B}" dt="2026-05-07T22:31:10.617" v="1229" actId="20577"/>
+          <ac:spMkLst>
+            <pc:docMk/>
+            <pc:sldMk cId="3184687460" sldId="270"/>
+            <ac:spMk id="9" creationId="{D70E59AB-06E1-E8D7-E432-2A8DC551D754}"/>
+          </ac:spMkLst>
+        </pc:spChg>
+      </pc:sldChg>
+      <pc:sldChg chg="addSp modSp mod">
+        <pc:chgData name="Rooney, Bryce Edward (53520) CIV USN NIWC PACIFIC CA (USA)" userId="802230dc-da13-4caa-9b75-cf409dfca0cb" providerId="ADAL" clId="{14E4AD74-DF90-47DB-80EB-A94A3623429B}" dt="2026-05-07T22:23:10.216" v="996" actId="1076"/>
+        <pc:sldMkLst>
+          <pc:docMk/>
+          <pc:sldMk cId="2902484084" sldId="271"/>
+        </pc:sldMkLst>
+        <pc:spChg chg="add mod">
+          <ac:chgData name="Rooney, Bryce Edward (53520) CIV USN NIWC PACIFIC CA (USA)" userId="802230dc-da13-4caa-9b75-cf409dfca0cb" providerId="ADAL" clId="{14E4AD74-DF90-47DB-80EB-A94A3623429B}" dt="2026-05-07T22:23:10.216" v="996" actId="1076"/>
+          <ac:spMkLst>
+            <pc:docMk/>
+            <pc:sldMk cId="2902484084" sldId="271"/>
+            <ac:spMk id="7" creationId="{F981C5F4-A7D3-075A-2B97-180AB86758D3}"/>
+          </ac:spMkLst>
+        </pc:spChg>
+        <pc:picChg chg="add mod">
+          <ac:chgData name="Rooney, Bryce Edward (53520) CIV USN NIWC PACIFIC CA (USA)" userId="802230dc-da13-4caa-9b75-cf409dfca0cb" providerId="ADAL" clId="{14E4AD74-DF90-47DB-80EB-A94A3623429B}" dt="2026-05-07T22:07:43.450" v="468" actId="1076"/>
+          <ac:picMkLst>
+            <pc:docMk/>
+            <pc:sldMk cId="2902484084" sldId="271"/>
+            <ac:picMk id="4" creationId="{A061006B-D9CC-5E1F-66B1-CF31C1E6BF94}"/>
+          </ac:picMkLst>
+        </pc:picChg>
+        <pc:picChg chg="add mod">
+          <ac:chgData name="Rooney, Bryce Edward (53520) CIV USN NIWC PACIFIC CA (USA)" userId="802230dc-da13-4caa-9b75-cf409dfca0cb" providerId="ADAL" clId="{14E4AD74-DF90-47DB-80EB-A94A3623429B}" dt="2026-05-07T22:07:44.752" v="469" actId="1076"/>
+          <ac:picMkLst>
+            <pc:docMk/>
+            <pc:sldMk cId="2902484084" sldId="271"/>
+            <ac:picMk id="6" creationId="{064F98BF-12F0-A10C-55A9-8BFF6B9C4F6A}"/>
+          </ac:picMkLst>
+        </pc:picChg>
+      </pc:sldChg>
+      <pc:sldChg chg="addSp modSp mod">
+        <pc:chgData name="Rooney, Bryce Edward (53520) CIV USN NIWC PACIFIC CA (USA)" userId="802230dc-da13-4caa-9b75-cf409dfca0cb" providerId="ADAL" clId="{14E4AD74-DF90-47DB-80EB-A94A3623429B}" dt="2026-05-07T22:26:44.178" v="1002" actId="1076"/>
+        <pc:sldMkLst>
+          <pc:docMk/>
+          <pc:sldMk cId="3617148153" sldId="272"/>
+        </pc:sldMkLst>
+        <pc:picChg chg="add mod">
+          <ac:chgData name="Rooney, Bryce Edward (53520) CIV USN NIWC PACIFIC CA (USA)" userId="802230dc-da13-4caa-9b75-cf409dfca0cb" providerId="ADAL" clId="{14E4AD74-DF90-47DB-80EB-A94A3623429B}" dt="2026-05-07T22:26:44.178" v="1002" actId="1076"/>
+          <ac:picMkLst>
+            <pc:docMk/>
+            <pc:sldMk cId="3617148153" sldId="272"/>
+            <ac:picMk id="4" creationId="{C75ACC9B-B187-BEC6-D922-B8A348C7106A}"/>
+          </ac:picMkLst>
+        </pc:picChg>
+      </pc:sldChg>
+      <pc:sldChg chg="addSp delSp modSp add mod">
+        <pc:chgData name="Rooney, Bryce Edward (53520) CIV USN NIWC PACIFIC CA (USA)" userId="802230dc-da13-4caa-9b75-cf409dfca0cb" providerId="ADAL" clId="{14E4AD74-DF90-47DB-80EB-A94A3623429B}" dt="2026-05-07T22:29:09.298" v="1083" actId="1076"/>
+        <pc:sldMkLst>
+          <pc:docMk/>
+          <pc:sldMk cId="2111630354" sldId="274"/>
+        </pc:sldMkLst>
+        <pc:spChg chg="mod">
+          <ac:chgData name="Rooney, Bryce Edward (53520) CIV USN NIWC PACIFIC CA (USA)" userId="802230dc-da13-4caa-9b75-cf409dfca0cb" providerId="ADAL" clId="{14E4AD74-DF90-47DB-80EB-A94A3623429B}" dt="2026-05-07T21:45:29.161" v="47" actId="1076"/>
+          <ac:spMkLst>
+            <pc:docMk/>
+            <pc:sldMk cId="2111630354" sldId="274"/>
+            <ac:spMk id="2" creationId="{BD807B94-783F-321B-210B-042E2754F32B}"/>
+          </ac:spMkLst>
+        </pc:spChg>
+        <pc:spChg chg="add mod">
+          <ac:chgData name="Rooney, Bryce Edward (53520) CIV USN NIWC PACIFIC CA (USA)" userId="802230dc-da13-4caa-9b75-cf409dfca0cb" providerId="ADAL" clId="{14E4AD74-DF90-47DB-80EB-A94A3623429B}" dt="2026-05-07T22:28:56.014" v="1080" actId="1076"/>
+          <ac:spMkLst>
+            <pc:docMk/>
+            <pc:sldMk cId="2111630354" sldId="274"/>
+            <ac:spMk id="3" creationId="{194578F6-62C3-5038-979B-60A62E088FEF}"/>
+          </ac:spMkLst>
+        </pc:spChg>
+        <pc:spChg chg="add mod">
+          <ac:chgData name="Rooney, Bryce Edward (53520) CIV USN NIWC PACIFIC CA (USA)" userId="802230dc-da13-4caa-9b75-cf409dfca0cb" providerId="ADAL" clId="{14E4AD74-DF90-47DB-80EB-A94A3623429B}" dt="2026-05-07T22:29:09.298" v="1083" actId="1076"/>
+          <ac:spMkLst>
+            <pc:docMk/>
+            <pc:sldMk cId="2111630354" sldId="274"/>
+            <ac:spMk id="4" creationId="{13F79579-C895-36D9-923C-2B7524746A47}"/>
+          </ac:spMkLst>
+        </pc:spChg>
+        <pc:picChg chg="del">
+          <ac:chgData name="Rooney, Bryce Edward (53520) CIV USN NIWC PACIFIC CA (USA)" userId="802230dc-da13-4caa-9b75-cf409dfca0cb" providerId="ADAL" clId="{14E4AD74-DF90-47DB-80EB-A94A3623429B}" dt="2026-05-07T21:45:15.301" v="18" actId="478"/>
+          <ac:picMkLst>
+            <pc:docMk/>
+            <pc:sldMk cId="2111630354" sldId="274"/>
+            <ac:picMk id="7" creationId="{6698483E-B614-7732-91DD-B2659C6C7639}"/>
+          </ac:picMkLst>
+        </pc:picChg>
+        <pc:picChg chg="del">
+          <ac:chgData name="Rooney, Bryce Edward (53520) CIV USN NIWC PACIFIC CA (USA)" userId="802230dc-da13-4caa-9b75-cf409dfca0cb" providerId="ADAL" clId="{14E4AD74-DF90-47DB-80EB-A94A3623429B}" dt="2026-05-07T21:45:15.819" v="19" actId="478"/>
+          <ac:picMkLst>
+            <pc:docMk/>
+            <pc:sldMk cId="2111630354" sldId="274"/>
+            <ac:picMk id="11" creationId="{1D2D851B-E512-EA02-A650-48C30EDA784F}"/>
+          </ac:picMkLst>
+        </pc:picChg>
       </pc:sldChg>
     </pc:docChg>
   </pc:docChgLst>
@@ -338,7 +486,7 @@
           <a:p>
             <a:fld id="{F55AF960-87D0-487C-BD50-BC6BA87EEF29}" type="datetimeFigureOut">
               <a:rPr lang="en-US" smtClean="0"/>
-              <a:t>5/6/2026</a:t>
+              <a:t>5/7/2026</a:t>
             </a:fld>
             <a:endParaRPr lang="en-US"/>
           </a:p>
@@ -536,7 +684,7 @@
           <a:p>
             <a:fld id="{F55AF960-87D0-487C-BD50-BC6BA87EEF29}" type="datetimeFigureOut">
               <a:rPr lang="en-US" smtClean="0"/>
-              <a:t>5/6/2026</a:t>
+              <a:t>5/7/2026</a:t>
             </a:fld>
             <a:endParaRPr lang="en-US"/>
           </a:p>
@@ -744,7 +892,7 @@
           <a:p>
             <a:fld id="{F55AF960-87D0-487C-BD50-BC6BA87EEF29}" type="datetimeFigureOut">
               <a:rPr lang="en-US" smtClean="0"/>
-              <a:t>5/6/2026</a:t>
+              <a:t>5/7/2026</a:t>
             </a:fld>
             <a:endParaRPr lang="en-US"/>
           </a:p>
@@ -942,7 +1090,7 @@
           <a:p>
             <a:fld id="{F55AF960-87D0-487C-BD50-BC6BA87EEF29}" type="datetimeFigureOut">
               <a:rPr lang="en-US" smtClean="0"/>
-              <a:t>5/6/2026</a:t>
+              <a:t>5/7/2026</a:t>
             </a:fld>
             <a:endParaRPr lang="en-US"/>
           </a:p>
@@ -1217,7 +1365,7 @@
           <a:p>
             <a:fld id="{F55AF960-87D0-487C-BD50-BC6BA87EEF29}" type="datetimeFigureOut">
               <a:rPr lang="en-US" smtClean="0"/>
-              <a:t>5/6/2026</a:t>
+              <a:t>5/7/2026</a:t>
             </a:fld>
             <a:endParaRPr lang="en-US"/>
           </a:p>
@@ -1482,7 +1630,7 @@
           <a:p>
             <a:fld id="{F55AF960-87D0-487C-BD50-BC6BA87EEF29}" type="datetimeFigureOut">
               <a:rPr lang="en-US" smtClean="0"/>
-              <a:t>5/6/2026</a:t>
+              <a:t>5/7/2026</a:t>
             </a:fld>
             <a:endParaRPr lang="en-US"/>
           </a:p>
@@ -1894,7 +2042,7 @@
           <a:p>
             <a:fld id="{F55AF960-87D0-487C-BD50-BC6BA87EEF29}" type="datetimeFigureOut">
               <a:rPr lang="en-US" smtClean="0"/>
-              <a:t>5/6/2026</a:t>
+              <a:t>5/7/2026</a:t>
             </a:fld>
             <a:endParaRPr lang="en-US"/>
           </a:p>
@@ -2035,7 +2183,7 @@
           <a:p>
             <a:fld id="{F55AF960-87D0-487C-BD50-BC6BA87EEF29}" type="datetimeFigureOut">
               <a:rPr lang="en-US" smtClean="0"/>
-              <a:t>5/6/2026</a:t>
+              <a:t>5/7/2026</a:t>
             </a:fld>
             <a:endParaRPr lang="en-US"/>
           </a:p>
@@ -2148,7 +2296,7 @@
           <a:p>
             <a:fld id="{F55AF960-87D0-487C-BD50-BC6BA87EEF29}" type="datetimeFigureOut">
               <a:rPr lang="en-US" smtClean="0"/>
-              <a:t>5/6/2026</a:t>
+              <a:t>5/7/2026</a:t>
             </a:fld>
             <a:endParaRPr lang="en-US"/>
           </a:p>
@@ -2459,7 +2607,7 @@
           <a:p>
             <a:fld id="{F55AF960-87D0-487C-BD50-BC6BA87EEF29}" type="datetimeFigureOut">
               <a:rPr lang="en-US" smtClean="0"/>
-              <a:t>5/6/2026</a:t>
+              <a:t>5/7/2026</a:t>
             </a:fld>
             <a:endParaRPr lang="en-US"/>
           </a:p>
@@ -2747,7 +2895,7 @@
           <a:p>
             <a:fld id="{F55AF960-87D0-487C-BD50-BC6BA87EEF29}" type="datetimeFigureOut">
               <a:rPr lang="en-US" smtClean="0"/>
-              <a:t>5/6/2026</a:t>
+              <a:t>5/7/2026</a:t>
             </a:fld>
             <a:endParaRPr lang="en-US"/>
           </a:p>
@@ -2988,7 +3136,7 @@
           <a:p>
             <a:fld id="{F55AF960-87D0-487C-BD50-BC6BA87EEF29}" type="datetimeFigureOut">
               <a:rPr lang="en-US" smtClean="0"/>
-              <a:t>5/6/2026</a:t>
+              <a:t>5/7/2026</a:t>
             </a:fld>
             <a:endParaRPr lang="en-US"/>
           </a:p>
@@ -3709,7 +3857,7 @@
         <p:cNvPr id="1" name="">
           <a:extLst>
             <a:ext uri="{FF2B5EF4-FFF2-40B4-BE49-F238E27FC236}">
-              <a16:creationId xmlns:a16="http://schemas.microsoft.com/office/drawing/2014/main" id="{DF04636A-5D4D-C4E7-8D4A-9CCC92F8049B}"/>
+              <a16:creationId xmlns:a16="http://schemas.microsoft.com/office/drawing/2014/main" id="{388C1669-16E2-843B-AB4C-A9B1ACE92641}"/>
             </a:ext>
           </a:extLst>
         </p:cNvPr>
@@ -3729,7 +3877,7 @@
           <p:cNvPr id="8" name="Rectangle 7">
             <a:extLst>
               <a:ext uri="{FF2B5EF4-FFF2-40B4-BE49-F238E27FC236}">
-                <a16:creationId xmlns:a16="http://schemas.microsoft.com/office/drawing/2014/main" id="{017D1FD6-55B8-C158-46BF-80A412A15D95}"/>
+                <a16:creationId xmlns:a16="http://schemas.microsoft.com/office/drawing/2014/main" id="{313D6AE3-6144-FC9A-C6BA-28DD04603A43}"/>
               </a:ext>
               <a:ext uri="{C183D7F6-B498-43B3-948B-1728B52AA6E4}">
                 <adec:decorative xmlns:adec="http://schemas.microsoft.com/office/drawing/2017/decorative" val="1"/>
@@ -3799,7 +3947,7 @@
           <p:cNvPr id="2" name="Title 1">
             <a:extLst>
               <a:ext uri="{FF2B5EF4-FFF2-40B4-BE49-F238E27FC236}">
-                <a16:creationId xmlns:a16="http://schemas.microsoft.com/office/drawing/2014/main" id="{E9E50285-E49A-946B-971A-FD65171F3516}"/>
+                <a16:creationId xmlns:a16="http://schemas.microsoft.com/office/drawing/2014/main" id="{BD807B94-783F-321B-210B-042E2754F32B}"/>
               </a:ext>
             </a:extLst>
           </p:cNvPr>
@@ -3812,7 +3960,7 @@
         </p:nvSpPr>
         <p:spPr>
           <a:xfrm>
-            <a:off x="-587479" y="585584"/>
+            <a:off x="-565665" y="700777"/>
             <a:ext cx="6054213" cy="1325563"/>
           </a:xfrm>
         </p:spPr>
@@ -3829,7 +3977,7 @@
                   <a:schemeClr val="bg1"/>
                 </a:solidFill>
               </a:rPr>
-              <a:t>Test Approach</a:t>
+              <a:t>Upcoming Milestones</a:t>
             </a:r>
           </a:p>
         </p:txBody>
@@ -3839,7 +3987,7 @@
           <p:cNvPr id="10" name="Straight Connector 9">
             <a:extLst>
               <a:ext uri="{FF2B5EF4-FFF2-40B4-BE49-F238E27FC236}">
-                <a16:creationId xmlns:a16="http://schemas.microsoft.com/office/drawing/2014/main" id="{F9F13B51-0B0A-EA1E-ACA5-D6C0066C6C2E}"/>
+                <a16:creationId xmlns:a16="http://schemas.microsoft.com/office/drawing/2014/main" id="{96912272-B784-5225-E3F9-8DF3BFD4436B}"/>
               </a:ext>
               <a:ext uri="{C183D7F6-B498-43B3-948B-1728B52AA6E4}">
                 <adec:decorative xmlns:adec="http://schemas.microsoft.com/office/drawing/2017/decorative" val="1"/>
@@ -3891,7 +4039,7 @@
           <p:cNvPr id="12" name="Rectangle 11">
             <a:extLst>
               <a:ext uri="{FF2B5EF4-FFF2-40B4-BE49-F238E27FC236}">
-                <a16:creationId xmlns:a16="http://schemas.microsoft.com/office/drawing/2014/main" id="{F23A146D-1CB4-94CA-8DB3-759CF41A2C0D}"/>
+                <a16:creationId xmlns:a16="http://schemas.microsoft.com/office/drawing/2014/main" id="{446525DB-2487-CEB6-325B-337DF323F0B1}"/>
               </a:ext>
               <a:ext uri="{C183D7F6-B498-43B3-948B-1728B52AA6E4}">
                 <adec:decorative xmlns:adec="http://schemas.microsoft.com/office/drawing/2017/decorative" val="1"/>
@@ -3949,61 +4097,31 @@
           </a:p>
         </p:txBody>
       </p:sp>
-      <p:pic>
-        <p:nvPicPr>
-          <p:cNvPr id="6" name="Picture 5">
-            <a:extLst>
-              <a:ext uri="{FF2B5EF4-FFF2-40B4-BE49-F238E27FC236}">
-                <a16:creationId xmlns:a16="http://schemas.microsoft.com/office/drawing/2014/main" id="{A4315769-5CD9-2FB8-AE8C-5AE8616CAAD5}"/>
-              </a:ext>
-            </a:extLst>
-          </p:cNvPr>
-          <p:cNvPicPr>
-            <a:picLocks noChangeAspect="1"/>
-          </p:cNvPicPr>
-          <p:nvPr/>
-        </p:nvPicPr>
-        <p:blipFill>
-          <a:blip r:embed="rId2"/>
-          <a:stretch>
-            <a:fillRect/>
-          </a:stretch>
-        </p:blipFill>
+      <p:sp>
+        <p:nvSpPr>
+          <p:cNvPr id="3" name="Content Placeholder 2">
+            <a:extLst>
+              <a:ext uri="{FF2B5EF4-FFF2-40B4-BE49-F238E27FC236}">
+                <a16:creationId xmlns:a16="http://schemas.microsoft.com/office/drawing/2014/main" id="{194578F6-62C3-5038-979B-60A62E088FEF}"/>
+              </a:ext>
+            </a:extLst>
+          </p:cNvPr>
+          <p:cNvSpPr>
+            <a:spLocks noGrp="1"/>
+          </p:cNvSpPr>
+          <p:nvPr>
+            <p:ph idx="1"/>
+          </p:nvPr>
+        </p:nvSpPr>
         <p:spPr>
           <a:xfrm>
-            <a:off x="3882183" y="2282107"/>
-            <a:ext cx="7858412" cy="2447548"/>
-          </a:xfrm>
-          <a:prstGeom prst="rect">
-            <a:avLst/>
-          </a:prstGeom>
-        </p:spPr>
-      </p:pic>
-      <p:sp>
-        <p:nvSpPr>
-          <p:cNvPr id="7" name="Content Placeholder 2">
-            <a:extLst>
-              <a:ext uri="{FF2B5EF4-FFF2-40B4-BE49-F238E27FC236}">
-                <a16:creationId xmlns:a16="http://schemas.microsoft.com/office/drawing/2014/main" id="{1B0AED33-CE42-BE71-5C63-18A838072787}"/>
-              </a:ext>
-            </a:extLst>
-          </p:cNvPr>
-          <p:cNvSpPr>
-            <a:spLocks noGrp="1"/>
-          </p:cNvSpPr>
-          <p:nvPr>
-            <p:ph idx="1"/>
-          </p:nvPr>
-        </p:nvSpPr>
-        <p:spPr>
-          <a:xfrm>
-            <a:off x="775477" y="4907936"/>
-            <a:ext cx="10355655" cy="1656590"/>
+            <a:off x="789789" y="2216990"/>
+            <a:ext cx="5715786" cy="3711571"/>
           </a:xfrm>
         </p:spPr>
         <p:txBody>
           <a:bodyPr>
-            <a:normAutofit lnSpcReduction="10000"/>
+            <a:normAutofit/>
           </a:bodyPr>
           <a:lstStyle/>
           <a:p>
@@ -4013,12 +4131,42 @@
               </a:lnSpc>
             </a:pPr>
             <a:r>
-              <a:rPr lang="en-US" sz="2000" dirty="0">
+              <a:rPr lang="en-US" sz="2800" dirty="0">
                 <a:solidFill>
                   <a:schemeClr val="bg1"/>
                 </a:solidFill>
               </a:rPr>
-              <a:t>Other Interpretation Questions:</a:t>
+              <a:t>Test Execution Dates</a:t>
+            </a:r>
+          </a:p>
+          <a:p>
+            <a:pPr lvl="2">
+              <a:lnSpc>
+                <a:spcPct val="100000"/>
+              </a:lnSpc>
+            </a:pPr>
+            <a:r>
+              <a:rPr lang="en-US" sz="1800" dirty="0">
+                <a:solidFill>
+                  <a:schemeClr val="bg1"/>
+                </a:solidFill>
+              </a:rPr>
+              <a:t>Anti-Jam / Range: 8 May</a:t>
+            </a:r>
+          </a:p>
+          <a:p>
+            <a:pPr lvl="2">
+              <a:lnSpc>
+                <a:spcPct val="100000"/>
+              </a:lnSpc>
+            </a:pPr>
+            <a:r>
+              <a:rPr lang="en-US" sz="1800" dirty="0">
+                <a:solidFill>
+                  <a:schemeClr val="bg1"/>
+                </a:solidFill>
+              </a:rPr>
+              <a:t>Geolocation / CAF: 11 May</a:t>
             </a:r>
           </a:p>
           <a:p>
@@ -4028,12 +4176,27 @@
               </a:lnSpc>
             </a:pPr>
             <a:r>
-              <a:rPr lang="en-US" sz="2000" dirty="0">
+              <a:rPr lang="en-US" dirty="0">
                 <a:solidFill>
                   <a:schemeClr val="bg1"/>
                 </a:solidFill>
               </a:rPr>
-              <a:t>At set SF how effective is changing the BW?</a:t>
+              <a:t>Paper Drafting Full Effort</a:t>
+            </a:r>
+          </a:p>
+          <a:p>
+            <a:pPr lvl="2">
+              <a:lnSpc>
+                <a:spcPct val="100000"/>
+              </a:lnSpc>
+            </a:pPr>
+            <a:r>
+              <a:rPr lang="en-US" sz="1800" dirty="0">
+                <a:solidFill>
+                  <a:schemeClr val="bg1"/>
+                </a:solidFill>
+              </a:rPr>
+              <a:t>15 May</a:t>
             </a:r>
           </a:p>
           <a:p>
@@ -4043,52 +4206,28 @@
               </a:lnSpc>
             </a:pPr>
             <a:r>
-              <a:rPr lang="en-US" sz="2000" dirty="0">
+              <a:rPr lang="en-US" dirty="0">
                 <a:solidFill>
                   <a:schemeClr val="bg1"/>
                 </a:solidFill>
               </a:rPr>
-              <a:t>At Set BW, how effective is changing the SF?</a:t>
-            </a:r>
-          </a:p>
-          <a:p>
-            <a:pPr lvl="1">
+              <a:t>All Data/Metrics exported from Lab</a:t>
+            </a:r>
+          </a:p>
+          <a:p>
+            <a:pPr lvl="2">
               <a:lnSpc>
                 <a:spcPct val="100000"/>
               </a:lnSpc>
             </a:pPr>
             <a:r>
-              <a:rPr lang="en-US" sz="2000" dirty="0">
+              <a:rPr lang="en-US" sz="1800" dirty="0">
                 <a:solidFill>
                   <a:schemeClr val="bg1"/>
                 </a:solidFill>
               </a:rPr>
-              <a:t>At set effective data rate, compare the performance of small SF and short BW against high SF and long BW. (SF7 @ ~25kHz vs SF12 @ 500kHz)</a:t>
-            </a:r>
-          </a:p>
-          <a:p>
-            <a:pPr lvl="1">
-              <a:lnSpc>
-                <a:spcPct val="100000"/>
-              </a:lnSpc>
-            </a:pPr>
-            <a:endParaRPr lang="en-US" sz="2000" dirty="0">
-              <a:solidFill>
-                <a:schemeClr val="bg1"/>
-              </a:solidFill>
-            </a:endParaRPr>
-          </a:p>
-          <a:p>
-            <a:pPr lvl="1">
-              <a:lnSpc>
-                <a:spcPct val="100000"/>
-              </a:lnSpc>
-            </a:pPr>
-            <a:endParaRPr lang="en-US" sz="1800" dirty="0">
-              <a:solidFill>
-                <a:schemeClr val="bg1"/>
-              </a:solidFill>
-            </a:endParaRPr>
+              <a:t>May 19</a:t>
+            </a:r>
           </a:p>
           <a:p>
             <a:pPr marL="457200" lvl="1" indent="0">
@@ -4104,10 +4243,10 @@
       </p:sp>
       <p:sp>
         <p:nvSpPr>
-          <p:cNvPr id="9" name="Content Placeholder 2">
-            <a:extLst>
-              <a:ext uri="{FF2B5EF4-FFF2-40B4-BE49-F238E27FC236}">
-                <a16:creationId xmlns:a16="http://schemas.microsoft.com/office/drawing/2014/main" id="{D70E59AB-06E1-E8D7-E432-2A8DC551D754}"/>
+          <p:cNvPr id="4" name="Content Placeholder 2">
+            <a:extLst>
+              <a:ext uri="{FF2B5EF4-FFF2-40B4-BE49-F238E27FC236}">
+                <a16:creationId xmlns:a16="http://schemas.microsoft.com/office/drawing/2014/main" id="{13F79579-C895-36D9-923C-2B7524746A47}"/>
               </a:ext>
             </a:extLst>
           </p:cNvPr>
@@ -4118,8 +4257,8 @@
         </p:nvSpPr>
         <p:spPr>
           <a:xfrm>
-            <a:off x="-167534" y="2381539"/>
-            <a:ext cx="3923511" cy="2348116"/>
+            <a:off x="6505575" y="3636239"/>
+            <a:ext cx="5023407" cy="3711571"/>
           </a:xfrm>
           <a:prstGeom prst="rect">
             <a:avLst/>
@@ -4300,12 +4439,27 @@
               </a:lnSpc>
             </a:pPr>
             <a:r>
-              <a:rPr lang="en-US" sz="2000" dirty="0">
+              <a:rPr lang="en-US" dirty="0">
                 <a:solidFill>
                   <a:schemeClr val="bg1"/>
                 </a:solidFill>
               </a:rPr>
-              <a:t>Iterative testing against various LoRa Configurations</a:t>
+              <a:t>Paper First Draft</a:t>
+            </a:r>
+          </a:p>
+          <a:p>
+            <a:pPr lvl="2">
+              <a:lnSpc>
+                <a:spcPct val="100000"/>
+              </a:lnSpc>
+            </a:pPr>
+            <a:r>
+              <a:rPr lang="en-US" sz="1800" dirty="0">
+                <a:solidFill>
+                  <a:schemeClr val="bg1"/>
+                </a:solidFill>
+              </a:rPr>
+              <a:t>May 24</a:t>
             </a:r>
           </a:p>
           <a:p>
@@ -4315,13 +4469,474 @@
               </a:lnSpc>
             </a:pPr>
             <a:r>
+              <a:rPr lang="en-US" dirty="0">
+                <a:solidFill>
+                  <a:schemeClr val="bg1"/>
+                </a:solidFill>
+              </a:rPr>
+              <a:t>Video Presentation Full effort </a:t>
+            </a:r>
+            <a:endParaRPr lang="en-US" sz="1800" dirty="0">
+              <a:solidFill>
+                <a:schemeClr val="bg1"/>
+              </a:solidFill>
+            </a:endParaRPr>
+          </a:p>
+          <a:p>
+            <a:pPr lvl="2">
+              <a:lnSpc>
+                <a:spcPct val="100000"/>
+              </a:lnSpc>
+            </a:pPr>
+            <a:r>
+              <a:rPr lang="en-US" sz="1800" dirty="0">
+                <a:solidFill>
+                  <a:schemeClr val="bg1"/>
+                </a:solidFill>
+              </a:rPr>
+              <a:t>May 29</a:t>
+            </a:r>
+          </a:p>
+          <a:p>
+            <a:pPr lvl="1">
+              <a:lnSpc>
+                <a:spcPct val="100000"/>
+              </a:lnSpc>
+            </a:pPr>
+            <a:r>
+              <a:rPr lang="en-US" dirty="0">
+                <a:solidFill>
+                  <a:schemeClr val="bg1"/>
+                </a:solidFill>
+              </a:rPr>
+              <a:t>Paper and Video Submitted</a:t>
+            </a:r>
+          </a:p>
+          <a:p>
+            <a:pPr lvl="2">
+              <a:lnSpc>
+                <a:spcPct val="100000"/>
+              </a:lnSpc>
+            </a:pPr>
+            <a:r>
+              <a:rPr lang="en-US" sz="1800" dirty="0">
+                <a:solidFill>
+                  <a:schemeClr val="bg1"/>
+                </a:solidFill>
+              </a:rPr>
+              <a:t>June 5</a:t>
+            </a:r>
+          </a:p>
+          <a:p>
+            <a:pPr marL="457200" lvl="1" indent="0">
+              <a:buFont typeface="Arial" panose="020B0604020202020204" pitchFamily="34" charset="0"/>
+              <a:buNone/>
+            </a:pPr>
+            <a:endParaRPr lang="en-US" sz="2000" dirty="0">
+              <a:solidFill>
+                <a:schemeClr val="bg1"/>
+              </a:solidFill>
+            </a:endParaRPr>
+          </a:p>
+        </p:txBody>
+      </p:sp>
+    </p:spTree>
+    <p:extLst>
+      <p:ext uri="{BB962C8B-B14F-4D97-AF65-F5344CB8AC3E}">
+        <p14:creationId xmlns:p14="http://schemas.microsoft.com/office/powerpoint/2010/main" val="2111630354"/>
+      </p:ext>
+    </p:extLst>
+  </p:cSld>
+  <p:clrMapOvr>
+    <a:masterClrMapping/>
+  </p:clrMapOvr>
+</p:sld>
+</file>
+
+<file path=ppt/slides/slide11.xml><?xml version="1.0" encoding="utf-8"?>
+<p:sld xmlns:a="http://schemas.openxmlformats.org/drawingml/2006/main" xmlns:r="http://schemas.openxmlformats.org/officeDocument/2006/relationships" xmlns:p="http://schemas.openxmlformats.org/presentationml/2006/main">
+  <p:cSld>
+    <p:bg>
+      <p:bgPr>
+        <a:solidFill>
+          <a:schemeClr val="bg1"/>
+        </a:solidFill>
+        <a:effectLst/>
+      </p:bgPr>
+    </p:bg>
+    <p:spTree>
+      <p:nvGrpSpPr>
+        <p:cNvPr id="1" name="">
+          <a:extLst>
+            <a:ext uri="{FF2B5EF4-FFF2-40B4-BE49-F238E27FC236}">
+              <a16:creationId xmlns:a16="http://schemas.microsoft.com/office/drawing/2014/main" id="{DF04636A-5D4D-C4E7-8D4A-9CCC92F8049B}"/>
+            </a:ext>
+          </a:extLst>
+        </p:cNvPr>
+        <p:cNvGrpSpPr/>
+        <p:nvPr/>
+      </p:nvGrpSpPr>
+      <p:grpSpPr>
+        <a:xfrm>
+          <a:off x="0" y="0"/>
+          <a:ext cx="0" cy="0"/>
+          <a:chOff x="0" y="0"/>
+          <a:chExt cx="0" cy="0"/>
+        </a:xfrm>
+      </p:grpSpPr>
+      <p:sp>
+        <p:nvSpPr>
+          <p:cNvPr id="8" name="Rectangle 7">
+            <a:extLst>
+              <a:ext uri="{FF2B5EF4-FFF2-40B4-BE49-F238E27FC236}">
+                <a16:creationId xmlns:a16="http://schemas.microsoft.com/office/drawing/2014/main" id="{017D1FD6-55B8-C158-46BF-80A412A15D95}"/>
+              </a:ext>
+              <a:ext uri="{C183D7F6-B498-43B3-948B-1728B52AA6E4}">
+                <adec:decorative xmlns:adec="http://schemas.microsoft.com/office/drawing/2017/decorative" val="1"/>
+              </a:ext>
+            </a:extLst>
+          </p:cNvPr>
+          <p:cNvSpPr>
+            <a:spLocks noGrp="1" noRot="1" noChangeAspect="1" noMove="1" noResize="1" noEditPoints="1" noAdjustHandles="1" noChangeArrowheads="1" noChangeShapeType="1" noTextEdit="1"/>
+          </p:cNvSpPr>
+          <p:nvPr>
+            <p:extLst>
+              <p:ext uri="{386F3935-93C4-4BCD-93E2-E3B085C9AB24}">
+                <p16:designElem xmlns:p16="http://schemas.microsoft.com/office/powerpoint/2015/main" val="1"/>
+              </p:ext>
+            </p:extLst>
+          </p:nvPr>
+        </p:nvSpPr>
+        <p:spPr>
+          <a:xfrm>
+            <a:off x="0" y="0"/>
+            <a:ext cx="12192000" cy="6858000"/>
+          </a:xfrm>
+          <a:prstGeom prst="rect">
+            <a:avLst/>
+          </a:prstGeom>
+          <a:solidFill>
+            <a:schemeClr val="tx1">
+              <a:lumMod val="95000"/>
+              <a:lumOff val="5000"/>
+            </a:schemeClr>
+          </a:solidFill>
+          <a:ln>
+            <a:noFill/>
+          </a:ln>
+        </p:spPr>
+        <p:style>
+          <a:lnRef idx="2">
+            <a:schemeClr val="accent1">
+              <a:shade val="50000"/>
+            </a:schemeClr>
+          </a:lnRef>
+          <a:fillRef idx="1">
+            <a:schemeClr val="accent1"/>
+          </a:fillRef>
+          <a:effectRef idx="0">
+            <a:schemeClr val="accent1"/>
+          </a:effectRef>
+          <a:fontRef idx="minor">
+            <a:schemeClr val="lt1"/>
+          </a:fontRef>
+        </p:style>
+        <p:txBody>
+          <a:bodyPr rtlCol="0" anchor="ctr"/>
+          <a:lstStyle/>
+          <a:p>
+            <a:pPr algn="ctr"/>
+            <a:endParaRPr lang="en-US" dirty="0">
+              <a:solidFill>
+                <a:schemeClr val="tx1"/>
+              </a:solidFill>
+            </a:endParaRPr>
+          </a:p>
+        </p:txBody>
+      </p:sp>
+      <p:sp>
+        <p:nvSpPr>
+          <p:cNvPr id="2" name="Title 1">
+            <a:extLst>
+              <a:ext uri="{FF2B5EF4-FFF2-40B4-BE49-F238E27FC236}">
+                <a16:creationId xmlns:a16="http://schemas.microsoft.com/office/drawing/2014/main" id="{E9E50285-E49A-946B-971A-FD65171F3516}"/>
+              </a:ext>
+            </a:extLst>
+          </p:cNvPr>
+          <p:cNvSpPr>
+            <a:spLocks noGrp="1"/>
+          </p:cNvSpPr>
+          <p:nvPr>
+            <p:ph type="title"/>
+          </p:nvPr>
+        </p:nvSpPr>
+        <p:spPr>
+          <a:xfrm>
+            <a:off x="-587479" y="585584"/>
+            <a:ext cx="6054213" cy="1325563"/>
+          </a:xfrm>
+        </p:spPr>
+        <p:txBody>
+          <a:bodyPr anchor="b">
+            <a:normAutofit/>
+          </a:bodyPr>
+          <a:lstStyle/>
+          <a:p>
+            <a:pPr algn="r"/>
+            <a:r>
+              <a:rPr lang="en-US" dirty="0">
+                <a:solidFill>
+                  <a:schemeClr val="bg1"/>
+                </a:solidFill>
+              </a:rPr>
+              <a:t>Test Approach</a:t>
+            </a:r>
+          </a:p>
+        </p:txBody>
+      </p:sp>
+      <p:cxnSp>
+        <p:nvCxnSpPr>
+          <p:cNvPr id="10" name="Straight Connector 9">
+            <a:extLst>
+              <a:ext uri="{FF2B5EF4-FFF2-40B4-BE49-F238E27FC236}">
+                <a16:creationId xmlns:a16="http://schemas.microsoft.com/office/drawing/2014/main" id="{F9F13B51-0B0A-EA1E-ACA5-D6C0066C6C2E}"/>
+              </a:ext>
+              <a:ext uri="{C183D7F6-B498-43B3-948B-1728B52AA6E4}">
+                <adec:decorative xmlns:adec="http://schemas.microsoft.com/office/drawing/2017/decorative" val="1"/>
+              </a:ext>
+            </a:extLst>
+          </p:cNvPr>
+          <p:cNvCxnSpPr>
+            <a:cxnSpLocks noGrp="1" noRot="1" noChangeAspect="1" noMove="1" noResize="1" noEditPoints="1" noAdjustHandles="1" noChangeArrowheads="1" noChangeShapeType="1"/>
+          </p:cNvCxnSpPr>
+          <p:nvPr>
+            <p:extLst>
+              <p:ext uri="{386F3935-93C4-4BCD-93E2-E3B085C9AB24}">
+                <p16:designElem xmlns:p16="http://schemas.microsoft.com/office/powerpoint/2015/main" val="1"/>
+              </p:ext>
+            </p:extLst>
+          </p:nvPr>
+        </p:nvCxnSpPr>
+        <p:spPr>
+          <a:xfrm flipH="1">
+            <a:off x="126210" y="2026340"/>
+            <a:ext cx="5220936" cy="0"/>
+          </a:xfrm>
+          <a:prstGeom prst="line">
+            <a:avLst/>
+          </a:prstGeom>
+          <a:ln w="12700">
+            <a:solidFill>
+              <a:schemeClr val="accent2"/>
+            </a:solidFill>
+          </a:ln>
+        </p:spPr>
+        <p:style>
+          <a:lnRef idx="1">
+            <a:schemeClr val="accent1"/>
+          </a:lnRef>
+          <a:fillRef idx="0">
+            <a:schemeClr val="accent1"/>
+          </a:fillRef>
+          <a:effectRef idx="0">
+            <a:schemeClr val="accent1"/>
+          </a:effectRef>
+          <a:fontRef idx="minor">
+            <a:schemeClr val="tx1"/>
+          </a:fontRef>
+        </p:style>
+      </p:cxnSp>
+      <p:sp>
+        <p:nvSpPr>
+          <p:cNvPr id="12" name="Rectangle 11">
+            <a:extLst>
+              <a:ext uri="{FF2B5EF4-FFF2-40B4-BE49-F238E27FC236}">
+                <a16:creationId xmlns:a16="http://schemas.microsoft.com/office/drawing/2014/main" id="{F23A146D-1CB4-94CA-8DB3-759CF41A2C0D}"/>
+              </a:ext>
+              <a:ext uri="{C183D7F6-B498-43B3-948B-1728B52AA6E4}">
+                <adec:decorative xmlns:adec="http://schemas.microsoft.com/office/drawing/2017/decorative" val="1"/>
+              </a:ext>
+            </a:extLst>
+          </p:cNvPr>
+          <p:cNvSpPr>
+            <a:spLocks noGrp="1" noRot="1" noChangeAspect="1" noMove="1" noResize="1" noEditPoints="1" noAdjustHandles="1" noChangeArrowheads="1" noChangeShapeType="1" noTextEdit="1"/>
+          </p:cNvSpPr>
+          <p:nvPr>
+            <p:extLst>
+              <p:ext uri="{386F3935-93C4-4BCD-93E2-E3B085C9AB24}">
+                <p16:designElem xmlns:p16="http://schemas.microsoft.com/office/powerpoint/2015/main" val="1"/>
+              </p:ext>
+            </p:extLst>
+          </p:nvPr>
+        </p:nvSpPr>
+        <p:spPr>
+          <a:xfrm>
+            <a:off x="126206" y="115193"/>
+            <a:ext cx="11939588" cy="6627614"/>
+          </a:xfrm>
+          <a:prstGeom prst="rect">
+            <a:avLst/>
+          </a:prstGeom>
+          <a:noFill/>
+          <a:ln w="12700">
+            <a:solidFill>
+              <a:schemeClr val="accent2"/>
+            </a:solidFill>
+          </a:ln>
+        </p:spPr>
+        <p:style>
+          <a:lnRef idx="2">
+            <a:schemeClr val="accent1">
+              <a:shade val="50000"/>
+            </a:schemeClr>
+          </a:lnRef>
+          <a:fillRef idx="1">
+            <a:schemeClr val="accent1"/>
+          </a:fillRef>
+          <a:effectRef idx="0">
+            <a:schemeClr val="accent1"/>
+          </a:effectRef>
+          <a:fontRef idx="minor">
+            <a:schemeClr val="lt1"/>
+          </a:fontRef>
+        </p:style>
+        <p:txBody>
+          <a:bodyPr rtlCol="0" anchor="ctr"/>
+          <a:lstStyle/>
+          <a:p>
+            <a:pPr algn="ctr"/>
+            <a:endParaRPr lang="en-US"/>
+          </a:p>
+        </p:txBody>
+      </p:sp>
+      <p:pic>
+        <p:nvPicPr>
+          <p:cNvPr id="6" name="Picture 5">
+            <a:extLst>
+              <a:ext uri="{FF2B5EF4-FFF2-40B4-BE49-F238E27FC236}">
+                <a16:creationId xmlns:a16="http://schemas.microsoft.com/office/drawing/2014/main" id="{A4315769-5CD9-2FB8-AE8C-5AE8616CAAD5}"/>
+              </a:ext>
+            </a:extLst>
+          </p:cNvPr>
+          <p:cNvPicPr>
+            <a:picLocks noChangeAspect="1"/>
+          </p:cNvPicPr>
+          <p:nvPr/>
+        </p:nvPicPr>
+        <p:blipFill>
+          <a:blip r:embed="rId2"/>
+          <a:stretch>
+            <a:fillRect/>
+          </a:stretch>
+        </p:blipFill>
+        <p:spPr>
+          <a:xfrm>
+            <a:off x="3882183" y="2282107"/>
+            <a:ext cx="7858412" cy="2447548"/>
+          </a:xfrm>
+          <a:prstGeom prst="rect">
+            <a:avLst/>
+          </a:prstGeom>
+        </p:spPr>
+      </p:pic>
+      <p:sp>
+        <p:nvSpPr>
+          <p:cNvPr id="7" name="Content Placeholder 2">
+            <a:extLst>
+              <a:ext uri="{FF2B5EF4-FFF2-40B4-BE49-F238E27FC236}">
+                <a16:creationId xmlns:a16="http://schemas.microsoft.com/office/drawing/2014/main" id="{1B0AED33-CE42-BE71-5C63-18A838072787}"/>
+              </a:ext>
+            </a:extLst>
+          </p:cNvPr>
+          <p:cNvSpPr>
+            <a:spLocks noGrp="1"/>
+          </p:cNvSpPr>
+          <p:nvPr>
+            <p:ph idx="1"/>
+          </p:nvPr>
+        </p:nvSpPr>
+        <p:spPr>
+          <a:xfrm>
+            <a:off x="337105" y="4844848"/>
+            <a:ext cx="11121470" cy="1656590"/>
+          </a:xfrm>
+        </p:spPr>
+        <p:txBody>
+          <a:bodyPr>
+            <a:normAutofit fontScale="85000" lnSpcReduction="20000"/>
+          </a:bodyPr>
+          <a:lstStyle/>
+          <a:p>
+            <a:pPr lvl="1">
+              <a:lnSpc>
+                <a:spcPct val="100000"/>
+              </a:lnSpc>
+            </a:pPr>
+            <a:r>
               <a:rPr lang="en-US" sz="2000" dirty="0">
                 <a:solidFill>
                   <a:schemeClr val="bg1"/>
                 </a:solidFill>
               </a:rPr>
-              <a:t>Spread Factor (SF) and Bandwidth (BW) effects</a:t>
-            </a:r>
+              <a:t>At set SF how effective is changing the BW?</a:t>
+            </a:r>
+          </a:p>
+          <a:p>
+            <a:pPr lvl="1">
+              <a:lnSpc>
+                <a:spcPct val="100000"/>
+              </a:lnSpc>
+            </a:pPr>
+            <a:r>
+              <a:rPr lang="en-US" sz="2000" dirty="0">
+                <a:solidFill>
+                  <a:schemeClr val="bg1"/>
+                </a:solidFill>
+              </a:rPr>
+              <a:t>At Set BW, how effective is changing the SF?</a:t>
+            </a:r>
+          </a:p>
+          <a:p>
+            <a:pPr lvl="1">
+              <a:lnSpc>
+                <a:spcPct val="100000"/>
+              </a:lnSpc>
+            </a:pPr>
+            <a:r>
+              <a:rPr lang="en-US" sz="2000" dirty="0">
+                <a:solidFill>
+                  <a:schemeClr val="bg1"/>
+                </a:solidFill>
+              </a:rPr>
+              <a:t>At set effective data rate, compare the performance of small SF and short BW against high SF and long BW. (SF7 @ ~25kHz vs SF12 @ 500kHz)</a:t>
+            </a:r>
+          </a:p>
+          <a:p>
+            <a:pPr lvl="1">
+              <a:lnSpc>
+                <a:spcPct val="100000"/>
+              </a:lnSpc>
+            </a:pPr>
+            <a:r>
+              <a:rPr lang="en-US" sz="2000" dirty="0">
+                <a:solidFill>
+                  <a:schemeClr val="bg1"/>
+                </a:solidFill>
+              </a:rPr>
+              <a:t>Compare Results to other waveforms as possible (scrub proprietary and Controlled Unclassified Information (CUI)</a:t>
+            </a:r>
+          </a:p>
+          <a:p>
+            <a:pPr lvl="1">
+              <a:lnSpc>
+                <a:spcPct val="100000"/>
+              </a:lnSpc>
+            </a:pPr>
+            <a:endParaRPr lang="en-US" sz="2000" dirty="0">
+              <a:solidFill>
+                <a:schemeClr val="bg1"/>
+              </a:solidFill>
+            </a:endParaRPr>
           </a:p>
           <a:p>
             <a:pPr lvl="1">
@@ -4334,6 +4949,254 @@
                 <a:schemeClr val="bg1"/>
               </a:solidFill>
             </a:endParaRPr>
+          </a:p>
+          <a:p>
+            <a:pPr marL="457200" lvl="1" indent="0">
+              <a:buNone/>
+            </a:pPr>
+            <a:endParaRPr lang="en-US" sz="2000" dirty="0">
+              <a:solidFill>
+                <a:schemeClr val="bg1"/>
+              </a:solidFill>
+            </a:endParaRPr>
+          </a:p>
+        </p:txBody>
+      </p:sp>
+      <p:sp>
+        <p:nvSpPr>
+          <p:cNvPr id="9" name="Content Placeholder 2">
+            <a:extLst>
+              <a:ext uri="{FF2B5EF4-FFF2-40B4-BE49-F238E27FC236}">
+                <a16:creationId xmlns:a16="http://schemas.microsoft.com/office/drawing/2014/main" id="{D70E59AB-06E1-E8D7-E432-2A8DC551D754}"/>
+              </a:ext>
+            </a:extLst>
+          </p:cNvPr>
+          <p:cNvSpPr txBox="1">
+            <a:spLocks/>
+          </p:cNvSpPr>
+          <p:nvPr/>
+        </p:nvSpPr>
+        <p:spPr>
+          <a:xfrm>
+            <a:off x="-167534" y="2381539"/>
+            <a:ext cx="3923511" cy="2348116"/>
+          </a:xfrm>
+          <a:prstGeom prst="rect">
+            <a:avLst/>
+          </a:prstGeom>
+        </p:spPr>
+        <p:txBody>
+          <a:bodyPr vert="horz" lIns="91440" tIns="45720" rIns="91440" bIns="45720" rtlCol="0">
+            <a:normAutofit/>
+          </a:bodyPr>
+          <a:lstStyle>
+            <a:lvl1pPr marL="228600" indent="-228600" algn="l" defTabSz="914400" rtl="0" eaLnBrk="1" latinLnBrk="0" hangingPunct="1">
+              <a:lnSpc>
+                <a:spcPct val="90000"/>
+              </a:lnSpc>
+              <a:spcBef>
+                <a:spcPts val="1000"/>
+              </a:spcBef>
+              <a:buFont typeface="Arial" panose="020B0604020202020204" pitchFamily="34" charset="0"/>
+              <a:buChar char="•"/>
+              <a:defRPr sz="2800" kern="1200">
+                <a:solidFill>
+                  <a:schemeClr val="tx1"/>
+                </a:solidFill>
+                <a:latin typeface="+mn-lt"/>
+                <a:ea typeface="+mn-ea"/>
+                <a:cs typeface="+mn-cs"/>
+              </a:defRPr>
+            </a:lvl1pPr>
+            <a:lvl2pPr marL="685800" indent="-228600" algn="l" defTabSz="914400" rtl="0" eaLnBrk="1" latinLnBrk="0" hangingPunct="1">
+              <a:lnSpc>
+                <a:spcPct val="90000"/>
+              </a:lnSpc>
+              <a:spcBef>
+                <a:spcPts val="500"/>
+              </a:spcBef>
+              <a:buFont typeface="Arial" panose="020B0604020202020204" pitchFamily="34" charset="0"/>
+              <a:buChar char="•"/>
+              <a:defRPr sz="2400" kern="1200">
+                <a:solidFill>
+                  <a:schemeClr val="tx1"/>
+                </a:solidFill>
+                <a:latin typeface="+mn-lt"/>
+                <a:ea typeface="+mn-ea"/>
+                <a:cs typeface="+mn-cs"/>
+              </a:defRPr>
+            </a:lvl2pPr>
+            <a:lvl3pPr marL="1143000" indent="-228600" algn="l" defTabSz="914400" rtl="0" eaLnBrk="1" latinLnBrk="0" hangingPunct="1">
+              <a:lnSpc>
+                <a:spcPct val="90000"/>
+              </a:lnSpc>
+              <a:spcBef>
+                <a:spcPts val="500"/>
+              </a:spcBef>
+              <a:buFont typeface="Arial" panose="020B0604020202020204" pitchFamily="34" charset="0"/>
+              <a:buChar char="•"/>
+              <a:defRPr sz="2000" kern="1200">
+                <a:solidFill>
+                  <a:schemeClr val="tx1"/>
+                </a:solidFill>
+                <a:latin typeface="+mn-lt"/>
+                <a:ea typeface="+mn-ea"/>
+                <a:cs typeface="+mn-cs"/>
+              </a:defRPr>
+            </a:lvl3pPr>
+            <a:lvl4pPr marL="1600200" indent="-228600" algn="l" defTabSz="914400" rtl="0" eaLnBrk="1" latinLnBrk="0" hangingPunct="1">
+              <a:lnSpc>
+                <a:spcPct val="90000"/>
+              </a:lnSpc>
+              <a:spcBef>
+                <a:spcPts val="500"/>
+              </a:spcBef>
+              <a:buFont typeface="Arial" panose="020B0604020202020204" pitchFamily="34" charset="0"/>
+              <a:buChar char="•"/>
+              <a:defRPr sz="1800" kern="1200">
+                <a:solidFill>
+                  <a:schemeClr val="tx1"/>
+                </a:solidFill>
+                <a:latin typeface="+mn-lt"/>
+                <a:ea typeface="+mn-ea"/>
+                <a:cs typeface="+mn-cs"/>
+              </a:defRPr>
+            </a:lvl4pPr>
+            <a:lvl5pPr marL="2057400" indent="-228600" algn="l" defTabSz="914400" rtl="0" eaLnBrk="1" latinLnBrk="0" hangingPunct="1">
+              <a:lnSpc>
+                <a:spcPct val="90000"/>
+              </a:lnSpc>
+              <a:spcBef>
+                <a:spcPts val="500"/>
+              </a:spcBef>
+              <a:buFont typeface="Arial" panose="020B0604020202020204" pitchFamily="34" charset="0"/>
+              <a:buChar char="•"/>
+              <a:defRPr sz="1800" kern="1200">
+                <a:solidFill>
+                  <a:schemeClr val="tx1"/>
+                </a:solidFill>
+                <a:latin typeface="+mn-lt"/>
+                <a:ea typeface="+mn-ea"/>
+                <a:cs typeface="+mn-cs"/>
+              </a:defRPr>
+            </a:lvl5pPr>
+            <a:lvl6pPr marL="2514600" indent="-228600" algn="l" defTabSz="914400" rtl="0" eaLnBrk="1" latinLnBrk="0" hangingPunct="1">
+              <a:lnSpc>
+                <a:spcPct val="90000"/>
+              </a:lnSpc>
+              <a:spcBef>
+                <a:spcPts val="500"/>
+              </a:spcBef>
+              <a:buFont typeface="Arial" panose="020B0604020202020204" pitchFamily="34" charset="0"/>
+              <a:buChar char="•"/>
+              <a:defRPr sz="1800" kern="1200">
+                <a:solidFill>
+                  <a:schemeClr val="tx1"/>
+                </a:solidFill>
+                <a:latin typeface="+mn-lt"/>
+                <a:ea typeface="+mn-ea"/>
+                <a:cs typeface="+mn-cs"/>
+              </a:defRPr>
+            </a:lvl6pPr>
+            <a:lvl7pPr marL="2971800" indent="-228600" algn="l" defTabSz="914400" rtl="0" eaLnBrk="1" latinLnBrk="0" hangingPunct="1">
+              <a:lnSpc>
+                <a:spcPct val="90000"/>
+              </a:lnSpc>
+              <a:spcBef>
+                <a:spcPts val="500"/>
+              </a:spcBef>
+              <a:buFont typeface="Arial" panose="020B0604020202020204" pitchFamily="34" charset="0"/>
+              <a:buChar char="•"/>
+              <a:defRPr sz="1800" kern="1200">
+                <a:solidFill>
+                  <a:schemeClr val="tx1"/>
+                </a:solidFill>
+                <a:latin typeface="+mn-lt"/>
+                <a:ea typeface="+mn-ea"/>
+                <a:cs typeface="+mn-cs"/>
+              </a:defRPr>
+            </a:lvl7pPr>
+            <a:lvl8pPr marL="3429000" indent="-228600" algn="l" defTabSz="914400" rtl="0" eaLnBrk="1" latinLnBrk="0" hangingPunct="1">
+              <a:lnSpc>
+                <a:spcPct val="90000"/>
+              </a:lnSpc>
+              <a:spcBef>
+                <a:spcPts val="500"/>
+              </a:spcBef>
+              <a:buFont typeface="Arial" panose="020B0604020202020204" pitchFamily="34" charset="0"/>
+              <a:buChar char="•"/>
+              <a:defRPr sz="1800" kern="1200">
+                <a:solidFill>
+                  <a:schemeClr val="tx1"/>
+                </a:solidFill>
+                <a:latin typeface="+mn-lt"/>
+                <a:ea typeface="+mn-ea"/>
+                <a:cs typeface="+mn-cs"/>
+              </a:defRPr>
+            </a:lvl8pPr>
+            <a:lvl9pPr marL="3886200" indent="-228600" algn="l" defTabSz="914400" rtl="0" eaLnBrk="1" latinLnBrk="0" hangingPunct="1">
+              <a:lnSpc>
+                <a:spcPct val="90000"/>
+              </a:lnSpc>
+              <a:spcBef>
+                <a:spcPts val="500"/>
+              </a:spcBef>
+              <a:buFont typeface="Arial" panose="020B0604020202020204" pitchFamily="34" charset="0"/>
+              <a:buChar char="•"/>
+              <a:defRPr sz="1800" kern="1200">
+                <a:solidFill>
+                  <a:schemeClr val="tx1"/>
+                </a:solidFill>
+                <a:latin typeface="+mn-lt"/>
+                <a:ea typeface="+mn-ea"/>
+                <a:cs typeface="+mn-cs"/>
+              </a:defRPr>
+            </a:lvl9pPr>
+          </a:lstStyle>
+          <a:p>
+            <a:pPr lvl="1">
+              <a:lnSpc>
+                <a:spcPct val="100000"/>
+              </a:lnSpc>
+            </a:pPr>
+            <a:r>
+              <a:rPr lang="en-US" sz="2000" dirty="0">
+                <a:solidFill>
+                  <a:schemeClr val="bg1"/>
+                </a:solidFill>
+              </a:rPr>
+              <a:t>Iterative testing against various LoRa Configurations</a:t>
+            </a:r>
+          </a:p>
+          <a:p>
+            <a:pPr lvl="1">
+              <a:lnSpc>
+                <a:spcPct val="100000"/>
+              </a:lnSpc>
+            </a:pPr>
+            <a:r>
+              <a:rPr lang="en-US" sz="2000" dirty="0">
+                <a:solidFill>
+                  <a:schemeClr val="bg1"/>
+                </a:solidFill>
+              </a:rPr>
+              <a:t>Spread Factor (SF) and Bandwidth (BW) variations</a:t>
+            </a:r>
+          </a:p>
+          <a:p>
+            <a:pPr lvl="1">
+              <a:lnSpc>
+                <a:spcPct val="100000"/>
+              </a:lnSpc>
+            </a:pPr>
+            <a:r>
+              <a:rPr lang="en-US" sz="1800" dirty="0">
+                <a:solidFill>
+                  <a:schemeClr val="bg1"/>
+                </a:solidFill>
+              </a:rPr>
+              <a:t>Other Interpretation:</a:t>
+            </a:r>
           </a:p>
           <a:p>
             <a:pPr marL="457200" lvl="1" indent="0">
@@ -4361,7 +5224,7 @@
 </p:sld>
 </file>
 
-<file path=ppt/slides/slide11.xml><?xml version="1.0" encoding="utf-8"?>
+<file path=ppt/slides/slide12.xml><?xml version="1.0" encoding="utf-8"?>
 <p:sld xmlns:a="http://schemas.openxmlformats.org/drawingml/2006/main" xmlns:r="http://schemas.openxmlformats.org/officeDocument/2006/relationships" xmlns:p="http://schemas.openxmlformats.org/presentationml/2006/main">
   <p:cSld>
     <p:bg>
@@ -4617,6 +5480,433 @@
           </a:p>
         </p:txBody>
       </p:sp>
+      <p:pic>
+        <p:nvPicPr>
+          <p:cNvPr id="4" name="Picture 3">
+            <a:extLst>
+              <a:ext uri="{FF2B5EF4-FFF2-40B4-BE49-F238E27FC236}">
+                <a16:creationId xmlns:a16="http://schemas.microsoft.com/office/drawing/2014/main" id="{A061006B-D9CC-5E1F-66B1-CF31C1E6BF94}"/>
+              </a:ext>
+            </a:extLst>
+          </p:cNvPr>
+          <p:cNvPicPr>
+            <a:picLocks noChangeAspect="1"/>
+          </p:cNvPicPr>
+          <p:nvPr/>
+        </p:nvPicPr>
+        <p:blipFill>
+          <a:blip r:embed="rId2"/>
+          <a:stretch>
+            <a:fillRect/>
+          </a:stretch>
+        </p:blipFill>
+        <p:spPr>
+          <a:xfrm>
+            <a:off x="367673" y="2216944"/>
+            <a:ext cx="3553358" cy="1936181"/>
+          </a:xfrm>
+          <a:prstGeom prst="rect">
+            <a:avLst/>
+          </a:prstGeom>
+        </p:spPr>
+      </p:pic>
+      <p:pic>
+        <p:nvPicPr>
+          <p:cNvPr id="6" name="Picture 5">
+            <a:extLst>
+              <a:ext uri="{FF2B5EF4-FFF2-40B4-BE49-F238E27FC236}">
+                <a16:creationId xmlns:a16="http://schemas.microsoft.com/office/drawing/2014/main" id="{064F98BF-12F0-A10C-55A9-8BFF6B9C4F6A}"/>
+              </a:ext>
+            </a:extLst>
+          </p:cNvPr>
+          <p:cNvPicPr>
+            <a:picLocks noChangeAspect="1"/>
+          </p:cNvPicPr>
+          <p:nvPr/>
+        </p:nvPicPr>
+        <p:blipFill>
+          <a:blip r:embed="rId3"/>
+          <a:stretch>
+            <a:fillRect/>
+          </a:stretch>
+        </p:blipFill>
+        <p:spPr>
+          <a:xfrm>
+            <a:off x="1478913" y="4343198"/>
+            <a:ext cx="4092596" cy="2209536"/>
+          </a:xfrm>
+          <a:prstGeom prst="rect">
+            <a:avLst/>
+          </a:prstGeom>
+        </p:spPr>
+      </p:pic>
+      <p:sp>
+        <p:nvSpPr>
+          <p:cNvPr id="7" name="Content Placeholder 2">
+            <a:extLst>
+              <a:ext uri="{FF2B5EF4-FFF2-40B4-BE49-F238E27FC236}">
+                <a16:creationId xmlns:a16="http://schemas.microsoft.com/office/drawing/2014/main" id="{F981C5F4-A7D3-075A-2B97-180AB86758D3}"/>
+              </a:ext>
+            </a:extLst>
+          </p:cNvPr>
+          <p:cNvSpPr txBox="1">
+            <a:spLocks/>
+          </p:cNvSpPr>
+          <p:nvPr/>
+        </p:nvSpPr>
+        <p:spPr>
+          <a:xfrm>
+            <a:off x="5273738" y="2273149"/>
+            <a:ext cx="6341728" cy="4107656"/>
+          </a:xfrm>
+          <a:prstGeom prst="rect">
+            <a:avLst/>
+          </a:prstGeom>
+        </p:spPr>
+        <p:txBody>
+          <a:bodyPr vert="horz" lIns="91440" tIns="45720" rIns="91440" bIns="45720" rtlCol="0">
+            <a:normAutofit/>
+          </a:bodyPr>
+          <a:lstStyle>
+            <a:lvl1pPr marL="228600" indent="-228600" algn="l" defTabSz="914400" rtl="0" eaLnBrk="1" latinLnBrk="0" hangingPunct="1">
+              <a:lnSpc>
+                <a:spcPct val="90000"/>
+              </a:lnSpc>
+              <a:spcBef>
+                <a:spcPts val="1000"/>
+              </a:spcBef>
+              <a:buFont typeface="Arial" panose="020B0604020202020204" pitchFamily="34" charset="0"/>
+              <a:buChar char="•"/>
+              <a:defRPr sz="2800" kern="1200">
+                <a:solidFill>
+                  <a:schemeClr val="tx1"/>
+                </a:solidFill>
+                <a:latin typeface="+mn-lt"/>
+                <a:ea typeface="+mn-ea"/>
+                <a:cs typeface="+mn-cs"/>
+              </a:defRPr>
+            </a:lvl1pPr>
+            <a:lvl2pPr marL="685800" indent="-228600" algn="l" defTabSz="914400" rtl="0" eaLnBrk="1" latinLnBrk="0" hangingPunct="1">
+              <a:lnSpc>
+                <a:spcPct val="90000"/>
+              </a:lnSpc>
+              <a:spcBef>
+                <a:spcPts val="500"/>
+              </a:spcBef>
+              <a:buFont typeface="Arial" panose="020B0604020202020204" pitchFamily="34" charset="0"/>
+              <a:buChar char="•"/>
+              <a:defRPr sz="2400" kern="1200">
+                <a:solidFill>
+                  <a:schemeClr val="tx1"/>
+                </a:solidFill>
+                <a:latin typeface="+mn-lt"/>
+                <a:ea typeface="+mn-ea"/>
+                <a:cs typeface="+mn-cs"/>
+              </a:defRPr>
+            </a:lvl2pPr>
+            <a:lvl3pPr marL="1143000" indent="-228600" algn="l" defTabSz="914400" rtl="0" eaLnBrk="1" latinLnBrk="0" hangingPunct="1">
+              <a:lnSpc>
+                <a:spcPct val="90000"/>
+              </a:lnSpc>
+              <a:spcBef>
+                <a:spcPts val="500"/>
+              </a:spcBef>
+              <a:buFont typeface="Arial" panose="020B0604020202020204" pitchFamily="34" charset="0"/>
+              <a:buChar char="•"/>
+              <a:defRPr sz="2000" kern="1200">
+                <a:solidFill>
+                  <a:schemeClr val="tx1"/>
+                </a:solidFill>
+                <a:latin typeface="+mn-lt"/>
+                <a:ea typeface="+mn-ea"/>
+                <a:cs typeface="+mn-cs"/>
+              </a:defRPr>
+            </a:lvl3pPr>
+            <a:lvl4pPr marL="1600200" indent="-228600" algn="l" defTabSz="914400" rtl="0" eaLnBrk="1" latinLnBrk="0" hangingPunct="1">
+              <a:lnSpc>
+                <a:spcPct val="90000"/>
+              </a:lnSpc>
+              <a:spcBef>
+                <a:spcPts val="500"/>
+              </a:spcBef>
+              <a:buFont typeface="Arial" panose="020B0604020202020204" pitchFamily="34" charset="0"/>
+              <a:buChar char="•"/>
+              <a:defRPr sz="1800" kern="1200">
+                <a:solidFill>
+                  <a:schemeClr val="tx1"/>
+                </a:solidFill>
+                <a:latin typeface="+mn-lt"/>
+                <a:ea typeface="+mn-ea"/>
+                <a:cs typeface="+mn-cs"/>
+              </a:defRPr>
+            </a:lvl4pPr>
+            <a:lvl5pPr marL="2057400" indent="-228600" algn="l" defTabSz="914400" rtl="0" eaLnBrk="1" latinLnBrk="0" hangingPunct="1">
+              <a:lnSpc>
+                <a:spcPct val="90000"/>
+              </a:lnSpc>
+              <a:spcBef>
+                <a:spcPts val="500"/>
+              </a:spcBef>
+              <a:buFont typeface="Arial" panose="020B0604020202020204" pitchFamily="34" charset="0"/>
+              <a:buChar char="•"/>
+              <a:defRPr sz="1800" kern="1200">
+                <a:solidFill>
+                  <a:schemeClr val="tx1"/>
+                </a:solidFill>
+                <a:latin typeface="+mn-lt"/>
+                <a:ea typeface="+mn-ea"/>
+                <a:cs typeface="+mn-cs"/>
+              </a:defRPr>
+            </a:lvl5pPr>
+            <a:lvl6pPr marL="2514600" indent="-228600" algn="l" defTabSz="914400" rtl="0" eaLnBrk="1" latinLnBrk="0" hangingPunct="1">
+              <a:lnSpc>
+                <a:spcPct val="90000"/>
+              </a:lnSpc>
+              <a:spcBef>
+                <a:spcPts val="500"/>
+              </a:spcBef>
+              <a:buFont typeface="Arial" panose="020B0604020202020204" pitchFamily="34" charset="0"/>
+              <a:buChar char="•"/>
+              <a:defRPr sz="1800" kern="1200">
+                <a:solidFill>
+                  <a:schemeClr val="tx1"/>
+                </a:solidFill>
+                <a:latin typeface="+mn-lt"/>
+                <a:ea typeface="+mn-ea"/>
+                <a:cs typeface="+mn-cs"/>
+              </a:defRPr>
+            </a:lvl6pPr>
+            <a:lvl7pPr marL="2971800" indent="-228600" algn="l" defTabSz="914400" rtl="0" eaLnBrk="1" latinLnBrk="0" hangingPunct="1">
+              <a:lnSpc>
+                <a:spcPct val="90000"/>
+              </a:lnSpc>
+              <a:spcBef>
+                <a:spcPts val="500"/>
+              </a:spcBef>
+              <a:buFont typeface="Arial" panose="020B0604020202020204" pitchFamily="34" charset="0"/>
+              <a:buChar char="•"/>
+              <a:defRPr sz="1800" kern="1200">
+                <a:solidFill>
+                  <a:schemeClr val="tx1"/>
+                </a:solidFill>
+                <a:latin typeface="+mn-lt"/>
+                <a:ea typeface="+mn-ea"/>
+                <a:cs typeface="+mn-cs"/>
+              </a:defRPr>
+            </a:lvl7pPr>
+            <a:lvl8pPr marL="3429000" indent="-228600" algn="l" defTabSz="914400" rtl="0" eaLnBrk="1" latinLnBrk="0" hangingPunct="1">
+              <a:lnSpc>
+                <a:spcPct val="90000"/>
+              </a:lnSpc>
+              <a:spcBef>
+                <a:spcPts val="500"/>
+              </a:spcBef>
+              <a:buFont typeface="Arial" panose="020B0604020202020204" pitchFamily="34" charset="0"/>
+              <a:buChar char="•"/>
+              <a:defRPr sz="1800" kern="1200">
+                <a:solidFill>
+                  <a:schemeClr val="tx1"/>
+                </a:solidFill>
+                <a:latin typeface="+mn-lt"/>
+                <a:ea typeface="+mn-ea"/>
+                <a:cs typeface="+mn-cs"/>
+              </a:defRPr>
+            </a:lvl8pPr>
+            <a:lvl9pPr marL="3886200" indent="-228600" algn="l" defTabSz="914400" rtl="0" eaLnBrk="1" latinLnBrk="0" hangingPunct="1">
+              <a:lnSpc>
+                <a:spcPct val="90000"/>
+              </a:lnSpc>
+              <a:spcBef>
+                <a:spcPts val="500"/>
+              </a:spcBef>
+              <a:buFont typeface="Arial" panose="020B0604020202020204" pitchFamily="34" charset="0"/>
+              <a:buChar char="•"/>
+              <a:defRPr sz="1800" kern="1200">
+                <a:solidFill>
+                  <a:schemeClr val="tx1"/>
+                </a:solidFill>
+                <a:latin typeface="+mn-lt"/>
+                <a:ea typeface="+mn-ea"/>
+                <a:cs typeface="+mn-cs"/>
+              </a:defRPr>
+            </a:lvl9pPr>
+          </a:lstStyle>
+          <a:p>
+            <a:pPr lvl="1">
+              <a:lnSpc>
+                <a:spcPct val="100000"/>
+              </a:lnSpc>
+            </a:pPr>
+            <a:r>
+              <a:rPr lang="en-US" sz="2000" dirty="0">
+                <a:solidFill>
+                  <a:schemeClr val="bg1"/>
+                </a:solidFill>
+              </a:rPr>
+              <a:t>LoRa development boards (</a:t>
+            </a:r>
+            <a:r>
+              <a:rPr lang="en-US" sz="2000" dirty="0" err="1">
+                <a:solidFill>
+                  <a:schemeClr val="bg1"/>
+                </a:solidFill>
+              </a:rPr>
+              <a:t>Heltec</a:t>
+            </a:r>
+            <a:r>
+              <a:rPr lang="en-US" sz="2000" dirty="0">
+                <a:solidFill>
+                  <a:schemeClr val="bg1"/>
+                </a:solidFill>
+              </a:rPr>
+              <a:t> LoRa V3)</a:t>
+            </a:r>
+          </a:p>
+          <a:p>
+            <a:pPr lvl="1">
+              <a:lnSpc>
+                <a:spcPct val="100000"/>
+              </a:lnSpc>
+            </a:pPr>
+            <a:r>
+              <a:rPr lang="en-US" sz="2000" dirty="0">
+                <a:solidFill>
+                  <a:schemeClr val="bg1"/>
+                </a:solidFill>
+              </a:rPr>
+              <a:t>Visual Studio Code C++ </a:t>
+            </a:r>
+          </a:p>
+          <a:p>
+            <a:pPr lvl="1">
+              <a:lnSpc>
+                <a:spcPct val="100000"/>
+              </a:lnSpc>
+            </a:pPr>
+            <a:r>
+              <a:rPr lang="en-US" sz="2000" dirty="0">
+                <a:solidFill>
+                  <a:schemeClr val="bg1"/>
+                </a:solidFill>
+              </a:rPr>
+              <a:t>Platform IO extension</a:t>
+            </a:r>
+          </a:p>
+          <a:p>
+            <a:pPr lvl="1">
+              <a:lnSpc>
+                <a:spcPct val="100000"/>
+              </a:lnSpc>
+            </a:pPr>
+            <a:r>
+              <a:rPr lang="en-US" sz="2000" dirty="0">
+                <a:solidFill>
+                  <a:schemeClr val="bg1"/>
+                </a:solidFill>
+              </a:rPr>
+              <a:t>“Application” traffic exercises waveform signal</a:t>
+            </a:r>
+          </a:p>
+          <a:p>
+            <a:pPr lvl="1">
+              <a:lnSpc>
+                <a:spcPct val="100000"/>
+              </a:lnSpc>
+            </a:pPr>
+            <a:r>
+              <a:rPr lang="en-US" sz="2000" dirty="0">
+                <a:solidFill>
+                  <a:schemeClr val="bg1"/>
+                </a:solidFill>
+              </a:rPr>
+              <a:t>50B payload transmitted ~once per second</a:t>
+            </a:r>
+          </a:p>
+          <a:p>
+            <a:pPr lvl="1">
+              <a:lnSpc>
+                <a:spcPct val="100000"/>
+              </a:lnSpc>
+            </a:pPr>
+            <a:r>
+              <a:rPr lang="en-US" sz="2000" dirty="0">
+                <a:solidFill>
+                  <a:schemeClr val="bg1"/>
+                </a:solidFill>
+              </a:rPr>
+              <a:t>ACK/NACK between the two with output logging</a:t>
+            </a:r>
+          </a:p>
+          <a:p>
+            <a:pPr lvl="1">
+              <a:lnSpc>
+                <a:spcPct val="100000"/>
+              </a:lnSpc>
+            </a:pPr>
+            <a:r>
+              <a:rPr lang="en-US" sz="2000" dirty="0">
+                <a:solidFill>
+                  <a:schemeClr val="bg1"/>
+                </a:solidFill>
+              </a:rPr>
+              <a:t>Single code base for quick uploads between test configs</a:t>
+            </a:r>
+          </a:p>
+          <a:p>
+            <a:pPr lvl="2">
+              <a:lnSpc>
+                <a:spcPct val="100000"/>
+              </a:lnSpc>
+            </a:pPr>
+            <a:r>
+              <a:rPr lang="en-US" sz="1600" dirty="0">
+                <a:solidFill>
+                  <a:schemeClr val="bg1"/>
+                </a:solidFill>
+              </a:rPr>
+              <a:t>SF and BW inputs with dynamic protocol adjustment to minimize iterative testing </a:t>
+            </a:r>
+          </a:p>
+          <a:p>
+            <a:pPr lvl="2">
+              <a:lnSpc>
+                <a:spcPct val="100000"/>
+              </a:lnSpc>
+            </a:pPr>
+            <a:r>
+              <a:rPr lang="en-US" sz="1600" dirty="0">
+                <a:solidFill>
+                  <a:schemeClr val="bg1"/>
+                </a:solidFill>
+              </a:rPr>
+              <a:t>Code base works as ACK device or Tx device with button toggle</a:t>
+            </a:r>
+          </a:p>
+          <a:p>
+            <a:pPr lvl="1">
+              <a:lnSpc>
+                <a:spcPct val="100000"/>
+              </a:lnSpc>
+            </a:pPr>
+            <a:endParaRPr lang="en-US" sz="1800" dirty="0">
+              <a:solidFill>
+                <a:schemeClr val="bg1"/>
+              </a:solidFill>
+            </a:endParaRPr>
+          </a:p>
+          <a:p>
+            <a:pPr marL="457200" lvl="1" indent="0">
+              <a:buFont typeface="Arial" panose="020B0604020202020204" pitchFamily="34" charset="0"/>
+              <a:buNone/>
+            </a:pPr>
+            <a:endParaRPr lang="en-US" sz="2000" dirty="0">
+              <a:solidFill>
+                <a:schemeClr val="bg1"/>
+              </a:solidFill>
+            </a:endParaRPr>
+          </a:p>
+        </p:txBody>
+      </p:sp>
     </p:spTree>
     <p:extLst>
       <p:ext uri="{BB962C8B-B14F-4D97-AF65-F5344CB8AC3E}">
@@ -4630,7 +5920,7 @@
 </p:sld>
 </file>
 
-<file path=ppt/slides/slide12.xml><?xml version="1.0" encoding="utf-8"?>
+<file path=ppt/slides/slide13.xml><?xml version="1.0" encoding="utf-8"?>
 <p:sld xmlns:a="http://schemas.openxmlformats.org/drawingml/2006/main" xmlns:r="http://schemas.openxmlformats.org/officeDocument/2006/relationships" xmlns:p="http://schemas.openxmlformats.org/presentationml/2006/main">
   <p:cSld>
     <p:bg>
@@ -4901,6 +6191,36 @@
           </a:p>
         </p:txBody>
       </p:sp>
+      <p:pic>
+        <p:nvPicPr>
+          <p:cNvPr id="4" name="Picture 3">
+            <a:extLst>
+              <a:ext uri="{FF2B5EF4-FFF2-40B4-BE49-F238E27FC236}">
+                <a16:creationId xmlns:a16="http://schemas.microsoft.com/office/drawing/2014/main" id="{C75ACC9B-B187-BEC6-D922-B8A348C7106A}"/>
+              </a:ext>
+            </a:extLst>
+          </p:cNvPr>
+          <p:cNvPicPr>
+            <a:picLocks noChangeAspect="1"/>
+          </p:cNvPicPr>
+          <p:nvPr/>
+        </p:nvPicPr>
+        <p:blipFill>
+          <a:blip r:embed="rId2"/>
+          <a:stretch>
+            <a:fillRect/>
+          </a:stretch>
+        </p:blipFill>
+        <p:spPr>
+          <a:xfrm>
+            <a:off x="1838325" y="2237471"/>
+            <a:ext cx="8201022" cy="4327249"/>
+          </a:xfrm>
+          <a:prstGeom prst="rect">
+            <a:avLst/>
+          </a:prstGeom>
+        </p:spPr>
+      </p:pic>
     </p:spTree>
     <p:extLst>
       <p:ext uri="{BB962C8B-B14F-4D97-AF65-F5344CB8AC3E}">
@@ -4914,7 +6234,7 @@
 </p:sld>
 </file>
 
-<file path=ppt/slides/slide13.xml><?xml version="1.0" encoding="utf-8"?>
+<file path=ppt/slides/slide14.xml><?xml version="1.0" encoding="utf-8"?>
 <p:sld xmlns:a="http://schemas.openxmlformats.org/drawingml/2006/main" xmlns:r="http://schemas.openxmlformats.org/officeDocument/2006/relationships" xmlns:p="http://schemas.openxmlformats.org/presentationml/2006/main">
   <p:cSld>
     <p:bg>
@@ -7369,7 +8689,7 @@
                   <a:schemeClr val="bg1"/>
                 </a:solidFill>
               </a:rPr>
-              <a:t>CAF output calculation</a:t>
+              <a:t>CAF output </a:t>
             </a:r>
           </a:p>
           <a:p>
@@ -7708,7 +9028,7 @@
         </p:spPr>
         <p:txBody>
           <a:bodyPr>
-            <a:normAutofit lnSpcReduction="10000"/>
+            <a:normAutofit fontScale="92500" lnSpcReduction="10000"/>
           </a:bodyPr>
           <a:lstStyle/>
           <a:p>
@@ -7734,7 +9054,18 @@
                   <a:schemeClr val="bg1"/>
                 </a:solidFill>
               </a:rPr>
-              <a:t>Radio Channel Emulator (RCE) tools</a:t>
+              <a:t>Radio Channel Emulator (RCE) </a:t>
+            </a:r>
+          </a:p>
+          <a:p>
+            <a:pPr lvl="2"/>
+            <a:r>
+              <a:rPr lang="en-US" sz="1800" dirty="0">
+                <a:solidFill>
+                  <a:schemeClr val="bg1"/>
+                </a:solidFill>
+              </a:rPr>
+              <a:t>Live Scripts for RCE control</a:t>
             </a:r>
           </a:p>
           <a:p>
@@ -7828,10 +9159,10 @@
       </p:sp>
       <p:pic>
         <p:nvPicPr>
-          <p:cNvPr id="3" name="Picture 2" descr="How We Suppress Jamming in Defense Radar Using MVDR (Without Losing the  Target) | by Satvik singh | Medium">
-            <a:extLst>
-              <a:ext uri="{FF2B5EF4-FFF2-40B4-BE49-F238E27FC236}">
-                <a16:creationId xmlns:a16="http://schemas.microsoft.com/office/drawing/2014/main" id="{435219F0-6DE1-D15B-DBD9-D9FE1B5AB25A}"/>
+          <p:cNvPr id="5" name="Picture 4">
+            <a:extLst>
+              <a:ext uri="{FF2B5EF4-FFF2-40B4-BE49-F238E27FC236}">
+                <a16:creationId xmlns:a16="http://schemas.microsoft.com/office/drawing/2014/main" id="{D24C00B3-07C1-771D-E661-7992508B7C13}"/>
               </a:ext>
             </a:extLst>
           </p:cNvPr>
@@ -7848,8 +9179,8 @@
         </p:blipFill>
         <p:spPr>
           <a:xfrm>
-            <a:off x="7840026" y="2222695"/>
-            <a:ext cx="2752908" cy="2752908"/>
+            <a:off x="7436341" y="1471339"/>
+            <a:ext cx="3277057" cy="3915321"/>
           </a:xfrm>
           <a:prstGeom prst="rect">
             <a:avLst/>
@@ -8484,7 +9815,22 @@
                   <a:schemeClr val="bg1"/>
                 </a:solidFill>
               </a:rPr>
-              <a:t>Schedule</a:t>
+              <a:t>Schedule and </a:t>
+            </a:r>
+            <a:br>
+              <a:rPr lang="en-US" dirty="0">
+                <a:solidFill>
+                  <a:schemeClr val="bg1"/>
+                </a:solidFill>
+              </a:rPr>
+            </a:br>
+            <a:r>
+              <a:rPr lang="en-US" dirty="0">
+                <a:solidFill>
+                  <a:schemeClr val="bg1"/>
+                </a:solidFill>
+              </a:rPr>
+              <a:t>Progress (May 8)</a:t>
             </a:r>
           </a:p>
         </p:txBody>

--- a/Capstone Mid-Quarter Update_Bryce Rooney.pptx
+++ b/Capstone Mid-Quarter Update_Bryce Rooney.pptx
@@ -19,6 +19,14 @@
     <p:sldId id="271" r:id="rId13"/>
     <p:sldId id="272" r:id="rId14"/>
     <p:sldId id="273" r:id="rId15"/>
+    <p:sldId id="275" r:id="rId16"/>
+    <p:sldId id="276" r:id="rId17"/>
+    <p:sldId id="277" r:id="rId18"/>
+    <p:sldId id="278" r:id="rId19"/>
+    <p:sldId id="279" r:id="rId20"/>
+    <p:sldId id="280" r:id="rId21"/>
+    <p:sldId id="282" r:id="rId22"/>
+    <p:sldId id="281" r:id="rId23"/>
   </p:sldIdLst>
   <p:sldSz cx="12192000" cy="6858000"/>
   <p:notesSz cx="6858000" cy="9144000"/>
@@ -4166,7 +4174,7 @@
                   <a:schemeClr val="bg1"/>
                 </a:solidFill>
               </a:rPr>
-              <a:t>Geolocation / CAF: 11 May</a:t>
+              <a:t>Geolocation / CAF: 10 May</a:t>
             </a:r>
           </a:p>
           <a:p>
@@ -6490,10 +6498,3324 @@
           </a:p>
         </p:txBody>
       </p:sp>
+      <p:sp>
+        <p:nvSpPr>
+          <p:cNvPr id="3" name="Content Placeholder 2">
+            <a:extLst>
+              <a:ext uri="{FF2B5EF4-FFF2-40B4-BE49-F238E27FC236}">
+                <a16:creationId xmlns:a16="http://schemas.microsoft.com/office/drawing/2014/main" id="{2969D411-08C5-5390-24FB-BFF1F2CE22FF}"/>
+              </a:ext>
+            </a:extLst>
+          </p:cNvPr>
+          <p:cNvSpPr txBox="1">
+            <a:spLocks/>
+          </p:cNvSpPr>
+          <p:nvPr/>
+        </p:nvSpPr>
+        <p:spPr>
+          <a:xfrm>
+            <a:off x="4939441" y="2141533"/>
+            <a:ext cx="6341728" cy="4107656"/>
+          </a:xfrm>
+          <a:prstGeom prst="rect">
+            <a:avLst/>
+          </a:prstGeom>
+        </p:spPr>
+        <p:txBody>
+          <a:bodyPr vert="horz" lIns="91440" tIns="45720" rIns="91440" bIns="45720" rtlCol="0">
+            <a:normAutofit/>
+          </a:bodyPr>
+          <a:lstStyle>
+            <a:lvl1pPr marL="228600" indent="-228600" algn="l" defTabSz="914400" rtl="0" eaLnBrk="1" latinLnBrk="0" hangingPunct="1">
+              <a:lnSpc>
+                <a:spcPct val="90000"/>
+              </a:lnSpc>
+              <a:spcBef>
+                <a:spcPts val="1000"/>
+              </a:spcBef>
+              <a:buFont typeface="Arial" panose="020B0604020202020204" pitchFamily="34" charset="0"/>
+              <a:buChar char="•"/>
+              <a:defRPr sz="2800" kern="1200">
+                <a:solidFill>
+                  <a:schemeClr val="tx1"/>
+                </a:solidFill>
+                <a:latin typeface="+mn-lt"/>
+                <a:ea typeface="+mn-ea"/>
+                <a:cs typeface="+mn-cs"/>
+              </a:defRPr>
+            </a:lvl1pPr>
+            <a:lvl2pPr marL="685800" indent="-228600" algn="l" defTabSz="914400" rtl="0" eaLnBrk="1" latinLnBrk="0" hangingPunct="1">
+              <a:lnSpc>
+                <a:spcPct val="90000"/>
+              </a:lnSpc>
+              <a:spcBef>
+                <a:spcPts val="500"/>
+              </a:spcBef>
+              <a:buFont typeface="Arial" panose="020B0604020202020204" pitchFamily="34" charset="0"/>
+              <a:buChar char="•"/>
+              <a:defRPr sz="2400" kern="1200">
+                <a:solidFill>
+                  <a:schemeClr val="tx1"/>
+                </a:solidFill>
+                <a:latin typeface="+mn-lt"/>
+                <a:ea typeface="+mn-ea"/>
+                <a:cs typeface="+mn-cs"/>
+              </a:defRPr>
+            </a:lvl2pPr>
+            <a:lvl3pPr marL="1143000" indent="-228600" algn="l" defTabSz="914400" rtl="0" eaLnBrk="1" latinLnBrk="0" hangingPunct="1">
+              <a:lnSpc>
+                <a:spcPct val="90000"/>
+              </a:lnSpc>
+              <a:spcBef>
+                <a:spcPts val="500"/>
+              </a:spcBef>
+              <a:buFont typeface="Arial" panose="020B0604020202020204" pitchFamily="34" charset="0"/>
+              <a:buChar char="•"/>
+              <a:defRPr sz="2000" kern="1200">
+                <a:solidFill>
+                  <a:schemeClr val="tx1"/>
+                </a:solidFill>
+                <a:latin typeface="+mn-lt"/>
+                <a:ea typeface="+mn-ea"/>
+                <a:cs typeface="+mn-cs"/>
+              </a:defRPr>
+            </a:lvl3pPr>
+            <a:lvl4pPr marL="1600200" indent="-228600" algn="l" defTabSz="914400" rtl="0" eaLnBrk="1" latinLnBrk="0" hangingPunct="1">
+              <a:lnSpc>
+                <a:spcPct val="90000"/>
+              </a:lnSpc>
+              <a:spcBef>
+                <a:spcPts val="500"/>
+              </a:spcBef>
+              <a:buFont typeface="Arial" panose="020B0604020202020204" pitchFamily="34" charset="0"/>
+              <a:buChar char="•"/>
+              <a:defRPr sz="1800" kern="1200">
+                <a:solidFill>
+                  <a:schemeClr val="tx1"/>
+                </a:solidFill>
+                <a:latin typeface="+mn-lt"/>
+                <a:ea typeface="+mn-ea"/>
+                <a:cs typeface="+mn-cs"/>
+              </a:defRPr>
+            </a:lvl4pPr>
+            <a:lvl5pPr marL="2057400" indent="-228600" algn="l" defTabSz="914400" rtl="0" eaLnBrk="1" latinLnBrk="0" hangingPunct="1">
+              <a:lnSpc>
+                <a:spcPct val="90000"/>
+              </a:lnSpc>
+              <a:spcBef>
+                <a:spcPts val="500"/>
+              </a:spcBef>
+              <a:buFont typeface="Arial" panose="020B0604020202020204" pitchFamily="34" charset="0"/>
+              <a:buChar char="•"/>
+              <a:defRPr sz="1800" kern="1200">
+                <a:solidFill>
+                  <a:schemeClr val="tx1"/>
+                </a:solidFill>
+                <a:latin typeface="+mn-lt"/>
+                <a:ea typeface="+mn-ea"/>
+                <a:cs typeface="+mn-cs"/>
+              </a:defRPr>
+            </a:lvl5pPr>
+            <a:lvl6pPr marL="2514600" indent="-228600" algn="l" defTabSz="914400" rtl="0" eaLnBrk="1" latinLnBrk="0" hangingPunct="1">
+              <a:lnSpc>
+                <a:spcPct val="90000"/>
+              </a:lnSpc>
+              <a:spcBef>
+                <a:spcPts val="500"/>
+              </a:spcBef>
+              <a:buFont typeface="Arial" panose="020B0604020202020204" pitchFamily="34" charset="0"/>
+              <a:buChar char="•"/>
+              <a:defRPr sz="1800" kern="1200">
+                <a:solidFill>
+                  <a:schemeClr val="tx1"/>
+                </a:solidFill>
+                <a:latin typeface="+mn-lt"/>
+                <a:ea typeface="+mn-ea"/>
+                <a:cs typeface="+mn-cs"/>
+              </a:defRPr>
+            </a:lvl6pPr>
+            <a:lvl7pPr marL="2971800" indent="-228600" algn="l" defTabSz="914400" rtl="0" eaLnBrk="1" latinLnBrk="0" hangingPunct="1">
+              <a:lnSpc>
+                <a:spcPct val="90000"/>
+              </a:lnSpc>
+              <a:spcBef>
+                <a:spcPts val="500"/>
+              </a:spcBef>
+              <a:buFont typeface="Arial" panose="020B0604020202020204" pitchFamily="34" charset="0"/>
+              <a:buChar char="•"/>
+              <a:defRPr sz="1800" kern="1200">
+                <a:solidFill>
+                  <a:schemeClr val="tx1"/>
+                </a:solidFill>
+                <a:latin typeface="+mn-lt"/>
+                <a:ea typeface="+mn-ea"/>
+                <a:cs typeface="+mn-cs"/>
+              </a:defRPr>
+            </a:lvl7pPr>
+            <a:lvl8pPr marL="3429000" indent="-228600" algn="l" defTabSz="914400" rtl="0" eaLnBrk="1" latinLnBrk="0" hangingPunct="1">
+              <a:lnSpc>
+                <a:spcPct val="90000"/>
+              </a:lnSpc>
+              <a:spcBef>
+                <a:spcPts val="500"/>
+              </a:spcBef>
+              <a:buFont typeface="Arial" panose="020B0604020202020204" pitchFamily="34" charset="0"/>
+              <a:buChar char="•"/>
+              <a:defRPr sz="1800" kern="1200">
+                <a:solidFill>
+                  <a:schemeClr val="tx1"/>
+                </a:solidFill>
+                <a:latin typeface="+mn-lt"/>
+                <a:ea typeface="+mn-ea"/>
+                <a:cs typeface="+mn-cs"/>
+              </a:defRPr>
+            </a:lvl8pPr>
+            <a:lvl9pPr marL="3886200" indent="-228600" algn="l" defTabSz="914400" rtl="0" eaLnBrk="1" latinLnBrk="0" hangingPunct="1">
+              <a:lnSpc>
+                <a:spcPct val="90000"/>
+              </a:lnSpc>
+              <a:spcBef>
+                <a:spcPts val="500"/>
+              </a:spcBef>
+              <a:buFont typeface="Arial" panose="020B0604020202020204" pitchFamily="34" charset="0"/>
+              <a:buChar char="•"/>
+              <a:defRPr sz="1800" kern="1200">
+                <a:solidFill>
+                  <a:schemeClr val="tx1"/>
+                </a:solidFill>
+                <a:latin typeface="+mn-lt"/>
+                <a:ea typeface="+mn-ea"/>
+                <a:cs typeface="+mn-cs"/>
+              </a:defRPr>
+            </a:lvl9pPr>
+          </a:lstStyle>
+          <a:p>
+            <a:pPr lvl="1">
+              <a:lnSpc>
+                <a:spcPct val="100000"/>
+              </a:lnSpc>
+            </a:pPr>
+            <a:r>
+              <a:rPr lang="en-US" sz="2000" dirty="0">
+                <a:solidFill>
+                  <a:schemeClr val="bg1"/>
+                </a:solidFill>
+              </a:rPr>
+              <a:t>Detectability test cases with all LoRa configs</a:t>
+            </a:r>
+          </a:p>
+          <a:p>
+            <a:pPr lvl="1">
+              <a:lnSpc>
+                <a:spcPct val="100000"/>
+              </a:lnSpc>
+            </a:pPr>
+            <a:r>
+              <a:rPr lang="en-US" sz="2000" dirty="0">
+                <a:solidFill>
+                  <a:schemeClr val="bg1"/>
+                </a:solidFill>
+              </a:rPr>
+              <a:t>Met obstacles in RF recording and MATLAB algorithm parameters</a:t>
+            </a:r>
+          </a:p>
+          <a:p>
+            <a:pPr lvl="1">
+              <a:lnSpc>
+                <a:spcPct val="100000"/>
+              </a:lnSpc>
+            </a:pPr>
+            <a:r>
+              <a:rPr lang="en-US" sz="2000" dirty="0">
+                <a:solidFill>
+                  <a:schemeClr val="bg1"/>
+                </a:solidFill>
+              </a:rPr>
+              <a:t>Confirmed valid output metrics. </a:t>
+            </a:r>
+          </a:p>
+          <a:p>
+            <a:pPr lvl="1">
+              <a:lnSpc>
+                <a:spcPct val="100000"/>
+              </a:lnSpc>
+            </a:pPr>
+            <a:r>
+              <a:rPr lang="en-US" sz="2000" dirty="0">
+                <a:solidFill>
+                  <a:schemeClr val="bg1"/>
+                </a:solidFill>
+              </a:rPr>
+              <a:t>All data being processed</a:t>
+            </a:r>
+          </a:p>
+          <a:p>
+            <a:pPr lvl="1">
+              <a:lnSpc>
+                <a:spcPct val="100000"/>
+              </a:lnSpc>
+            </a:pPr>
+            <a:r>
+              <a:rPr lang="en-US" sz="2000" dirty="0">
+                <a:solidFill>
+                  <a:schemeClr val="bg1"/>
+                </a:solidFill>
+              </a:rPr>
+              <a:t>ROC &amp; Slash Curves with Histograms</a:t>
+            </a:r>
+            <a:endParaRPr lang="en-US" sz="1600" dirty="0">
+              <a:solidFill>
+                <a:schemeClr val="bg1"/>
+              </a:solidFill>
+            </a:endParaRPr>
+          </a:p>
+          <a:p>
+            <a:pPr lvl="1">
+              <a:lnSpc>
+                <a:spcPct val="100000"/>
+              </a:lnSpc>
+            </a:pPr>
+            <a:endParaRPr lang="en-US" sz="1800" dirty="0">
+              <a:solidFill>
+                <a:schemeClr val="bg1"/>
+              </a:solidFill>
+            </a:endParaRPr>
+          </a:p>
+          <a:p>
+            <a:pPr marL="457200" lvl="1" indent="0">
+              <a:buFont typeface="Arial" panose="020B0604020202020204" pitchFamily="34" charset="0"/>
+              <a:buNone/>
+            </a:pPr>
+            <a:endParaRPr lang="en-US" sz="2000" dirty="0">
+              <a:solidFill>
+                <a:schemeClr val="bg1"/>
+              </a:solidFill>
+            </a:endParaRPr>
+          </a:p>
+        </p:txBody>
+      </p:sp>
+      <p:pic>
+        <p:nvPicPr>
+          <p:cNvPr id="5" name="Picture 4">
+            <a:extLst>
+              <a:ext uri="{FF2B5EF4-FFF2-40B4-BE49-F238E27FC236}">
+                <a16:creationId xmlns:a16="http://schemas.microsoft.com/office/drawing/2014/main" id="{90B0F93D-2CF7-A9BA-5A3E-6F05BA016B82}"/>
+              </a:ext>
+            </a:extLst>
+          </p:cNvPr>
+          <p:cNvPicPr>
+            <a:picLocks noChangeAspect="1"/>
+          </p:cNvPicPr>
+          <p:nvPr/>
+        </p:nvPicPr>
+        <p:blipFill>
+          <a:blip r:embed="rId2">
+            <a:extLst>
+              <a:ext uri="{28A0092B-C50C-407E-A947-70E740481C1C}">
+                <a14:useLocalDpi xmlns:a14="http://schemas.microsoft.com/office/drawing/2010/main" val="0"/>
+              </a:ext>
+            </a:extLst>
+          </a:blip>
+          <a:stretch>
+            <a:fillRect/>
+          </a:stretch>
+        </p:blipFill>
+        <p:spPr>
+          <a:xfrm>
+            <a:off x="6753098" y="4493485"/>
+            <a:ext cx="3434926" cy="2068321"/>
+          </a:xfrm>
+          <a:prstGeom prst="rect">
+            <a:avLst/>
+          </a:prstGeom>
+        </p:spPr>
+      </p:pic>
+      <p:pic>
+        <p:nvPicPr>
+          <p:cNvPr id="7" name="Picture 6">
+            <a:extLst>
+              <a:ext uri="{FF2B5EF4-FFF2-40B4-BE49-F238E27FC236}">
+                <a16:creationId xmlns:a16="http://schemas.microsoft.com/office/drawing/2014/main" id="{439E3ACA-5488-C982-B9A7-F9345FAA5B5B}"/>
+              </a:ext>
+            </a:extLst>
+          </p:cNvPr>
+          <p:cNvPicPr>
+            <a:picLocks noChangeAspect="1"/>
+          </p:cNvPicPr>
+          <p:nvPr/>
+        </p:nvPicPr>
+        <p:blipFill>
+          <a:blip r:embed="rId3">
+            <a:extLst>
+              <a:ext uri="{28A0092B-C50C-407E-A947-70E740481C1C}">
+                <a14:useLocalDpi xmlns:a14="http://schemas.microsoft.com/office/drawing/2010/main" val="0"/>
+              </a:ext>
+            </a:extLst>
+          </a:blip>
+          <a:stretch>
+            <a:fillRect/>
+          </a:stretch>
+        </p:blipFill>
+        <p:spPr>
+          <a:xfrm>
+            <a:off x="373558" y="2442827"/>
+            <a:ext cx="3224718" cy="1941745"/>
+          </a:xfrm>
+          <a:prstGeom prst="rect">
+            <a:avLst/>
+          </a:prstGeom>
+        </p:spPr>
+      </p:pic>
+      <p:pic>
+        <p:nvPicPr>
+          <p:cNvPr id="11" name="Picture 10">
+            <a:extLst>
+              <a:ext uri="{FF2B5EF4-FFF2-40B4-BE49-F238E27FC236}">
+                <a16:creationId xmlns:a16="http://schemas.microsoft.com/office/drawing/2014/main" id="{A2858432-70BE-BFA3-8784-BFB5500C7B0F}"/>
+              </a:ext>
+            </a:extLst>
+          </p:cNvPr>
+          <p:cNvPicPr>
+            <a:picLocks noChangeAspect="1"/>
+          </p:cNvPicPr>
+          <p:nvPr/>
+        </p:nvPicPr>
+        <p:blipFill>
+          <a:blip r:embed="rId4">
+            <a:extLst>
+              <a:ext uri="{28A0092B-C50C-407E-A947-70E740481C1C}">
+                <a14:useLocalDpi xmlns:a14="http://schemas.microsoft.com/office/drawing/2010/main" val="0"/>
+              </a:ext>
+            </a:extLst>
+          </a:blip>
+          <a:stretch>
+            <a:fillRect/>
+          </a:stretch>
+        </p:blipFill>
+        <p:spPr>
+          <a:xfrm>
+            <a:off x="2615778" y="4499765"/>
+            <a:ext cx="3365211" cy="2026342"/>
+          </a:xfrm>
+          <a:prstGeom prst="rect">
+            <a:avLst/>
+          </a:prstGeom>
+        </p:spPr>
+      </p:pic>
     </p:spTree>
     <p:extLst>
       <p:ext uri="{BB962C8B-B14F-4D97-AF65-F5344CB8AC3E}">
         <p14:creationId xmlns:p14="http://schemas.microsoft.com/office/powerpoint/2010/main" val="796954924"/>
+      </p:ext>
+    </p:extLst>
+  </p:cSld>
+  <p:clrMapOvr>
+    <a:masterClrMapping/>
+  </p:clrMapOvr>
+</p:sld>
+</file>
+
+<file path=ppt/slides/slide15.xml><?xml version="1.0" encoding="utf-8"?>
+<p:sld xmlns:a="http://schemas.openxmlformats.org/drawingml/2006/main" xmlns:r="http://schemas.openxmlformats.org/officeDocument/2006/relationships" xmlns:p="http://schemas.openxmlformats.org/presentationml/2006/main">
+  <p:cSld>
+    <p:bg>
+      <p:bgPr>
+        <a:solidFill>
+          <a:schemeClr val="bg1"/>
+        </a:solidFill>
+        <a:effectLst/>
+      </p:bgPr>
+    </p:bg>
+    <p:spTree>
+      <p:nvGrpSpPr>
+        <p:cNvPr id="1" name="">
+          <a:extLst>
+            <a:ext uri="{FF2B5EF4-FFF2-40B4-BE49-F238E27FC236}">
+              <a16:creationId xmlns:a16="http://schemas.microsoft.com/office/drawing/2014/main" id="{30D63DE4-0879-887A-4C9E-583399216FC2}"/>
+            </a:ext>
+          </a:extLst>
+        </p:cNvPr>
+        <p:cNvGrpSpPr/>
+        <p:nvPr/>
+      </p:nvGrpSpPr>
+      <p:grpSpPr>
+        <a:xfrm>
+          <a:off x="0" y="0"/>
+          <a:ext cx="0" cy="0"/>
+          <a:chOff x="0" y="0"/>
+          <a:chExt cx="0" cy="0"/>
+        </a:xfrm>
+      </p:grpSpPr>
+      <p:sp>
+        <p:nvSpPr>
+          <p:cNvPr id="8" name="Rectangle 7">
+            <a:extLst>
+              <a:ext uri="{FF2B5EF4-FFF2-40B4-BE49-F238E27FC236}">
+                <a16:creationId xmlns:a16="http://schemas.microsoft.com/office/drawing/2014/main" id="{74A40B32-988B-E493-8F2B-F4F4F771D4D3}"/>
+              </a:ext>
+              <a:ext uri="{C183D7F6-B498-43B3-948B-1728B52AA6E4}">
+                <adec:decorative xmlns:adec="http://schemas.microsoft.com/office/drawing/2017/decorative" val="1"/>
+              </a:ext>
+            </a:extLst>
+          </p:cNvPr>
+          <p:cNvSpPr>
+            <a:spLocks noGrp="1" noRot="1" noChangeAspect="1" noMove="1" noResize="1" noEditPoints="1" noAdjustHandles="1" noChangeArrowheads="1" noChangeShapeType="1" noTextEdit="1"/>
+          </p:cNvSpPr>
+          <p:nvPr>
+            <p:extLst>
+              <p:ext uri="{386F3935-93C4-4BCD-93E2-E3B085C9AB24}">
+                <p16:designElem xmlns:p16="http://schemas.microsoft.com/office/powerpoint/2015/main" val="1"/>
+              </p:ext>
+            </p:extLst>
+          </p:nvPr>
+        </p:nvSpPr>
+        <p:spPr>
+          <a:xfrm>
+            <a:off x="0" y="0"/>
+            <a:ext cx="12192000" cy="6858000"/>
+          </a:xfrm>
+          <a:prstGeom prst="rect">
+            <a:avLst/>
+          </a:prstGeom>
+          <a:solidFill>
+            <a:schemeClr val="tx1">
+              <a:lumMod val="95000"/>
+              <a:lumOff val="5000"/>
+            </a:schemeClr>
+          </a:solidFill>
+          <a:ln>
+            <a:noFill/>
+          </a:ln>
+        </p:spPr>
+        <p:style>
+          <a:lnRef idx="2">
+            <a:schemeClr val="accent1">
+              <a:shade val="50000"/>
+            </a:schemeClr>
+          </a:lnRef>
+          <a:fillRef idx="1">
+            <a:schemeClr val="accent1"/>
+          </a:fillRef>
+          <a:effectRef idx="0">
+            <a:schemeClr val="accent1"/>
+          </a:effectRef>
+          <a:fontRef idx="minor">
+            <a:schemeClr val="lt1"/>
+          </a:fontRef>
+        </p:style>
+        <p:txBody>
+          <a:bodyPr rtlCol="0" anchor="ctr"/>
+          <a:lstStyle/>
+          <a:p>
+            <a:pPr algn="ctr"/>
+            <a:endParaRPr lang="en-US" dirty="0">
+              <a:solidFill>
+                <a:schemeClr val="tx1"/>
+              </a:solidFill>
+            </a:endParaRPr>
+          </a:p>
+        </p:txBody>
+      </p:sp>
+      <p:sp>
+        <p:nvSpPr>
+          <p:cNvPr id="2" name="Title 1">
+            <a:extLst>
+              <a:ext uri="{FF2B5EF4-FFF2-40B4-BE49-F238E27FC236}">
+                <a16:creationId xmlns:a16="http://schemas.microsoft.com/office/drawing/2014/main" id="{A04982B3-6475-3508-CE35-C7B66FDACE6C}"/>
+              </a:ext>
+            </a:extLst>
+          </p:cNvPr>
+          <p:cNvSpPr>
+            <a:spLocks noGrp="1"/>
+          </p:cNvSpPr>
+          <p:nvPr>
+            <p:ph type="title"/>
+          </p:nvPr>
+        </p:nvSpPr>
+        <p:spPr>
+          <a:xfrm>
+            <a:off x="-587479" y="700777"/>
+            <a:ext cx="6054213" cy="1325563"/>
+          </a:xfrm>
+        </p:spPr>
+        <p:txBody>
+          <a:bodyPr anchor="b">
+            <a:normAutofit/>
+          </a:bodyPr>
+          <a:lstStyle/>
+          <a:p>
+            <a:pPr algn="r"/>
+            <a:r>
+              <a:rPr lang="en-US" dirty="0">
+                <a:solidFill>
+                  <a:schemeClr val="bg1"/>
+                </a:solidFill>
+              </a:rPr>
+              <a:t>Histograms</a:t>
+            </a:r>
+          </a:p>
+        </p:txBody>
+      </p:sp>
+      <p:cxnSp>
+        <p:nvCxnSpPr>
+          <p:cNvPr id="10" name="Straight Connector 9">
+            <a:extLst>
+              <a:ext uri="{FF2B5EF4-FFF2-40B4-BE49-F238E27FC236}">
+                <a16:creationId xmlns:a16="http://schemas.microsoft.com/office/drawing/2014/main" id="{88836A85-B1A2-9042-6D72-DF357FDBCAD9}"/>
+              </a:ext>
+              <a:ext uri="{C183D7F6-B498-43B3-948B-1728B52AA6E4}">
+                <adec:decorative xmlns:adec="http://schemas.microsoft.com/office/drawing/2017/decorative" val="1"/>
+              </a:ext>
+            </a:extLst>
+          </p:cNvPr>
+          <p:cNvCxnSpPr>
+            <a:cxnSpLocks noGrp="1" noRot="1" noChangeAspect="1" noMove="1" noResize="1" noEditPoints="1" noAdjustHandles="1" noChangeArrowheads="1" noChangeShapeType="1"/>
+          </p:cNvCxnSpPr>
+          <p:nvPr>
+            <p:extLst>
+              <p:ext uri="{386F3935-93C4-4BCD-93E2-E3B085C9AB24}">
+                <p16:designElem xmlns:p16="http://schemas.microsoft.com/office/powerpoint/2015/main" val="1"/>
+              </p:ext>
+            </p:extLst>
+          </p:nvPr>
+        </p:nvCxnSpPr>
+        <p:spPr>
+          <a:xfrm flipH="1">
+            <a:off x="126210" y="2026340"/>
+            <a:ext cx="5220936" cy="0"/>
+          </a:xfrm>
+          <a:prstGeom prst="line">
+            <a:avLst/>
+          </a:prstGeom>
+          <a:ln w="12700">
+            <a:solidFill>
+              <a:schemeClr val="accent2"/>
+            </a:solidFill>
+          </a:ln>
+        </p:spPr>
+        <p:style>
+          <a:lnRef idx="1">
+            <a:schemeClr val="accent1"/>
+          </a:lnRef>
+          <a:fillRef idx="0">
+            <a:schemeClr val="accent1"/>
+          </a:fillRef>
+          <a:effectRef idx="0">
+            <a:schemeClr val="accent1"/>
+          </a:effectRef>
+          <a:fontRef idx="minor">
+            <a:schemeClr val="tx1"/>
+          </a:fontRef>
+        </p:style>
+      </p:cxnSp>
+      <p:sp>
+        <p:nvSpPr>
+          <p:cNvPr id="12" name="Rectangle 11">
+            <a:extLst>
+              <a:ext uri="{FF2B5EF4-FFF2-40B4-BE49-F238E27FC236}">
+                <a16:creationId xmlns:a16="http://schemas.microsoft.com/office/drawing/2014/main" id="{8618C0AC-9298-2227-AF23-AC41ACB4BA0D}"/>
+              </a:ext>
+              <a:ext uri="{C183D7F6-B498-43B3-948B-1728B52AA6E4}">
+                <adec:decorative xmlns:adec="http://schemas.microsoft.com/office/drawing/2017/decorative" val="1"/>
+              </a:ext>
+            </a:extLst>
+          </p:cNvPr>
+          <p:cNvSpPr>
+            <a:spLocks noGrp="1" noRot="1" noChangeAspect="1" noMove="1" noResize="1" noEditPoints="1" noAdjustHandles="1" noChangeArrowheads="1" noChangeShapeType="1" noTextEdit="1"/>
+          </p:cNvSpPr>
+          <p:nvPr>
+            <p:extLst>
+              <p:ext uri="{386F3935-93C4-4BCD-93E2-E3B085C9AB24}">
+                <p16:designElem xmlns:p16="http://schemas.microsoft.com/office/powerpoint/2015/main" val="1"/>
+              </p:ext>
+            </p:extLst>
+          </p:nvPr>
+        </p:nvSpPr>
+        <p:spPr>
+          <a:xfrm>
+            <a:off x="126206" y="115193"/>
+            <a:ext cx="11939588" cy="6627614"/>
+          </a:xfrm>
+          <a:prstGeom prst="rect">
+            <a:avLst/>
+          </a:prstGeom>
+          <a:noFill/>
+          <a:ln w="12700">
+            <a:solidFill>
+              <a:schemeClr val="accent2"/>
+            </a:solidFill>
+          </a:ln>
+        </p:spPr>
+        <p:style>
+          <a:lnRef idx="2">
+            <a:schemeClr val="accent1">
+              <a:shade val="50000"/>
+            </a:schemeClr>
+          </a:lnRef>
+          <a:fillRef idx="1">
+            <a:schemeClr val="accent1"/>
+          </a:fillRef>
+          <a:effectRef idx="0">
+            <a:schemeClr val="accent1"/>
+          </a:effectRef>
+          <a:fontRef idx="minor">
+            <a:schemeClr val="lt1"/>
+          </a:fontRef>
+        </p:style>
+        <p:txBody>
+          <a:bodyPr rtlCol="0" anchor="ctr"/>
+          <a:lstStyle/>
+          <a:p>
+            <a:pPr algn="ctr"/>
+            <a:endParaRPr lang="en-US"/>
+          </a:p>
+        </p:txBody>
+      </p:sp>
+      <p:pic>
+        <p:nvPicPr>
+          <p:cNvPr id="6" name="Picture 5">
+            <a:extLst>
+              <a:ext uri="{FF2B5EF4-FFF2-40B4-BE49-F238E27FC236}">
+                <a16:creationId xmlns:a16="http://schemas.microsoft.com/office/drawing/2014/main" id="{627F2D50-1D56-6B37-26A3-CA53ADD2C9F6}"/>
+              </a:ext>
+            </a:extLst>
+          </p:cNvPr>
+          <p:cNvPicPr>
+            <a:picLocks noChangeAspect="1"/>
+          </p:cNvPicPr>
+          <p:nvPr/>
+        </p:nvPicPr>
+        <p:blipFill>
+          <a:blip r:embed="rId2">
+            <a:extLst>
+              <a:ext uri="{28A0092B-C50C-407E-A947-70E740481C1C}">
+                <a14:useLocalDpi xmlns:a14="http://schemas.microsoft.com/office/drawing/2010/main" val="0"/>
+              </a:ext>
+            </a:extLst>
+          </a:blip>
+          <a:stretch>
+            <a:fillRect/>
+          </a:stretch>
+        </p:blipFill>
+        <p:spPr>
+          <a:xfrm>
+            <a:off x="8452274" y="4622189"/>
+            <a:ext cx="3119619" cy="1878460"/>
+          </a:xfrm>
+          <a:prstGeom prst="rect">
+            <a:avLst/>
+          </a:prstGeom>
+        </p:spPr>
+      </p:pic>
+      <p:pic>
+        <p:nvPicPr>
+          <p:cNvPr id="13" name="Picture 12">
+            <a:extLst>
+              <a:ext uri="{FF2B5EF4-FFF2-40B4-BE49-F238E27FC236}">
+                <a16:creationId xmlns:a16="http://schemas.microsoft.com/office/drawing/2014/main" id="{0D14E056-C06F-79EC-0BD7-49514EDB00BA}"/>
+              </a:ext>
+            </a:extLst>
+          </p:cNvPr>
+          <p:cNvPicPr>
+            <a:picLocks noChangeAspect="1"/>
+          </p:cNvPicPr>
+          <p:nvPr/>
+        </p:nvPicPr>
+        <p:blipFill>
+          <a:blip r:embed="rId3">
+            <a:extLst>
+              <a:ext uri="{28A0092B-C50C-407E-A947-70E740481C1C}">
+                <a14:useLocalDpi xmlns:a14="http://schemas.microsoft.com/office/drawing/2010/main" val="0"/>
+              </a:ext>
+            </a:extLst>
+          </a:blip>
+          <a:stretch>
+            <a:fillRect/>
+          </a:stretch>
+        </p:blipFill>
+        <p:spPr>
+          <a:xfrm>
+            <a:off x="3520440" y="2228980"/>
+            <a:ext cx="3119617" cy="1878459"/>
+          </a:xfrm>
+          <a:prstGeom prst="rect">
+            <a:avLst/>
+          </a:prstGeom>
+        </p:spPr>
+      </p:pic>
+      <p:pic>
+        <p:nvPicPr>
+          <p:cNvPr id="15" name="Picture 14">
+            <a:extLst>
+              <a:ext uri="{FF2B5EF4-FFF2-40B4-BE49-F238E27FC236}">
+                <a16:creationId xmlns:a16="http://schemas.microsoft.com/office/drawing/2014/main" id="{5B9BB08F-C0F2-0E32-B5AC-669EE9CC30E4}"/>
+              </a:ext>
+            </a:extLst>
+          </p:cNvPr>
+          <p:cNvPicPr>
+            <a:picLocks noChangeAspect="1"/>
+          </p:cNvPicPr>
+          <p:nvPr/>
+        </p:nvPicPr>
+        <p:blipFill>
+          <a:blip r:embed="rId4">
+            <a:extLst>
+              <a:ext uri="{28A0092B-C50C-407E-A947-70E740481C1C}">
+                <a14:useLocalDpi xmlns:a14="http://schemas.microsoft.com/office/drawing/2010/main" val="0"/>
+              </a:ext>
+            </a:extLst>
+          </a:blip>
+          <a:stretch>
+            <a:fillRect/>
+          </a:stretch>
+        </p:blipFill>
+        <p:spPr>
+          <a:xfrm>
+            <a:off x="6986045" y="2235811"/>
+            <a:ext cx="3119614" cy="1878457"/>
+          </a:xfrm>
+          <a:prstGeom prst="rect">
+            <a:avLst/>
+          </a:prstGeom>
+        </p:spPr>
+      </p:pic>
+      <p:pic>
+        <p:nvPicPr>
+          <p:cNvPr id="17" name="Picture 16">
+            <a:extLst>
+              <a:ext uri="{FF2B5EF4-FFF2-40B4-BE49-F238E27FC236}">
+                <a16:creationId xmlns:a16="http://schemas.microsoft.com/office/drawing/2014/main" id="{8B26FE9B-C4F1-E59B-BE63-D81621849142}"/>
+              </a:ext>
+            </a:extLst>
+          </p:cNvPr>
+          <p:cNvPicPr>
+            <a:picLocks noChangeAspect="1"/>
+          </p:cNvPicPr>
+          <p:nvPr/>
+        </p:nvPicPr>
+        <p:blipFill>
+          <a:blip r:embed="rId5">
+            <a:extLst>
+              <a:ext uri="{28A0092B-C50C-407E-A947-70E740481C1C}">
+                <a14:useLocalDpi xmlns:a14="http://schemas.microsoft.com/office/drawing/2010/main" val="0"/>
+              </a:ext>
+            </a:extLst>
+          </a:blip>
+          <a:stretch>
+            <a:fillRect/>
+          </a:stretch>
+        </p:blipFill>
+        <p:spPr>
+          <a:xfrm>
+            <a:off x="1960633" y="4629020"/>
+            <a:ext cx="3119615" cy="1878458"/>
+          </a:xfrm>
+          <a:prstGeom prst="rect">
+            <a:avLst/>
+          </a:prstGeom>
+        </p:spPr>
+      </p:pic>
+      <p:pic>
+        <p:nvPicPr>
+          <p:cNvPr id="19" name="Picture 18">
+            <a:extLst>
+              <a:ext uri="{FF2B5EF4-FFF2-40B4-BE49-F238E27FC236}">
+                <a16:creationId xmlns:a16="http://schemas.microsoft.com/office/drawing/2014/main" id="{F7E0140A-29EB-5093-FEEA-B2D7DD46E9C3}"/>
+              </a:ext>
+            </a:extLst>
+          </p:cNvPr>
+          <p:cNvPicPr>
+            <a:picLocks noChangeAspect="1"/>
+          </p:cNvPicPr>
+          <p:nvPr/>
+        </p:nvPicPr>
+        <p:blipFill>
+          <a:blip r:embed="rId6">
+            <a:extLst>
+              <a:ext uri="{28A0092B-C50C-407E-A947-70E740481C1C}">
+                <a14:useLocalDpi xmlns:a14="http://schemas.microsoft.com/office/drawing/2010/main" val="0"/>
+              </a:ext>
+            </a:extLst>
+          </a:blip>
+          <a:stretch>
+            <a:fillRect/>
+          </a:stretch>
+        </p:blipFill>
+        <p:spPr>
+          <a:xfrm>
+            <a:off x="5206454" y="4629020"/>
+            <a:ext cx="3119614" cy="1878457"/>
+          </a:xfrm>
+          <a:prstGeom prst="rect">
+            <a:avLst/>
+          </a:prstGeom>
+        </p:spPr>
+      </p:pic>
+      <p:sp>
+        <p:nvSpPr>
+          <p:cNvPr id="20" name="Content Placeholder 2">
+            <a:extLst>
+              <a:ext uri="{FF2B5EF4-FFF2-40B4-BE49-F238E27FC236}">
+                <a16:creationId xmlns:a16="http://schemas.microsoft.com/office/drawing/2014/main" id="{FFC54E95-3953-9570-D812-7732F122997E}"/>
+              </a:ext>
+            </a:extLst>
+          </p:cNvPr>
+          <p:cNvSpPr txBox="1">
+            <a:spLocks/>
+          </p:cNvSpPr>
+          <p:nvPr/>
+        </p:nvSpPr>
+        <p:spPr>
+          <a:xfrm>
+            <a:off x="176582" y="2339862"/>
+            <a:ext cx="6341728" cy="4107656"/>
+          </a:xfrm>
+          <a:prstGeom prst="rect">
+            <a:avLst/>
+          </a:prstGeom>
+        </p:spPr>
+        <p:txBody>
+          <a:bodyPr vert="horz" lIns="91440" tIns="45720" rIns="91440" bIns="45720" rtlCol="0">
+            <a:normAutofit/>
+          </a:bodyPr>
+          <a:lstStyle>
+            <a:lvl1pPr marL="228600" indent="-228600" algn="l" defTabSz="914400" rtl="0" eaLnBrk="1" latinLnBrk="0" hangingPunct="1">
+              <a:lnSpc>
+                <a:spcPct val="90000"/>
+              </a:lnSpc>
+              <a:spcBef>
+                <a:spcPts val="1000"/>
+              </a:spcBef>
+              <a:buFont typeface="Arial" panose="020B0604020202020204" pitchFamily="34" charset="0"/>
+              <a:buChar char="•"/>
+              <a:defRPr sz="2800" kern="1200">
+                <a:solidFill>
+                  <a:schemeClr val="tx1"/>
+                </a:solidFill>
+                <a:latin typeface="+mn-lt"/>
+                <a:ea typeface="+mn-ea"/>
+                <a:cs typeface="+mn-cs"/>
+              </a:defRPr>
+            </a:lvl1pPr>
+            <a:lvl2pPr marL="685800" indent="-228600" algn="l" defTabSz="914400" rtl="0" eaLnBrk="1" latinLnBrk="0" hangingPunct="1">
+              <a:lnSpc>
+                <a:spcPct val="90000"/>
+              </a:lnSpc>
+              <a:spcBef>
+                <a:spcPts val="500"/>
+              </a:spcBef>
+              <a:buFont typeface="Arial" panose="020B0604020202020204" pitchFamily="34" charset="0"/>
+              <a:buChar char="•"/>
+              <a:defRPr sz="2400" kern="1200">
+                <a:solidFill>
+                  <a:schemeClr val="tx1"/>
+                </a:solidFill>
+                <a:latin typeface="+mn-lt"/>
+                <a:ea typeface="+mn-ea"/>
+                <a:cs typeface="+mn-cs"/>
+              </a:defRPr>
+            </a:lvl2pPr>
+            <a:lvl3pPr marL="1143000" indent="-228600" algn="l" defTabSz="914400" rtl="0" eaLnBrk="1" latinLnBrk="0" hangingPunct="1">
+              <a:lnSpc>
+                <a:spcPct val="90000"/>
+              </a:lnSpc>
+              <a:spcBef>
+                <a:spcPts val="500"/>
+              </a:spcBef>
+              <a:buFont typeface="Arial" panose="020B0604020202020204" pitchFamily="34" charset="0"/>
+              <a:buChar char="•"/>
+              <a:defRPr sz="2000" kern="1200">
+                <a:solidFill>
+                  <a:schemeClr val="tx1"/>
+                </a:solidFill>
+                <a:latin typeface="+mn-lt"/>
+                <a:ea typeface="+mn-ea"/>
+                <a:cs typeface="+mn-cs"/>
+              </a:defRPr>
+            </a:lvl3pPr>
+            <a:lvl4pPr marL="1600200" indent="-228600" algn="l" defTabSz="914400" rtl="0" eaLnBrk="1" latinLnBrk="0" hangingPunct="1">
+              <a:lnSpc>
+                <a:spcPct val="90000"/>
+              </a:lnSpc>
+              <a:spcBef>
+                <a:spcPts val="500"/>
+              </a:spcBef>
+              <a:buFont typeface="Arial" panose="020B0604020202020204" pitchFamily="34" charset="0"/>
+              <a:buChar char="•"/>
+              <a:defRPr sz="1800" kern="1200">
+                <a:solidFill>
+                  <a:schemeClr val="tx1"/>
+                </a:solidFill>
+                <a:latin typeface="+mn-lt"/>
+                <a:ea typeface="+mn-ea"/>
+                <a:cs typeface="+mn-cs"/>
+              </a:defRPr>
+            </a:lvl4pPr>
+            <a:lvl5pPr marL="2057400" indent="-228600" algn="l" defTabSz="914400" rtl="0" eaLnBrk="1" latinLnBrk="0" hangingPunct="1">
+              <a:lnSpc>
+                <a:spcPct val="90000"/>
+              </a:lnSpc>
+              <a:spcBef>
+                <a:spcPts val="500"/>
+              </a:spcBef>
+              <a:buFont typeface="Arial" panose="020B0604020202020204" pitchFamily="34" charset="0"/>
+              <a:buChar char="•"/>
+              <a:defRPr sz="1800" kern="1200">
+                <a:solidFill>
+                  <a:schemeClr val="tx1"/>
+                </a:solidFill>
+                <a:latin typeface="+mn-lt"/>
+                <a:ea typeface="+mn-ea"/>
+                <a:cs typeface="+mn-cs"/>
+              </a:defRPr>
+            </a:lvl5pPr>
+            <a:lvl6pPr marL="2514600" indent="-228600" algn="l" defTabSz="914400" rtl="0" eaLnBrk="1" latinLnBrk="0" hangingPunct="1">
+              <a:lnSpc>
+                <a:spcPct val="90000"/>
+              </a:lnSpc>
+              <a:spcBef>
+                <a:spcPts val="500"/>
+              </a:spcBef>
+              <a:buFont typeface="Arial" panose="020B0604020202020204" pitchFamily="34" charset="0"/>
+              <a:buChar char="•"/>
+              <a:defRPr sz="1800" kern="1200">
+                <a:solidFill>
+                  <a:schemeClr val="tx1"/>
+                </a:solidFill>
+                <a:latin typeface="+mn-lt"/>
+                <a:ea typeface="+mn-ea"/>
+                <a:cs typeface="+mn-cs"/>
+              </a:defRPr>
+            </a:lvl6pPr>
+            <a:lvl7pPr marL="2971800" indent="-228600" algn="l" defTabSz="914400" rtl="0" eaLnBrk="1" latinLnBrk="0" hangingPunct="1">
+              <a:lnSpc>
+                <a:spcPct val="90000"/>
+              </a:lnSpc>
+              <a:spcBef>
+                <a:spcPts val="500"/>
+              </a:spcBef>
+              <a:buFont typeface="Arial" panose="020B0604020202020204" pitchFamily="34" charset="0"/>
+              <a:buChar char="•"/>
+              <a:defRPr sz="1800" kern="1200">
+                <a:solidFill>
+                  <a:schemeClr val="tx1"/>
+                </a:solidFill>
+                <a:latin typeface="+mn-lt"/>
+                <a:ea typeface="+mn-ea"/>
+                <a:cs typeface="+mn-cs"/>
+              </a:defRPr>
+            </a:lvl7pPr>
+            <a:lvl8pPr marL="3429000" indent="-228600" algn="l" defTabSz="914400" rtl="0" eaLnBrk="1" latinLnBrk="0" hangingPunct="1">
+              <a:lnSpc>
+                <a:spcPct val="90000"/>
+              </a:lnSpc>
+              <a:spcBef>
+                <a:spcPts val="500"/>
+              </a:spcBef>
+              <a:buFont typeface="Arial" panose="020B0604020202020204" pitchFamily="34" charset="0"/>
+              <a:buChar char="•"/>
+              <a:defRPr sz="1800" kern="1200">
+                <a:solidFill>
+                  <a:schemeClr val="tx1"/>
+                </a:solidFill>
+                <a:latin typeface="+mn-lt"/>
+                <a:ea typeface="+mn-ea"/>
+                <a:cs typeface="+mn-cs"/>
+              </a:defRPr>
+            </a:lvl8pPr>
+            <a:lvl9pPr marL="3886200" indent="-228600" algn="l" defTabSz="914400" rtl="0" eaLnBrk="1" latinLnBrk="0" hangingPunct="1">
+              <a:lnSpc>
+                <a:spcPct val="90000"/>
+              </a:lnSpc>
+              <a:spcBef>
+                <a:spcPts val="500"/>
+              </a:spcBef>
+              <a:buFont typeface="Arial" panose="020B0604020202020204" pitchFamily="34" charset="0"/>
+              <a:buChar char="•"/>
+              <a:defRPr sz="1800" kern="1200">
+                <a:solidFill>
+                  <a:schemeClr val="tx1"/>
+                </a:solidFill>
+                <a:latin typeface="+mn-lt"/>
+                <a:ea typeface="+mn-ea"/>
+                <a:cs typeface="+mn-cs"/>
+              </a:defRPr>
+            </a:lvl9pPr>
+          </a:lstStyle>
+          <a:p>
+            <a:pPr lvl="1">
+              <a:lnSpc>
+                <a:spcPct val="100000"/>
+              </a:lnSpc>
+            </a:pPr>
+            <a:r>
+              <a:rPr lang="en-US" sz="2000" dirty="0">
+                <a:solidFill>
+                  <a:schemeClr val="bg1"/>
+                </a:solidFill>
+              </a:rPr>
+              <a:t>SNR 0 dB</a:t>
+            </a:r>
+          </a:p>
+          <a:p>
+            <a:pPr lvl="1">
+              <a:lnSpc>
+                <a:spcPct val="100000"/>
+              </a:lnSpc>
+            </a:pPr>
+            <a:r>
+              <a:rPr lang="en-US" sz="2000" dirty="0">
+                <a:solidFill>
+                  <a:schemeClr val="bg1"/>
+                </a:solidFill>
+              </a:rPr>
+              <a:t>SNR -5 dB</a:t>
+            </a:r>
+          </a:p>
+          <a:p>
+            <a:pPr lvl="1">
+              <a:lnSpc>
+                <a:spcPct val="100000"/>
+              </a:lnSpc>
+            </a:pPr>
+            <a:r>
+              <a:rPr lang="en-US" sz="2000" dirty="0">
+                <a:solidFill>
+                  <a:schemeClr val="bg1"/>
+                </a:solidFill>
+              </a:rPr>
+              <a:t>SNR -10 dB</a:t>
+            </a:r>
+          </a:p>
+          <a:p>
+            <a:pPr lvl="1">
+              <a:lnSpc>
+                <a:spcPct val="100000"/>
+              </a:lnSpc>
+            </a:pPr>
+            <a:r>
+              <a:rPr lang="en-US" sz="2000" dirty="0">
+                <a:solidFill>
+                  <a:schemeClr val="bg1"/>
+                </a:solidFill>
+              </a:rPr>
+              <a:t>SNR -15 dB</a:t>
+            </a:r>
+          </a:p>
+          <a:p>
+            <a:pPr lvl="1">
+              <a:lnSpc>
+                <a:spcPct val="100000"/>
+              </a:lnSpc>
+            </a:pPr>
+            <a:r>
+              <a:rPr lang="en-US" sz="2000" dirty="0">
+                <a:solidFill>
+                  <a:schemeClr val="bg1"/>
+                </a:solidFill>
+              </a:rPr>
+              <a:t>SNR -20dB</a:t>
+            </a:r>
+          </a:p>
+          <a:p>
+            <a:pPr lvl="1">
+              <a:lnSpc>
+                <a:spcPct val="100000"/>
+              </a:lnSpc>
+            </a:pPr>
+            <a:endParaRPr lang="en-US" sz="1800" dirty="0">
+              <a:solidFill>
+                <a:schemeClr val="bg1"/>
+              </a:solidFill>
+            </a:endParaRPr>
+          </a:p>
+          <a:p>
+            <a:pPr marL="457200" lvl="1" indent="0">
+              <a:buFont typeface="Arial" panose="020B0604020202020204" pitchFamily="34" charset="0"/>
+              <a:buNone/>
+            </a:pPr>
+            <a:endParaRPr lang="en-US" sz="2000" dirty="0">
+              <a:solidFill>
+                <a:schemeClr val="bg1"/>
+              </a:solidFill>
+            </a:endParaRPr>
+          </a:p>
+        </p:txBody>
+      </p:sp>
+    </p:spTree>
+    <p:extLst>
+      <p:ext uri="{BB962C8B-B14F-4D97-AF65-F5344CB8AC3E}">
+        <p14:creationId xmlns:p14="http://schemas.microsoft.com/office/powerpoint/2010/main" val="2486384820"/>
+      </p:ext>
+    </p:extLst>
+  </p:cSld>
+  <p:clrMapOvr>
+    <a:masterClrMapping/>
+  </p:clrMapOvr>
+</p:sld>
+</file>
+
+<file path=ppt/slides/slide16.xml><?xml version="1.0" encoding="utf-8"?>
+<p:sld xmlns:a="http://schemas.openxmlformats.org/drawingml/2006/main" xmlns:r="http://schemas.openxmlformats.org/officeDocument/2006/relationships" xmlns:p="http://schemas.openxmlformats.org/presentationml/2006/main">
+  <p:cSld>
+    <p:bg>
+      <p:bgPr>
+        <a:solidFill>
+          <a:schemeClr val="bg1"/>
+        </a:solidFill>
+        <a:effectLst/>
+      </p:bgPr>
+    </p:bg>
+    <p:spTree>
+      <p:nvGrpSpPr>
+        <p:cNvPr id="1" name="">
+          <a:extLst>
+            <a:ext uri="{FF2B5EF4-FFF2-40B4-BE49-F238E27FC236}">
+              <a16:creationId xmlns:a16="http://schemas.microsoft.com/office/drawing/2014/main" id="{C155FC57-A386-0885-EDB1-B3278E0EF792}"/>
+            </a:ext>
+          </a:extLst>
+        </p:cNvPr>
+        <p:cNvGrpSpPr/>
+        <p:nvPr/>
+      </p:nvGrpSpPr>
+      <p:grpSpPr>
+        <a:xfrm>
+          <a:off x="0" y="0"/>
+          <a:ext cx="0" cy="0"/>
+          <a:chOff x="0" y="0"/>
+          <a:chExt cx="0" cy="0"/>
+        </a:xfrm>
+      </p:grpSpPr>
+      <p:sp>
+        <p:nvSpPr>
+          <p:cNvPr id="8" name="Rectangle 7">
+            <a:extLst>
+              <a:ext uri="{FF2B5EF4-FFF2-40B4-BE49-F238E27FC236}">
+                <a16:creationId xmlns:a16="http://schemas.microsoft.com/office/drawing/2014/main" id="{354FA4C7-0D93-167E-908E-20A862E8BD45}"/>
+              </a:ext>
+              <a:ext uri="{C183D7F6-B498-43B3-948B-1728B52AA6E4}">
+                <adec:decorative xmlns:adec="http://schemas.microsoft.com/office/drawing/2017/decorative" val="1"/>
+              </a:ext>
+            </a:extLst>
+          </p:cNvPr>
+          <p:cNvSpPr>
+            <a:spLocks noGrp="1" noRot="1" noChangeAspect="1" noMove="1" noResize="1" noEditPoints="1" noAdjustHandles="1" noChangeArrowheads="1" noChangeShapeType="1" noTextEdit="1"/>
+          </p:cNvSpPr>
+          <p:nvPr>
+            <p:extLst>
+              <p:ext uri="{386F3935-93C4-4BCD-93E2-E3B085C9AB24}">
+                <p16:designElem xmlns:p16="http://schemas.microsoft.com/office/powerpoint/2015/main" val="1"/>
+              </p:ext>
+            </p:extLst>
+          </p:nvPr>
+        </p:nvSpPr>
+        <p:spPr>
+          <a:xfrm>
+            <a:off x="0" y="0"/>
+            <a:ext cx="12192000" cy="6858000"/>
+          </a:xfrm>
+          <a:prstGeom prst="rect">
+            <a:avLst/>
+          </a:prstGeom>
+          <a:solidFill>
+            <a:schemeClr val="tx1">
+              <a:lumMod val="95000"/>
+              <a:lumOff val="5000"/>
+            </a:schemeClr>
+          </a:solidFill>
+          <a:ln>
+            <a:noFill/>
+          </a:ln>
+        </p:spPr>
+        <p:style>
+          <a:lnRef idx="2">
+            <a:schemeClr val="accent1">
+              <a:shade val="50000"/>
+            </a:schemeClr>
+          </a:lnRef>
+          <a:fillRef idx="1">
+            <a:schemeClr val="accent1"/>
+          </a:fillRef>
+          <a:effectRef idx="0">
+            <a:schemeClr val="accent1"/>
+          </a:effectRef>
+          <a:fontRef idx="minor">
+            <a:schemeClr val="lt1"/>
+          </a:fontRef>
+        </p:style>
+        <p:txBody>
+          <a:bodyPr rtlCol="0" anchor="ctr"/>
+          <a:lstStyle/>
+          <a:p>
+            <a:pPr algn="ctr"/>
+            <a:endParaRPr lang="en-US" dirty="0">
+              <a:solidFill>
+                <a:schemeClr val="tx1"/>
+              </a:solidFill>
+            </a:endParaRPr>
+          </a:p>
+        </p:txBody>
+      </p:sp>
+      <p:sp>
+        <p:nvSpPr>
+          <p:cNvPr id="2" name="Title 1">
+            <a:extLst>
+              <a:ext uri="{FF2B5EF4-FFF2-40B4-BE49-F238E27FC236}">
+                <a16:creationId xmlns:a16="http://schemas.microsoft.com/office/drawing/2014/main" id="{F50ACA2D-72C8-4227-D679-0D6BFC9C6929}"/>
+              </a:ext>
+            </a:extLst>
+          </p:cNvPr>
+          <p:cNvSpPr>
+            <a:spLocks noGrp="1"/>
+          </p:cNvSpPr>
+          <p:nvPr>
+            <p:ph type="title"/>
+          </p:nvPr>
+        </p:nvSpPr>
+        <p:spPr>
+          <a:xfrm>
+            <a:off x="320339" y="115193"/>
+            <a:ext cx="6054213" cy="990017"/>
+          </a:xfrm>
+        </p:spPr>
+        <p:txBody>
+          <a:bodyPr anchor="b">
+            <a:normAutofit fontScale="90000"/>
+          </a:bodyPr>
+          <a:lstStyle/>
+          <a:p>
+            <a:pPr algn="r"/>
+            <a:r>
+              <a:rPr lang="en-US" dirty="0">
+                <a:solidFill>
+                  <a:schemeClr val="bg1"/>
+                </a:solidFill>
+              </a:rPr>
+              <a:t>ROC Curve (0 &amp; -5 dB SNR)</a:t>
+            </a:r>
+          </a:p>
+        </p:txBody>
+      </p:sp>
+      <p:cxnSp>
+        <p:nvCxnSpPr>
+          <p:cNvPr id="10" name="Straight Connector 9">
+            <a:extLst>
+              <a:ext uri="{FF2B5EF4-FFF2-40B4-BE49-F238E27FC236}">
+                <a16:creationId xmlns:a16="http://schemas.microsoft.com/office/drawing/2014/main" id="{74666294-B1E1-3034-17FB-24E639EF6C77}"/>
+              </a:ext>
+              <a:ext uri="{C183D7F6-B498-43B3-948B-1728B52AA6E4}">
+                <adec:decorative xmlns:adec="http://schemas.microsoft.com/office/drawing/2017/decorative" val="1"/>
+              </a:ext>
+            </a:extLst>
+          </p:cNvPr>
+          <p:cNvCxnSpPr>
+            <a:cxnSpLocks noGrp="1" noRot="1" noChangeAspect="1" noMove="1" noResize="1" noEditPoints="1" noAdjustHandles="1" noChangeArrowheads="1" noChangeShapeType="1"/>
+          </p:cNvCxnSpPr>
+          <p:nvPr>
+            <p:extLst>
+              <p:ext uri="{386F3935-93C4-4BCD-93E2-E3B085C9AB24}">
+                <p16:designElem xmlns:p16="http://schemas.microsoft.com/office/powerpoint/2015/main" val="1"/>
+              </p:ext>
+            </p:extLst>
+          </p:nvPr>
+        </p:nvCxnSpPr>
+        <p:spPr>
+          <a:xfrm flipH="1">
+            <a:off x="126210" y="2026340"/>
+            <a:ext cx="5220936" cy="0"/>
+          </a:xfrm>
+          <a:prstGeom prst="line">
+            <a:avLst/>
+          </a:prstGeom>
+          <a:ln w="12700">
+            <a:solidFill>
+              <a:schemeClr val="accent2"/>
+            </a:solidFill>
+          </a:ln>
+        </p:spPr>
+        <p:style>
+          <a:lnRef idx="1">
+            <a:schemeClr val="accent1"/>
+          </a:lnRef>
+          <a:fillRef idx="0">
+            <a:schemeClr val="accent1"/>
+          </a:fillRef>
+          <a:effectRef idx="0">
+            <a:schemeClr val="accent1"/>
+          </a:effectRef>
+          <a:fontRef idx="minor">
+            <a:schemeClr val="tx1"/>
+          </a:fontRef>
+        </p:style>
+      </p:cxnSp>
+      <p:sp>
+        <p:nvSpPr>
+          <p:cNvPr id="12" name="Rectangle 11">
+            <a:extLst>
+              <a:ext uri="{FF2B5EF4-FFF2-40B4-BE49-F238E27FC236}">
+                <a16:creationId xmlns:a16="http://schemas.microsoft.com/office/drawing/2014/main" id="{A5C98C60-5FD1-3F00-EB39-B7796993A841}"/>
+              </a:ext>
+              <a:ext uri="{C183D7F6-B498-43B3-948B-1728B52AA6E4}">
+                <adec:decorative xmlns:adec="http://schemas.microsoft.com/office/drawing/2017/decorative" val="1"/>
+              </a:ext>
+            </a:extLst>
+          </p:cNvPr>
+          <p:cNvSpPr>
+            <a:spLocks noGrp="1" noRot="1" noChangeAspect="1" noMove="1" noResize="1" noEditPoints="1" noAdjustHandles="1" noChangeArrowheads="1" noChangeShapeType="1" noTextEdit="1"/>
+          </p:cNvSpPr>
+          <p:nvPr>
+            <p:extLst>
+              <p:ext uri="{386F3935-93C4-4BCD-93E2-E3B085C9AB24}">
+                <p16:designElem xmlns:p16="http://schemas.microsoft.com/office/powerpoint/2015/main" val="1"/>
+              </p:ext>
+            </p:extLst>
+          </p:nvPr>
+        </p:nvSpPr>
+        <p:spPr>
+          <a:xfrm>
+            <a:off x="126206" y="115193"/>
+            <a:ext cx="11939588" cy="6627614"/>
+          </a:xfrm>
+          <a:prstGeom prst="rect">
+            <a:avLst/>
+          </a:prstGeom>
+          <a:noFill/>
+          <a:ln w="12700">
+            <a:solidFill>
+              <a:schemeClr val="accent2"/>
+            </a:solidFill>
+          </a:ln>
+        </p:spPr>
+        <p:style>
+          <a:lnRef idx="2">
+            <a:schemeClr val="accent1">
+              <a:shade val="50000"/>
+            </a:schemeClr>
+          </a:lnRef>
+          <a:fillRef idx="1">
+            <a:schemeClr val="accent1"/>
+          </a:fillRef>
+          <a:effectRef idx="0">
+            <a:schemeClr val="accent1"/>
+          </a:effectRef>
+          <a:fontRef idx="minor">
+            <a:schemeClr val="lt1"/>
+          </a:fontRef>
+        </p:style>
+        <p:txBody>
+          <a:bodyPr rtlCol="0" anchor="ctr"/>
+          <a:lstStyle/>
+          <a:p>
+            <a:pPr algn="ctr"/>
+            <a:endParaRPr lang="en-US"/>
+          </a:p>
+        </p:txBody>
+      </p:sp>
+      <p:sp>
+        <p:nvSpPr>
+          <p:cNvPr id="20" name="Content Placeholder 2">
+            <a:extLst>
+              <a:ext uri="{FF2B5EF4-FFF2-40B4-BE49-F238E27FC236}">
+                <a16:creationId xmlns:a16="http://schemas.microsoft.com/office/drawing/2014/main" id="{0FF95616-B13B-5579-E5FB-3F7C4110B794}"/>
+              </a:ext>
+            </a:extLst>
+          </p:cNvPr>
+          <p:cNvSpPr txBox="1">
+            <a:spLocks/>
+          </p:cNvSpPr>
+          <p:nvPr/>
+        </p:nvSpPr>
+        <p:spPr>
+          <a:xfrm>
+            <a:off x="176582" y="2339862"/>
+            <a:ext cx="6341728" cy="4107656"/>
+          </a:xfrm>
+          <a:prstGeom prst="rect">
+            <a:avLst/>
+          </a:prstGeom>
+        </p:spPr>
+        <p:txBody>
+          <a:bodyPr vert="horz" lIns="91440" tIns="45720" rIns="91440" bIns="45720" rtlCol="0">
+            <a:normAutofit/>
+          </a:bodyPr>
+          <a:lstStyle>
+            <a:lvl1pPr marL="228600" indent="-228600" algn="l" defTabSz="914400" rtl="0" eaLnBrk="1" latinLnBrk="0" hangingPunct="1">
+              <a:lnSpc>
+                <a:spcPct val="90000"/>
+              </a:lnSpc>
+              <a:spcBef>
+                <a:spcPts val="1000"/>
+              </a:spcBef>
+              <a:buFont typeface="Arial" panose="020B0604020202020204" pitchFamily="34" charset="0"/>
+              <a:buChar char="•"/>
+              <a:defRPr sz="2800" kern="1200">
+                <a:solidFill>
+                  <a:schemeClr val="tx1"/>
+                </a:solidFill>
+                <a:latin typeface="+mn-lt"/>
+                <a:ea typeface="+mn-ea"/>
+                <a:cs typeface="+mn-cs"/>
+              </a:defRPr>
+            </a:lvl1pPr>
+            <a:lvl2pPr marL="685800" indent="-228600" algn="l" defTabSz="914400" rtl="0" eaLnBrk="1" latinLnBrk="0" hangingPunct="1">
+              <a:lnSpc>
+                <a:spcPct val="90000"/>
+              </a:lnSpc>
+              <a:spcBef>
+                <a:spcPts val="500"/>
+              </a:spcBef>
+              <a:buFont typeface="Arial" panose="020B0604020202020204" pitchFamily="34" charset="0"/>
+              <a:buChar char="•"/>
+              <a:defRPr sz="2400" kern="1200">
+                <a:solidFill>
+                  <a:schemeClr val="tx1"/>
+                </a:solidFill>
+                <a:latin typeface="+mn-lt"/>
+                <a:ea typeface="+mn-ea"/>
+                <a:cs typeface="+mn-cs"/>
+              </a:defRPr>
+            </a:lvl2pPr>
+            <a:lvl3pPr marL="1143000" indent="-228600" algn="l" defTabSz="914400" rtl="0" eaLnBrk="1" latinLnBrk="0" hangingPunct="1">
+              <a:lnSpc>
+                <a:spcPct val="90000"/>
+              </a:lnSpc>
+              <a:spcBef>
+                <a:spcPts val="500"/>
+              </a:spcBef>
+              <a:buFont typeface="Arial" panose="020B0604020202020204" pitchFamily="34" charset="0"/>
+              <a:buChar char="•"/>
+              <a:defRPr sz="2000" kern="1200">
+                <a:solidFill>
+                  <a:schemeClr val="tx1"/>
+                </a:solidFill>
+                <a:latin typeface="+mn-lt"/>
+                <a:ea typeface="+mn-ea"/>
+                <a:cs typeface="+mn-cs"/>
+              </a:defRPr>
+            </a:lvl3pPr>
+            <a:lvl4pPr marL="1600200" indent="-228600" algn="l" defTabSz="914400" rtl="0" eaLnBrk="1" latinLnBrk="0" hangingPunct="1">
+              <a:lnSpc>
+                <a:spcPct val="90000"/>
+              </a:lnSpc>
+              <a:spcBef>
+                <a:spcPts val="500"/>
+              </a:spcBef>
+              <a:buFont typeface="Arial" panose="020B0604020202020204" pitchFamily="34" charset="0"/>
+              <a:buChar char="•"/>
+              <a:defRPr sz="1800" kern="1200">
+                <a:solidFill>
+                  <a:schemeClr val="tx1"/>
+                </a:solidFill>
+                <a:latin typeface="+mn-lt"/>
+                <a:ea typeface="+mn-ea"/>
+                <a:cs typeface="+mn-cs"/>
+              </a:defRPr>
+            </a:lvl4pPr>
+            <a:lvl5pPr marL="2057400" indent="-228600" algn="l" defTabSz="914400" rtl="0" eaLnBrk="1" latinLnBrk="0" hangingPunct="1">
+              <a:lnSpc>
+                <a:spcPct val="90000"/>
+              </a:lnSpc>
+              <a:spcBef>
+                <a:spcPts val="500"/>
+              </a:spcBef>
+              <a:buFont typeface="Arial" panose="020B0604020202020204" pitchFamily="34" charset="0"/>
+              <a:buChar char="•"/>
+              <a:defRPr sz="1800" kern="1200">
+                <a:solidFill>
+                  <a:schemeClr val="tx1"/>
+                </a:solidFill>
+                <a:latin typeface="+mn-lt"/>
+                <a:ea typeface="+mn-ea"/>
+                <a:cs typeface="+mn-cs"/>
+              </a:defRPr>
+            </a:lvl5pPr>
+            <a:lvl6pPr marL="2514600" indent="-228600" algn="l" defTabSz="914400" rtl="0" eaLnBrk="1" latinLnBrk="0" hangingPunct="1">
+              <a:lnSpc>
+                <a:spcPct val="90000"/>
+              </a:lnSpc>
+              <a:spcBef>
+                <a:spcPts val="500"/>
+              </a:spcBef>
+              <a:buFont typeface="Arial" panose="020B0604020202020204" pitchFamily="34" charset="0"/>
+              <a:buChar char="•"/>
+              <a:defRPr sz="1800" kern="1200">
+                <a:solidFill>
+                  <a:schemeClr val="tx1"/>
+                </a:solidFill>
+                <a:latin typeface="+mn-lt"/>
+                <a:ea typeface="+mn-ea"/>
+                <a:cs typeface="+mn-cs"/>
+              </a:defRPr>
+            </a:lvl6pPr>
+            <a:lvl7pPr marL="2971800" indent="-228600" algn="l" defTabSz="914400" rtl="0" eaLnBrk="1" latinLnBrk="0" hangingPunct="1">
+              <a:lnSpc>
+                <a:spcPct val="90000"/>
+              </a:lnSpc>
+              <a:spcBef>
+                <a:spcPts val="500"/>
+              </a:spcBef>
+              <a:buFont typeface="Arial" panose="020B0604020202020204" pitchFamily="34" charset="0"/>
+              <a:buChar char="•"/>
+              <a:defRPr sz="1800" kern="1200">
+                <a:solidFill>
+                  <a:schemeClr val="tx1"/>
+                </a:solidFill>
+                <a:latin typeface="+mn-lt"/>
+                <a:ea typeface="+mn-ea"/>
+                <a:cs typeface="+mn-cs"/>
+              </a:defRPr>
+            </a:lvl7pPr>
+            <a:lvl8pPr marL="3429000" indent="-228600" algn="l" defTabSz="914400" rtl="0" eaLnBrk="1" latinLnBrk="0" hangingPunct="1">
+              <a:lnSpc>
+                <a:spcPct val="90000"/>
+              </a:lnSpc>
+              <a:spcBef>
+                <a:spcPts val="500"/>
+              </a:spcBef>
+              <a:buFont typeface="Arial" panose="020B0604020202020204" pitchFamily="34" charset="0"/>
+              <a:buChar char="•"/>
+              <a:defRPr sz="1800" kern="1200">
+                <a:solidFill>
+                  <a:schemeClr val="tx1"/>
+                </a:solidFill>
+                <a:latin typeface="+mn-lt"/>
+                <a:ea typeface="+mn-ea"/>
+                <a:cs typeface="+mn-cs"/>
+              </a:defRPr>
+            </a:lvl8pPr>
+            <a:lvl9pPr marL="3886200" indent="-228600" algn="l" defTabSz="914400" rtl="0" eaLnBrk="1" latinLnBrk="0" hangingPunct="1">
+              <a:lnSpc>
+                <a:spcPct val="90000"/>
+              </a:lnSpc>
+              <a:spcBef>
+                <a:spcPts val="500"/>
+              </a:spcBef>
+              <a:buFont typeface="Arial" panose="020B0604020202020204" pitchFamily="34" charset="0"/>
+              <a:buChar char="•"/>
+              <a:defRPr sz="1800" kern="1200">
+                <a:solidFill>
+                  <a:schemeClr val="tx1"/>
+                </a:solidFill>
+                <a:latin typeface="+mn-lt"/>
+                <a:ea typeface="+mn-ea"/>
+                <a:cs typeface="+mn-cs"/>
+              </a:defRPr>
+            </a:lvl9pPr>
+          </a:lstStyle>
+          <a:p>
+            <a:pPr lvl="1">
+              <a:lnSpc>
+                <a:spcPct val="100000"/>
+              </a:lnSpc>
+            </a:pPr>
+            <a:endParaRPr lang="en-US" sz="1800" dirty="0">
+              <a:solidFill>
+                <a:schemeClr val="bg1"/>
+              </a:solidFill>
+            </a:endParaRPr>
+          </a:p>
+          <a:p>
+            <a:pPr marL="457200" lvl="1" indent="0">
+              <a:buFont typeface="Arial" panose="020B0604020202020204" pitchFamily="34" charset="0"/>
+              <a:buNone/>
+            </a:pPr>
+            <a:endParaRPr lang="en-US" sz="2000" dirty="0">
+              <a:solidFill>
+                <a:schemeClr val="bg1"/>
+              </a:solidFill>
+            </a:endParaRPr>
+          </a:p>
+        </p:txBody>
+      </p:sp>
+      <p:pic>
+        <p:nvPicPr>
+          <p:cNvPr id="7" name="Picture 6">
+            <a:extLst>
+              <a:ext uri="{FF2B5EF4-FFF2-40B4-BE49-F238E27FC236}">
+                <a16:creationId xmlns:a16="http://schemas.microsoft.com/office/drawing/2014/main" id="{97467E9B-F14E-247D-EFD0-828BE411E18F}"/>
+              </a:ext>
+            </a:extLst>
+          </p:cNvPr>
+          <p:cNvPicPr>
+            <a:picLocks noChangeAspect="1"/>
+          </p:cNvPicPr>
+          <p:nvPr/>
+        </p:nvPicPr>
+        <p:blipFill>
+          <a:blip r:embed="rId2">
+            <a:extLst>
+              <a:ext uri="{28A0092B-C50C-407E-A947-70E740481C1C}">
+                <a14:useLocalDpi xmlns:a14="http://schemas.microsoft.com/office/drawing/2010/main" val="0"/>
+              </a:ext>
+            </a:extLst>
+          </a:blip>
+          <a:stretch>
+            <a:fillRect/>
+          </a:stretch>
+        </p:blipFill>
+        <p:spPr>
+          <a:xfrm>
+            <a:off x="1495476" y="1105210"/>
+            <a:ext cx="9201048" cy="5540357"/>
+          </a:xfrm>
+          <a:prstGeom prst="rect">
+            <a:avLst/>
+          </a:prstGeom>
+        </p:spPr>
+      </p:pic>
+    </p:spTree>
+    <p:extLst>
+      <p:ext uri="{BB962C8B-B14F-4D97-AF65-F5344CB8AC3E}">
+        <p14:creationId xmlns:p14="http://schemas.microsoft.com/office/powerpoint/2010/main" val="1305066607"/>
+      </p:ext>
+    </p:extLst>
+  </p:cSld>
+  <p:clrMapOvr>
+    <a:masterClrMapping/>
+  </p:clrMapOvr>
+</p:sld>
+</file>
+
+<file path=ppt/slides/slide17.xml><?xml version="1.0" encoding="utf-8"?>
+<p:sld xmlns:a="http://schemas.openxmlformats.org/drawingml/2006/main" xmlns:r="http://schemas.openxmlformats.org/officeDocument/2006/relationships" xmlns:p="http://schemas.openxmlformats.org/presentationml/2006/main">
+  <p:cSld>
+    <p:bg>
+      <p:bgPr>
+        <a:solidFill>
+          <a:schemeClr val="bg1"/>
+        </a:solidFill>
+        <a:effectLst/>
+      </p:bgPr>
+    </p:bg>
+    <p:spTree>
+      <p:nvGrpSpPr>
+        <p:cNvPr id="1" name="">
+          <a:extLst>
+            <a:ext uri="{FF2B5EF4-FFF2-40B4-BE49-F238E27FC236}">
+              <a16:creationId xmlns:a16="http://schemas.microsoft.com/office/drawing/2014/main" id="{4609A17B-4EEC-9A86-000A-FC30B788CC29}"/>
+            </a:ext>
+          </a:extLst>
+        </p:cNvPr>
+        <p:cNvGrpSpPr/>
+        <p:nvPr/>
+      </p:nvGrpSpPr>
+      <p:grpSpPr>
+        <a:xfrm>
+          <a:off x="0" y="0"/>
+          <a:ext cx="0" cy="0"/>
+          <a:chOff x="0" y="0"/>
+          <a:chExt cx="0" cy="0"/>
+        </a:xfrm>
+      </p:grpSpPr>
+      <p:sp>
+        <p:nvSpPr>
+          <p:cNvPr id="8" name="Rectangle 7">
+            <a:extLst>
+              <a:ext uri="{FF2B5EF4-FFF2-40B4-BE49-F238E27FC236}">
+                <a16:creationId xmlns:a16="http://schemas.microsoft.com/office/drawing/2014/main" id="{32C6BA27-5EE2-D1C2-68C6-673966F4FD28}"/>
+              </a:ext>
+              <a:ext uri="{C183D7F6-B498-43B3-948B-1728B52AA6E4}">
+                <adec:decorative xmlns:adec="http://schemas.microsoft.com/office/drawing/2017/decorative" val="1"/>
+              </a:ext>
+            </a:extLst>
+          </p:cNvPr>
+          <p:cNvSpPr>
+            <a:spLocks noGrp="1" noRot="1" noChangeAspect="1" noMove="1" noResize="1" noEditPoints="1" noAdjustHandles="1" noChangeArrowheads="1" noChangeShapeType="1" noTextEdit="1"/>
+          </p:cNvSpPr>
+          <p:nvPr>
+            <p:extLst>
+              <p:ext uri="{386F3935-93C4-4BCD-93E2-E3B085C9AB24}">
+                <p16:designElem xmlns:p16="http://schemas.microsoft.com/office/powerpoint/2015/main" val="1"/>
+              </p:ext>
+            </p:extLst>
+          </p:nvPr>
+        </p:nvSpPr>
+        <p:spPr>
+          <a:xfrm>
+            <a:off x="0" y="0"/>
+            <a:ext cx="12192000" cy="6858000"/>
+          </a:xfrm>
+          <a:prstGeom prst="rect">
+            <a:avLst/>
+          </a:prstGeom>
+          <a:solidFill>
+            <a:schemeClr val="tx1">
+              <a:lumMod val="95000"/>
+              <a:lumOff val="5000"/>
+            </a:schemeClr>
+          </a:solidFill>
+          <a:ln>
+            <a:noFill/>
+          </a:ln>
+        </p:spPr>
+        <p:style>
+          <a:lnRef idx="2">
+            <a:schemeClr val="accent1">
+              <a:shade val="50000"/>
+            </a:schemeClr>
+          </a:lnRef>
+          <a:fillRef idx="1">
+            <a:schemeClr val="accent1"/>
+          </a:fillRef>
+          <a:effectRef idx="0">
+            <a:schemeClr val="accent1"/>
+          </a:effectRef>
+          <a:fontRef idx="minor">
+            <a:schemeClr val="lt1"/>
+          </a:fontRef>
+        </p:style>
+        <p:txBody>
+          <a:bodyPr rtlCol="0" anchor="ctr"/>
+          <a:lstStyle/>
+          <a:p>
+            <a:pPr algn="ctr"/>
+            <a:endParaRPr lang="en-US" dirty="0">
+              <a:solidFill>
+                <a:schemeClr val="tx1"/>
+              </a:solidFill>
+            </a:endParaRPr>
+          </a:p>
+        </p:txBody>
+      </p:sp>
+      <p:sp>
+        <p:nvSpPr>
+          <p:cNvPr id="2" name="Title 1">
+            <a:extLst>
+              <a:ext uri="{FF2B5EF4-FFF2-40B4-BE49-F238E27FC236}">
+                <a16:creationId xmlns:a16="http://schemas.microsoft.com/office/drawing/2014/main" id="{8E03B4E4-EAE8-5757-92F7-A2CF9C707811}"/>
+              </a:ext>
+            </a:extLst>
+          </p:cNvPr>
+          <p:cNvSpPr>
+            <a:spLocks noGrp="1"/>
+          </p:cNvSpPr>
+          <p:nvPr>
+            <p:ph type="title"/>
+          </p:nvPr>
+        </p:nvSpPr>
+        <p:spPr>
+          <a:xfrm>
+            <a:off x="320339" y="115193"/>
+            <a:ext cx="6054213" cy="990017"/>
+          </a:xfrm>
+        </p:spPr>
+        <p:txBody>
+          <a:bodyPr anchor="b">
+            <a:normAutofit/>
+          </a:bodyPr>
+          <a:lstStyle/>
+          <a:p>
+            <a:pPr algn="r"/>
+            <a:r>
+              <a:rPr lang="en-US" dirty="0">
+                <a:solidFill>
+                  <a:schemeClr val="bg1"/>
+                </a:solidFill>
+              </a:rPr>
+              <a:t>ROC Curve (-10dB SNR)</a:t>
+            </a:r>
+          </a:p>
+        </p:txBody>
+      </p:sp>
+      <p:cxnSp>
+        <p:nvCxnSpPr>
+          <p:cNvPr id="10" name="Straight Connector 9">
+            <a:extLst>
+              <a:ext uri="{FF2B5EF4-FFF2-40B4-BE49-F238E27FC236}">
+                <a16:creationId xmlns:a16="http://schemas.microsoft.com/office/drawing/2014/main" id="{09367959-7C1F-4632-0110-D18C9C78B9DA}"/>
+              </a:ext>
+              <a:ext uri="{C183D7F6-B498-43B3-948B-1728B52AA6E4}">
+                <adec:decorative xmlns:adec="http://schemas.microsoft.com/office/drawing/2017/decorative" val="1"/>
+              </a:ext>
+            </a:extLst>
+          </p:cNvPr>
+          <p:cNvCxnSpPr>
+            <a:cxnSpLocks noGrp="1" noRot="1" noChangeAspect="1" noMove="1" noResize="1" noEditPoints="1" noAdjustHandles="1" noChangeArrowheads="1" noChangeShapeType="1"/>
+          </p:cNvCxnSpPr>
+          <p:nvPr>
+            <p:extLst>
+              <p:ext uri="{386F3935-93C4-4BCD-93E2-E3B085C9AB24}">
+                <p16:designElem xmlns:p16="http://schemas.microsoft.com/office/powerpoint/2015/main" val="1"/>
+              </p:ext>
+            </p:extLst>
+          </p:nvPr>
+        </p:nvCxnSpPr>
+        <p:spPr>
+          <a:xfrm flipH="1">
+            <a:off x="126210" y="2026340"/>
+            <a:ext cx="5220936" cy="0"/>
+          </a:xfrm>
+          <a:prstGeom prst="line">
+            <a:avLst/>
+          </a:prstGeom>
+          <a:ln w="12700">
+            <a:solidFill>
+              <a:schemeClr val="accent2"/>
+            </a:solidFill>
+          </a:ln>
+        </p:spPr>
+        <p:style>
+          <a:lnRef idx="1">
+            <a:schemeClr val="accent1"/>
+          </a:lnRef>
+          <a:fillRef idx="0">
+            <a:schemeClr val="accent1"/>
+          </a:fillRef>
+          <a:effectRef idx="0">
+            <a:schemeClr val="accent1"/>
+          </a:effectRef>
+          <a:fontRef idx="minor">
+            <a:schemeClr val="tx1"/>
+          </a:fontRef>
+        </p:style>
+      </p:cxnSp>
+      <p:sp>
+        <p:nvSpPr>
+          <p:cNvPr id="12" name="Rectangle 11">
+            <a:extLst>
+              <a:ext uri="{FF2B5EF4-FFF2-40B4-BE49-F238E27FC236}">
+                <a16:creationId xmlns:a16="http://schemas.microsoft.com/office/drawing/2014/main" id="{EA853B61-C94D-6813-3290-908A775CB0A9}"/>
+              </a:ext>
+              <a:ext uri="{C183D7F6-B498-43B3-948B-1728B52AA6E4}">
+                <adec:decorative xmlns:adec="http://schemas.microsoft.com/office/drawing/2017/decorative" val="1"/>
+              </a:ext>
+            </a:extLst>
+          </p:cNvPr>
+          <p:cNvSpPr>
+            <a:spLocks noGrp="1" noRot="1" noChangeAspect="1" noMove="1" noResize="1" noEditPoints="1" noAdjustHandles="1" noChangeArrowheads="1" noChangeShapeType="1" noTextEdit="1"/>
+          </p:cNvSpPr>
+          <p:nvPr>
+            <p:extLst>
+              <p:ext uri="{386F3935-93C4-4BCD-93E2-E3B085C9AB24}">
+                <p16:designElem xmlns:p16="http://schemas.microsoft.com/office/powerpoint/2015/main" val="1"/>
+              </p:ext>
+            </p:extLst>
+          </p:nvPr>
+        </p:nvSpPr>
+        <p:spPr>
+          <a:xfrm>
+            <a:off x="126206" y="115193"/>
+            <a:ext cx="11939588" cy="6627614"/>
+          </a:xfrm>
+          <a:prstGeom prst="rect">
+            <a:avLst/>
+          </a:prstGeom>
+          <a:noFill/>
+          <a:ln w="12700">
+            <a:solidFill>
+              <a:schemeClr val="accent2"/>
+            </a:solidFill>
+          </a:ln>
+        </p:spPr>
+        <p:style>
+          <a:lnRef idx="2">
+            <a:schemeClr val="accent1">
+              <a:shade val="50000"/>
+            </a:schemeClr>
+          </a:lnRef>
+          <a:fillRef idx="1">
+            <a:schemeClr val="accent1"/>
+          </a:fillRef>
+          <a:effectRef idx="0">
+            <a:schemeClr val="accent1"/>
+          </a:effectRef>
+          <a:fontRef idx="minor">
+            <a:schemeClr val="lt1"/>
+          </a:fontRef>
+        </p:style>
+        <p:txBody>
+          <a:bodyPr rtlCol="0" anchor="ctr"/>
+          <a:lstStyle/>
+          <a:p>
+            <a:pPr algn="ctr"/>
+            <a:endParaRPr lang="en-US"/>
+          </a:p>
+        </p:txBody>
+      </p:sp>
+      <p:sp>
+        <p:nvSpPr>
+          <p:cNvPr id="20" name="Content Placeholder 2">
+            <a:extLst>
+              <a:ext uri="{FF2B5EF4-FFF2-40B4-BE49-F238E27FC236}">
+                <a16:creationId xmlns:a16="http://schemas.microsoft.com/office/drawing/2014/main" id="{B6D3078D-C79E-C28F-C214-C6B0BBFAECBB}"/>
+              </a:ext>
+            </a:extLst>
+          </p:cNvPr>
+          <p:cNvSpPr txBox="1">
+            <a:spLocks/>
+          </p:cNvSpPr>
+          <p:nvPr/>
+        </p:nvSpPr>
+        <p:spPr>
+          <a:xfrm>
+            <a:off x="176582" y="2339862"/>
+            <a:ext cx="6341728" cy="4107656"/>
+          </a:xfrm>
+          <a:prstGeom prst="rect">
+            <a:avLst/>
+          </a:prstGeom>
+        </p:spPr>
+        <p:txBody>
+          <a:bodyPr vert="horz" lIns="91440" tIns="45720" rIns="91440" bIns="45720" rtlCol="0">
+            <a:normAutofit/>
+          </a:bodyPr>
+          <a:lstStyle>
+            <a:lvl1pPr marL="228600" indent="-228600" algn="l" defTabSz="914400" rtl="0" eaLnBrk="1" latinLnBrk="0" hangingPunct="1">
+              <a:lnSpc>
+                <a:spcPct val="90000"/>
+              </a:lnSpc>
+              <a:spcBef>
+                <a:spcPts val="1000"/>
+              </a:spcBef>
+              <a:buFont typeface="Arial" panose="020B0604020202020204" pitchFamily="34" charset="0"/>
+              <a:buChar char="•"/>
+              <a:defRPr sz="2800" kern="1200">
+                <a:solidFill>
+                  <a:schemeClr val="tx1"/>
+                </a:solidFill>
+                <a:latin typeface="+mn-lt"/>
+                <a:ea typeface="+mn-ea"/>
+                <a:cs typeface="+mn-cs"/>
+              </a:defRPr>
+            </a:lvl1pPr>
+            <a:lvl2pPr marL="685800" indent="-228600" algn="l" defTabSz="914400" rtl="0" eaLnBrk="1" latinLnBrk="0" hangingPunct="1">
+              <a:lnSpc>
+                <a:spcPct val="90000"/>
+              </a:lnSpc>
+              <a:spcBef>
+                <a:spcPts val="500"/>
+              </a:spcBef>
+              <a:buFont typeface="Arial" panose="020B0604020202020204" pitchFamily="34" charset="0"/>
+              <a:buChar char="•"/>
+              <a:defRPr sz="2400" kern="1200">
+                <a:solidFill>
+                  <a:schemeClr val="tx1"/>
+                </a:solidFill>
+                <a:latin typeface="+mn-lt"/>
+                <a:ea typeface="+mn-ea"/>
+                <a:cs typeface="+mn-cs"/>
+              </a:defRPr>
+            </a:lvl2pPr>
+            <a:lvl3pPr marL="1143000" indent="-228600" algn="l" defTabSz="914400" rtl="0" eaLnBrk="1" latinLnBrk="0" hangingPunct="1">
+              <a:lnSpc>
+                <a:spcPct val="90000"/>
+              </a:lnSpc>
+              <a:spcBef>
+                <a:spcPts val="500"/>
+              </a:spcBef>
+              <a:buFont typeface="Arial" panose="020B0604020202020204" pitchFamily="34" charset="0"/>
+              <a:buChar char="•"/>
+              <a:defRPr sz="2000" kern="1200">
+                <a:solidFill>
+                  <a:schemeClr val="tx1"/>
+                </a:solidFill>
+                <a:latin typeface="+mn-lt"/>
+                <a:ea typeface="+mn-ea"/>
+                <a:cs typeface="+mn-cs"/>
+              </a:defRPr>
+            </a:lvl3pPr>
+            <a:lvl4pPr marL="1600200" indent="-228600" algn="l" defTabSz="914400" rtl="0" eaLnBrk="1" latinLnBrk="0" hangingPunct="1">
+              <a:lnSpc>
+                <a:spcPct val="90000"/>
+              </a:lnSpc>
+              <a:spcBef>
+                <a:spcPts val="500"/>
+              </a:spcBef>
+              <a:buFont typeface="Arial" panose="020B0604020202020204" pitchFamily="34" charset="0"/>
+              <a:buChar char="•"/>
+              <a:defRPr sz="1800" kern="1200">
+                <a:solidFill>
+                  <a:schemeClr val="tx1"/>
+                </a:solidFill>
+                <a:latin typeface="+mn-lt"/>
+                <a:ea typeface="+mn-ea"/>
+                <a:cs typeface="+mn-cs"/>
+              </a:defRPr>
+            </a:lvl4pPr>
+            <a:lvl5pPr marL="2057400" indent="-228600" algn="l" defTabSz="914400" rtl="0" eaLnBrk="1" latinLnBrk="0" hangingPunct="1">
+              <a:lnSpc>
+                <a:spcPct val="90000"/>
+              </a:lnSpc>
+              <a:spcBef>
+                <a:spcPts val="500"/>
+              </a:spcBef>
+              <a:buFont typeface="Arial" panose="020B0604020202020204" pitchFamily="34" charset="0"/>
+              <a:buChar char="•"/>
+              <a:defRPr sz="1800" kern="1200">
+                <a:solidFill>
+                  <a:schemeClr val="tx1"/>
+                </a:solidFill>
+                <a:latin typeface="+mn-lt"/>
+                <a:ea typeface="+mn-ea"/>
+                <a:cs typeface="+mn-cs"/>
+              </a:defRPr>
+            </a:lvl5pPr>
+            <a:lvl6pPr marL="2514600" indent="-228600" algn="l" defTabSz="914400" rtl="0" eaLnBrk="1" latinLnBrk="0" hangingPunct="1">
+              <a:lnSpc>
+                <a:spcPct val="90000"/>
+              </a:lnSpc>
+              <a:spcBef>
+                <a:spcPts val="500"/>
+              </a:spcBef>
+              <a:buFont typeface="Arial" panose="020B0604020202020204" pitchFamily="34" charset="0"/>
+              <a:buChar char="•"/>
+              <a:defRPr sz="1800" kern="1200">
+                <a:solidFill>
+                  <a:schemeClr val="tx1"/>
+                </a:solidFill>
+                <a:latin typeface="+mn-lt"/>
+                <a:ea typeface="+mn-ea"/>
+                <a:cs typeface="+mn-cs"/>
+              </a:defRPr>
+            </a:lvl6pPr>
+            <a:lvl7pPr marL="2971800" indent="-228600" algn="l" defTabSz="914400" rtl="0" eaLnBrk="1" latinLnBrk="0" hangingPunct="1">
+              <a:lnSpc>
+                <a:spcPct val="90000"/>
+              </a:lnSpc>
+              <a:spcBef>
+                <a:spcPts val="500"/>
+              </a:spcBef>
+              <a:buFont typeface="Arial" panose="020B0604020202020204" pitchFamily="34" charset="0"/>
+              <a:buChar char="•"/>
+              <a:defRPr sz="1800" kern="1200">
+                <a:solidFill>
+                  <a:schemeClr val="tx1"/>
+                </a:solidFill>
+                <a:latin typeface="+mn-lt"/>
+                <a:ea typeface="+mn-ea"/>
+                <a:cs typeface="+mn-cs"/>
+              </a:defRPr>
+            </a:lvl7pPr>
+            <a:lvl8pPr marL="3429000" indent="-228600" algn="l" defTabSz="914400" rtl="0" eaLnBrk="1" latinLnBrk="0" hangingPunct="1">
+              <a:lnSpc>
+                <a:spcPct val="90000"/>
+              </a:lnSpc>
+              <a:spcBef>
+                <a:spcPts val="500"/>
+              </a:spcBef>
+              <a:buFont typeface="Arial" panose="020B0604020202020204" pitchFamily="34" charset="0"/>
+              <a:buChar char="•"/>
+              <a:defRPr sz="1800" kern="1200">
+                <a:solidFill>
+                  <a:schemeClr val="tx1"/>
+                </a:solidFill>
+                <a:latin typeface="+mn-lt"/>
+                <a:ea typeface="+mn-ea"/>
+                <a:cs typeface="+mn-cs"/>
+              </a:defRPr>
+            </a:lvl8pPr>
+            <a:lvl9pPr marL="3886200" indent="-228600" algn="l" defTabSz="914400" rtl="0" eaLnBrk="1" latinLnBrk="0" hangingPunct="1">
+              <a:lnSpc>
+                <a:spcPct val="90000"/>
+              </a:lnSpc>
+              <a:spcBef>
+                <a:spcPts val="500"/>
+              </a:spcBef>
+              <a:buFont typeface="Arial" panose="020B0604020202020204" pitchFamily="34" charset="0"/>
+              <a:buChar char="•"/>
+              <a:defRPr sz="1800" kern="1200">
+                <a:solidFill>
+                  <a:schemeClr val="tx1"/>
+                </a:solidFill>
+                <a:latin typeface="+mn-lt"/>
+                <a:ea typeface="+mn-ea"/>
+                <a:cs typeface="+mn-cs"/>
+              </a:defRPr>
+            </a:lvl9pPr>
+          </a:lstStyle>
+          <a:p>
+            <a:pPr lvl="1">
+              <a:lnSpc>
+                <a:spcPct val="100000"/>
+              </a:lnSpc>
+            </a:pPr>
+            <a:endParaRPr lang="en-US" sz="1800" dirty="0">
+              <a:solidFill>
+                <a:schemeClr val="bg1"/>
+              </a:solidFill>
+            </a:endParaRPr>
+          </a:p>
+          <a:p>
+            <a:pPr marL="457200" lvl="1" indent="0">
+              <a:buFont typeface="Arial" panose="020B0604020202020204" pitchFamily="34" charset="0"/>
+              <a:buNone/>
+            </a:pPr>
+            <a:endParaRPr lang="en-US" sz="2000" dirty="0">
+              <a:solidFill>
+                <a:schemeClr val="bg1"/>
+              </a:solidFill>
+            </a:endParaRPr>
+          </a:p>
+        </p:txBody>
+      </p:sp>
+      <p:pic>
+        <p:nvPicPr>
+          <p:cNvPr id="4" name="Picture 3">
+            <a:extLst>
+              <a:ext uri="{FF2B5EF4-FFF2-40B4-BE49-F238E27FC236}">
+                <a16:creationId xmlns:a16="http://schemas.microsoft.com/office/drawing/2014/main" id="{ED41D5BD-4247-330A-D644-47533C545DC4}"/>
+              </a:ext>
+            </a:extLst>
+          </p:cNvPr>
+          <p:cNvPicPr>
+            <a:picLocks noChangeAspect="1"/>
+          </p:cNvPicPr>
+          <p:nvPr/>
+        </p:nvPicPr>
+        <p:blipFill>
+          <a:blip r:embed="rId2">
+            <a:extLst>
+              <a:ext uri="{28A0092B-C50C-407E-A947-70E740481C1C}">
+                <a14:useLocalDpi xmlns:a14="http://schemas.microsoft.com/office/drawing/2010/main" val="0"/>
+              </a:ext>
+            </a:extLst>
+          </a:blip>
+          <a:stretch>
+            <a:fillRect/>
+          </a:stretch>
+        </p:blipFill>
+        <p:spPr>
+          <a:xfrm>
+            <a:off x="1772950" y="1220403"/>
+            <a:ext cx="8874730" cy="5343866"/>
+          </a:xfrm>
+          <a:prstGeom prst="rect">
+            <a:avLst/>
+          </a:prstGeom>
+        </p:spPr>
+      </p:pic>
+      <p:cxnSp>
+        <p:nvCxnSpPr>
+          <p:cNvPr id="6" name="Straight Connector 5">
+            <a:extLst>
+              <a:ext uri="{FF2B5EF4-FFF2-40B4-BE49-F238E27FC236}">
+                <a16:creationId xmlns:a16="http://schemas.microsoft.com/office/drawing/2014/main" id="{5217CD78-261C-4663-6821-4B26C88A65B6}"/>
+              </a:ext>
+            </a:extLst>
+          </p:cNvPr>
+          <p:cNvCxnSpPr>
+            <a:cxnSpLocks/>
+          </p:cNvCxnSpPr>
+          <p:nvPr/>
+        </p:nvCxnSpPr>
+        <p:spPr>
+          <a:xfrm>
+            <a:off x="2950464" y="2267712"/>
+            <a:ext cx="961136" cy="0"/>
+          </a:xfrm>
+          <a:prstGeom prst="line">
+            <a:avLst/>
+          </a:prstGeom>
+          <a:ln>
+            <a:solidFill>
+              <a:srgbClr val="FF0000"/>
+            </a:solidFill>
+          </a:ln>
+        </p:spPr>
+        <p:style>
+          <a:lnRef idx="2">
+            <a:schemeClr val="accent1"/>
+          </a:lnRef>
+          <a:fillRef idx="0">
+            <a:schemeClr val="accent1"/>
+          </a:fillRef>
+          <a:effectRef idx="1">
+            <a:schemeClr val="accent1"/>
+          </a:effectRef>
+          <a:fontRef idx="minor">
+            <a:schemeClr val="tx1"/>
+          </a:fontRef>
+        </p:style>
+      </p:cxnSp>
+      <p:cxnSp>
+        <p:nvCxnSpPr>
+          <p:cNvPr id="11" name="Straight Connector 10">
+            <a:extLst>
+              <a:ext uri="{FF2B5EF4-FFF2-40B4-BE49-F238E27FC236}">
+                <a16:creationId xmlns:a16="http://schemas.microsoft.com/office/drawing/2014/main" id="{BB45368A-9C8D-B50C-A723-24FE88C0B2B3}"/>
+              </a:ext>
+            </a:extLst>
+          </p:cNvPr>
+          <p:cNvCxnSpPr>
+            <a:cxnSpLocks/>
+          </p:cNvCxnSpPr>
+          <p:nvPr/>
+        </p:nvCxnSpPr>
+        <p:spPr>
+          <a:xfrm>
+            <a:off x="3911600" y="2267712"/>
+            <a:ext cx="0" cy="3631643"/>
+          </a:xfrm>
+          <a:prstGeom prst="line">
+            <a:avLst/>
+          </a:prstGeom>
+          <a:ln>
+            <a:solidFill>
+              <a:srgbClr val="FF0000"/>
+            </a:solidFill>
+          </a:ln>
+        </p:spPr>
+        <p:style>
+          <a:lnRef idx="2">
+            <a:schemeClr val="accent1"/>
+          </a:lnRef>
+          <a:fillRef idx="0">
+            <a:schemeClr val="accent1"/>
+          </a:fillRef>
+          <a:effectRef idx="1">
+            <a:schemeClr val="accent1"/>
+          </a:effectRef>
+          <a:fontRef idx="minor">
+            <a:schemeClr val="tx1"/>
+          </a:fontRef>
+        </p:style>
+      </p:cxnSp>
+    </p:spTree>
+    <p:extLst>
+      <p:ext uri="{BB962C8B-B14F-4D97-AF65-F5344CB8AC3E}">
+        <p14:creationId xmlns:p14="http://schemas.microsoft.com/office/powerpoint/2010/main" val="1270829659"/>
+      </p:ext>
+    </p:extLst>
+  </p:cSld>
+  <p:clrMapOvr>
+    <a:masterClrMapping/>
+  </p:clrMapOvr>
+</p:sld>
+</file>
+
+<file path=ppt/slides/slide18.xml><?xml version="1.0" encoding="utf-8"?>
+<p:sld xmlns:a="http://schemas.openxmlformats.org/drawingml/2006/main" xmlns:r="http://schemas.openxmlformats.org/officeDocument/2006/relationships" xmlns:p="http://schemas.openxmlformats.org/presentationml/2006/main">
+  <p:cSld>
+    <p:bg>
+      <p:bgPr>
+        <a:solidFill>
+          <a:schemeClr val="bg1"/>
+        </a:solidFill>
+        <a:effectLst/>
+      </p:bgPr>
+    </p:bg>
+    <p:spTree>
+      <p:nvGrpSpPr>
+        <p:cNvPr id="1" name="">
+          <a:extLst>
+            <a:ext uri="{FF2B5EF4-FFF2-40B4-BE49-F238E27FC236}">
+              <a16:creationId xmlns:a16="http://schemas.microsoft.com/office/drawing/2014/main" id="{6AF8991E-014B-B270-3572-B1045DE407F3}"/>
+            </a:ext>
+          </a:extLst>
+        </p:cNvPr>
+        <p:cNvGrpSpPr/>
+        <p:nvPr/>
+      </p:nvGrpSpPr>
+      <p:grpSpPr>
+        <a:xfrm>
+          <a:off x="0" y="0"/>
+          <a:ext cx="0" cy="0"/>
+          <a:chOff x="0" y="0"/>
+          <a:chExt cx="0" cy="0"/>
+        </a:xfrm>
+      </p:grpSpPr>
+      <p:sp>
+        <p:nvSpPr>
+          <p:cNvPr id="8" name="Rectangle 7">
+            <a:extLst>
+              <a:ext uri="{FF2B5EF4-FFF2-40B4-BE49-F238E27FC236}">
+                <a16:creationId xmlns:a16="http://schemas.microsoft.com/office/drawing/2014/main" id="{426B46D9-F1E6-177E-B15A-F210C483E7C4}"/>
+              </a:ext>
+              <a:ext uri="{C183D7F6-B498-43B3-948B-1728B52AA6E4}">
+                <adec:decorative xmlns:adec="http://schemas.microsoft.com/office/drawing/2017/decorative" val="1"/>
+              </a:ext>
+            </a:extLst>
+          </p:cNvPr>
+          <p:cNvSpPr>
+            <a:spLocks noGrp="1" noRot="1" noChangeAspect="1" noMove="1" noResize="1" noEditPoints="1" noAdjustHandles="1" noChangeArrowheads="1" noChangeShapeType="1" noTextEdit="1"/>
+          </p:cNvSpPr>
+          <p:nvPr>
+            <p:extLst>
+              <p:ext uri="{386F3935-93C4-4BCD-93E2-E3B085C9AB24}">
+                <p16:designElem xmlns:p16="http://schemas.microsoft.com/office/powerpoint/2015/main" val="1"/>
+              </p:ext>
+            </p:extLst>
+          </p:nvPr>
+        </p:nvSpPr>
+        <p:spPr>
+          <a:xfrm>
+            <a:off x="0" y="0"/>
+            <a:ext cx="12192000" cy="6858000"/>
+          </a:xfrm>
+          <a:prstGeom prst="rect">
+            <a:avLst/>
+          </a:prstGeom>
+          <a:solidFill>
+            <a:schemeClr val="tx1">
+              <a:lumMod val="95000"/>
+              <a:lumOff val="5000"/>
+            </a:schemeClr>
+          </a:solidFill>
+          <a:ln>
+            <a:noFill/>
+          </a:ln>
+        </p:spPr>
+        <p:style>
+          <a:lnRef idx="2">
+            <a:schemeClr val="accent1">
+              <a:shade val="50000"/>
+            </a:schemeClr>
+          </a:lnRef>
+          <a:fillRef idx="1">
+            <a:schemeClr val="accent1"/>
+          </a:fillRef>
+          <a:effectRef idx="0">
+            <a:schemeClr val="accent1"/>
+          </a:effectRef>
+          <a:fontRef idx="minor">
+            <a:schemeClr val="lt1"/>
+          </a:fontRef>
+        </p:style>
+        <p:txBody>
+          <a:bodyPr rtlCol="0" anchor="ctr"/>
+          <a:lstStyle/>
+          <a:p>
+            <a:pPr algn="ctr"/>
+            <a:endParaRPr lang="en-US" dirty="0">
+              <a:solidFill>
+                <a:schemeClr val="tx1"/>
+              </a:solidFill>
+            </a:endParaRPr>
+          </a:p>
+        </p:txBody>
+      </p:sp>
+      <p:sp>
+        <p:nvSpPr>
+          <p:cNvPr id="2" name="Title 1">
+            <a:extLst>
+              <a:ext uri="{FF2B5EF4-FFF2-40B4-BE49-F238E27FC236}">
+                <a16:creationId xmlns:a16="http://schemas.microsoft.com/office/drawing/2014/main" id="{1C4C6DFE-4524-7E59-155C-519789CD6E65}"/>
+              </a:ext>
+            </a:extLst>
+          </p:cNvPr>
+          <p:cNvSpPr>
+            <a:spLocks noGrp="1"/>
+          </p:cNvSpPr>
+          <p:nvPr>
+            <p:ph type="title"/>
+          </p:nvPr>
+        </p:nvSpPr>
+        <p:spPr>
+          <a:xfrm>
+            <a:off x="320339" y="115193"/>
+            <a:ext cx="6054213" cy="990017"/>
+          </a:xfrm>
+        </p:spPr>
+        <p:txBody>
+          <a:bodyPr anchor="b">
+            <a:normAutofit/>
+          </a:bodyPr>
+          <a:lstStyle/>
+          <a:p>
+            <a:pPr algn="r"/>
+            <a:r>
+              <a:rPr lang="en-US" dirty="0">
+                <a:solidFill>
+                  <a:schemeClr val="bg1"/>
+                </a:solidFill>
+              </a:rPr>
+              <a:t>ROC Curve (-15dB SNR)</a:t>
+            </a:r>
+          </a:p>
+        </p:txBody>
+      </p:sp>
+      <p:cxnSp>
+        <p:nvCxnSpPr>
+          <p:cNvPr id="10" name="Straight Connector 9">
+            <a:extLst>
+              <a:ext uri="{FF2B5EF4-FFF2-40B4-BE49-F238E27FC236}">
+                <a16:creationId xmlns:a16="http://schemas.microsoft.com/office/drawing/2014/main" id="{B55A7178-FF9C-51E8-D42A-9BFEDA30ED3B}"/>
+              </a:ext>
+              <a:ext uri="{C183D7F6-B498-43B3-948B-1728B52AA6E4}">
+                <adec:decorative xmlns:adec="http://schemas.microsoft.com/office/drawing/2017/decorative" val="1"/>
+              </a:ext>
+            </a:extLst>
+          </p:cNvPr>
+          <p:cNvCxnSpPr>
+            <a:cxnSpLocks noGrp="1" noRot="1" noChangeAspect="1" noMove="1" noResize="1" noEditPoints="1" noAdjustHandles="1" noChangeArrowheads="1" noChangeShapeType="1"/>
+          </p:cNvCxnSpPr>
+          <p:nvPr>
+            <p:extLst>
+              <p:ext uri="{386F3935-93C4-4BCD-93E2-E3B085C9AB24}">
+                <p16:designElem xmlns:p16="http://schemas.microsoft.com/office/powerpoint/2015/main" val="1"/>
+              </p:ext>
+            </p:extLst>
+          </p:nvPr>
+        </p:nvCxnSpPr>
+        <p:spPr>
+          <a:xfrm flipH="1">
+            <a:off x="126210" y="2026340"/>
+            <a:ext cx="5220936" cy="0"/>
+          </a:xfrm>
+          <a:prstGeom prst="line">
+            <a:avLst/>
+          </a:prstGeom>
+          <a:ln w="12700">
+            <a:solidFill>
+              <a:schemeClr val="accent2"/>
+            </a:solidFill>
+          </a:ln>
+        </p:spPr>
+        <p:style>
+          <a:lnRef idx="1">
+            <a:schemeClr val="accent1"/>
+          </a:lnRef>
+          <a:fillRef idx="0">
+            <a:schemeClr val="accent1"/>
+          </a:fillRef>
+          <a:effectRef idx="0">
+            <a:schemeClr val="accent1"/>
+          </a:effectRef>
+          <a:fontRef idx="minor">
+            <a:schemeClr val="tx1"/>
+          </a:fontRef>
+        </p:style>
+      </p:cxnSp>
+      <p:sp>
+        <p:nvSpPr>
+          <p:cNvPr id="12" name="Rectangle 11">
+            <a:extLst>
+              <a:ext uri="{FF2B5EF4-FFF2-40B4-BE49-F238E27FC236}">
+                <a16:creationId xmlns:a16="http://schemas.microsoft.com/office/drawing/2014/main" id="{0459D599-453B-7B15-5F44-5A7F65F8466A}"/>
+              </a:ext>
+              <a:ext uri="{C183D7F6-B498-43B3-948B-1728B52AA6E4}">
+                <adec:decorative xmlns:adec="http://schemas.microsoft.com/office/drawing/2017/decorative" val="1"/>
+              </a:ext>
+            </a:extLst>
+          </p:cNvPr>
+          <p:cNvSpPr>
+            <a:spLocks noGrp="1" noRot="1" noChangeAspect="1" noMove="1" noResize="1" noEditPoints="1" noAdjustHandles="1" noChangeArrowheads="1" noChangeShapeType="1" noTextEdit="1"/>
+          </p:cNvSpPr>
+          <p:nvPr>
+            <p:extLst>
+              <p:ext uri="{386F3935-93C4-4BCD-93E2-E3B085C9AB24}">
+                <p16:designElem xmlns:p16="http://schemas.microsoft.com/office/powerpoint/2015/main" val="1"/>
+              </p:ext>
+            </p:extLst>
+          </p:nvPr>
+        </p:nvSpPr>
+        <p:spPr>
+          <a:xfrm>
+            <a:off x="126206" y="115193"/>
+            <a:ext cx="11939588" cy="6627614"/>
+          </a:xfrm>
+          <a:prstGeom prst="rect">
+            <a:avLst/>
+          </a:prstGeom>
+          <a:noFill/>
+          <a:ln w="12700">
+            <a:solidFill>
+              <a:schemeClr val="accent2"/>
+            </a:solidFill>
+          </a:ln>
+        </p:spPr>
+        <p:style>
+          <a:lnRef idx="2">
+            <a:schemeClr val="accent1">
+              <a:shade val="50000"/>
+            </a:schemeClr>
+          </a:lnRef>
+          <a:fillRef idx="1">
+            <a:schemeClr val="accent1"/>
+          </a:fillRef>
+          <a:effectRef idx="0">
+            <a:schemeClr val="accent1"/>
+          </a:effectRef>
+          <a:fontRef idx="minor">
+            <a:schemeClr val="lt1"/>
+          </a:fontRef>
+        </p:style>
+        <p:txBody>
+          <a:bodyPr rtlCol="0" anchor="ctr"/>
+          <a:lstStyle/>
+          <a:p>
+            <a:pPr algn="ctr"/>
+            <a:endParaRPr lang="en-US"/>
+          </a:p>
+        </p:txBody>
+      </p:sp>
+      <p:sp>
+        <p:nvSpPr>
+          <p:cNvPr id="20" name="Content Placeholder 2">
+            <a:extLst>
+              <a:ext uri="{FF2B5EF4-FFF2-40B4-BE49-F238E27FC236}">
+                <a16:creationId xmlns:a16="http://schemas.microsoft.com/office/drawing/2014/main" id="{5961255A-08AD-58BE-604B-6D090AE28368}"/>
+              </a:ext>
+            </a:extLst>
+          </p:cNvPr>
+          <p:cNvSpPr txBox="1">
+            <a:spLocks/>
+          </p:cNvSpPr>
+          <p:nvPr/>
+        </p:nvSpPr>
+        <p:spPr>
+          <a:xfrm>
+            <a:off x="176582" y="2339862"/>
+            <a:ext cx="6341728" cy="4107656"/>
+          </a:xfrm>
+          <a:prstGeom prst="rect">
+            <a:avLst/>
+          </a:prstGeom>
+        </p:spPr>
+        <p:txBody>
+          <a:bodyPr vert="horz" lIns="91440" tIns="45720" rIns="91440" bIns="45720" rtlCol="0">
+            <a:normAutofit/>
+          </a:bodyPr>
+          <a:lstStyle>
+            <a:lvl1pPr marL="228600" indent="-228600" algn="l" defTabSz="914400" rtl="0" eaLnBrk="1" latinLnBrk="0" hangingPunct="1">
+              <a:lnSpc>
+                <a:spcPct val="90000"/>
+              </a:lnSpc>
+              <a:spcBef>
+                <a:spcPts val="1000"/>
+              </a:spcBef>
+              <a:buFont typeface="Arial" panose="020B0604020202020204" pitchFamily="34" charset="0"/>
+              <a:buChar char="•"/>
+              <a:defRPr sz="2800" kern="1200">
+                <a:solidFill>
+                  <a:schemeClr val="tx1"/>
+                </a:solidFill>
+                <a:latin typeface="+mn-lt"/>
+                <a:ea typeface="+mn-ea"/>
+                <a:cs typeface="+mn-cs"/>
+              </a:defRPr>
+            </a:lvl1pPr>
+            <a:lvl2pPr marL="685800" indent="-228600" algn="l" defTabSz="914400" rtl="0" eaLnBrk="1" latinLnBrk="0" hangingPunct="1">
+              <a:lnSpc>
+                <a:spcPct val="90000"/>
+              </a:lnSpc>
+              <a:spcBef>
+                <a:spcPts val="500"/>
+              </a:spcBef>
+              <a:buFont typeface="Arial" panose="020B0604020202020204" pitchFamily="34" charset="0"/>
+              <a:buChar char="•"/>
+              <a:defRPr sz="2400" kern="1200">
+                <a:solidFill>
+                  <a:schemeClr val="tx1"/>
+                </a:solidFill>
+                <a:latin typeface="+mn-lt"/>
+                <a:ea typeface="+mn-ea"/>
+                <a:cs typeface="+mn-cs"/>
+              </a:defRPr>
+            </a:lvl2pPr>
+            <a:lvl3pPr marL="1143000" indent="-228600" algn="l" defTabSz="914400" rtl="0" eaLnBrk="1" latinLnBrk="0" hangingPunct="1">
+              <a:lnSpc>
+                <a:spcPct val="90000"/>
+              </a:lnSpc>
+              <a:spcBef>
+                <a:spcPts val="500"/>
+              </a:spcBef>
+              <a:buFont typeface="Arial" panose="020B0604020202020204" pitchFamily="34" charset="0"/>
+              <a:buChar char="•"/>
+              <a:defRPr sz="2000" kern="1200">
+                <a:solidFill>
+                  <a:schemeClr val="tx1"/>
+                </a:solidFill>
+                <a:latin typeface="+mn-lt"/>
+                <a:ea typeface="+mn-ea"/>
+                <a:cs typeface="+mn-cs"/>
+              </a:defRPr>
+            </a:lvl3pPr>
+            <a:lvl4pPr marL="1600200" indent="-228600" algn="l" defTabSz="914400" rtl="0" eaLnBrk="1" latinLnBrk="0" hangingPunct="1">
+              <a:lnSpc>
+                <a:spcPct val="90000"/>
+              </a:lnSpc>
+              <a:spcBef>
+                <a:spcPts val="500"/>
+              </a:spcBef>
+              <a:buFont typeface="Arial" panose="020B0604020202020204" pitchFamily="34" charset="0"/>
+              <a:buChar char="•"/>
+              <a:defRPr sz="1800" kern="1200">
+                <a:solidFill>
+                  <a:schemeClr val="tx1"/>
+                </a:solidFill>
+                <a:latin typeface="+mn-lt"/>
+                <a:ea typeface="+mn-ea"/>
+                <a:cs typeface="+mn-cs"/>
+              </a:defRPr>
+            </a:lvl4pPr>
+            <a:lvl5pPr marL="2057400" indent="-228600" algn="l" defTabSz="914400" rtl="0" eaLnBrk="1" latinLnBrk="0" hangingPunct="1">
+              <a:lnSpc>
+                <a:spcPct val="90000"/>
+              </a:lnSpc>
+              <a:spcBef>
+                <a:spcPts val="500"/>
+              </a:spcBef>
+              <a:buFont typeface="Arial" panose="020B0604020202020204" pitchFamily="34" charset="0"/>
+              <a:buChar char="•"/>
+              <a:defRPr sz="1800" kern="1200">
+                <a:solidFill>
+                  <a:schemeClr val="tx1"/>
+                </a:solidFill>
+                <a:latin typeface="+mn-lt"/>
+                <a:ea typeface="+mn-ea"/>
+                <a:cs typeface="+mn-cs"/>
+              </a:defRPr>
+            </a:lvl5pPr>
+            <a:lvl6pPr marL="2514600" indent="-228600" algn="l" defTabSz="914400" rtl="0" eaLnBrk="1" latinLnBrk="0" hangingPunct="1">
+              <a:lnSpc>
+                <a:spcPct val="90000"/>
+              </a:lnSpc>
+              <a:spcBef>
+                <a:spcPts val="500"/>
+              </a:spcBef>
+              <a:buFont typeface="Arial" panose="020B0604020202020204" pitchFamily="34" charset="0"/>
+              <a:buChar char="•"/>
+              <a:defRPr sz="1800" kern="1200">
+                <a:solidFill>
+                  <a:schemeClr val="tx1"/>
+                </a:solidFill>
+                <a:latin typeface="+mn-lt"/>
+                <a:ea typeface="+mn-ea"/>
+                <a:cs typeface="+mn-cs"/>
+              </a:defRPr>
+            </a:lvl6pPr>
+            <a:lvl7pPr marL="2971800" indent="-228600" algn="l" defTabSz="914400" rtl="0" eaLnBrk="1" latinLnBrk="0" hangingPunct="1">
+              <a:lnSpc>
+                <a:spcPct val="90000"/>
+              </a:lnSpc>
+              <a:spcBef>
+                <a:spcPts val="500"/>
+              </a:spcBef>
+              <a:buFont typeface="Arial" panose="020B0604020202020204" pitchFamily="34" charset="0"/>
+              <a:buChar char="•"/>
+              <a:defRPr sz="1800" kern="1200">
+                <a:solidFill>
+                  <a:schemeClr val="tx1"/>
+                </a:solidFill>
+                <a:latin typeface="+mn-lt"/>
+                <a:ea typeface="+mn-ea"/>
+                <a:cs typeface="+mn-cs"/>
+              </a:defRPr>
+            </a:lvl7pPr>
+            <a:lvl8pPr marL="3429000" indent="-228600" algn="l" defTabSz="914400" rtl="0" eaLnBrk="1" latinLnBrk="0" hangingPunct="1">
+              <a:lnSpc>
+                <a:spcPct val="90000"/>
+              </a:lnSpc>
+              <a:spcBef>
+                <a:spcPts val="500"/>
+              </a:spcBef>
+              <a:buFont typeface="Arial" panose="020B0604020202020204" pitchFamily="34" charset="0"/>
+              <a:buChar char="•"/>
+              <a:defRPr sz="1800" kern="1200">
+                <a:solidFill>
+                  <a:schemeClr val="tx1"/>
+                </a:solidFill>
+                <a:latin typeface="+mn-lt"/>
+                <a:ea typeface="+mn-ea"/>
+                <a:cs typeface="+mn-cs"/>
+              </a:defRPr>
+            </a:lvl8pPr>
+            <a:lvl9pPr marL="3886200" indent="-228600" algn="l" defTabSz="914400" rtl="0" eaLnBrk="1" latinLnBrk="0" hangingPunct="1">
+              <a:lnSpc>
+                <a:spcPct val="90000"/>
+              </a:lnSpc>
+              <a:spcBef>
+                <a:spcPts val="500"/>
+              </a:spcBef>
+              <a:buFont typeface="Arial" panose="020B0604020202020204" pitchFamily="34" charset="0"/>
+              <a:buChar char="•"/>
+              <a:defRPr sz="1800" kern="1200">
+                <a:solidFill>
+                  <a:schemeClr val="tx1"/>
+                </a:solidFill>
+                <a:latin typeface="+mn-lt"/>
+                <a:ea typeface="+mn-ea"/>
+                <a:cs typeface="+mn-cs"/>
+              </a:defRPr>
+            </a:lvl9pPr>
+          </a:lstStyle>
+          <a:p>
+            <a:pPr lvl="1">
+              <a:lnSpc>
+                <a:spcPct val="100000"/>
+              </a:lnSpc>
+            </a:pPr>
+            <a:endParaRPr lang="en-US" sz="1800" dirty="0">
+              <a:solidFill>
+                <a:schemeClr val="bg1"/>
+              </a:solidFill>
+            </a:endParaRPr>
+          </a:p>
+          <a:p>
+            <a:pPr marL="457200" lvl="1" indent="0">
+              <a:buFont typeface="Arial" panose="020B0604020202020204" pitchFamily="34" charset="0"/>
+              <a:buNone/>
+            </a:pPr>
+            <a:endParaRPr lang="en-US" sz="2000" dirty="0">
+              <a:solidFill>
+                <a:schemeClr val="bg1"/>
+              </a:solidFill>
+            </a:endParaRPr>
+          </a:p>
+        </p:txBody>
+      </p:sp>
+      <p:pic>
+        <p:nvPicPr>
+          <p:cNvPr id="5" name="Picture 4">
+            <a:extLst>
+              <a:ext uri="{FF2B5EF4-FFF2-40B4-BE49-F238E27FC236}">
+                <a16:creationId xmlns:a16="http://schemas.microsoft.com/office/drawing/2014/main" id="{CF2F033D-1567-AAAC-46D7-63C5D8DDEA88}"/>
+              </a:ext>
+            </a:extLst>
+          </p:cNvPr>
+          <p:cNvPicPr>
+            <a:picLocks noChangeAspect="1"/>
+          </p:cNvPicPr>
+          <p:nvPr/>
+        </p:nvPicPr>
+        <p:blipFill>
+          <a:blip r:embed="rId2">
+            <a:extLst>
+              <a:ext uri="{28A0092B-C50C-407E-A947-70E740481C1C}">
+                <a14:useLocalDpi xmlns:a14="http://schemas.microsoft.com/office/drawing/2010/main" val="0"/>
+              </a:ext>
+            </a:extLst>
+          </a:blip>
+          <a:stretch>
+            <a:fillRect/>
+          </a:stretch>
+        </p:blipFill>
+        <p:spPr>
+          <a:xfrm>
+            <a:off x="1789867" y="1105210"/>
+            <a:ext cx="9169370" cy="5521282"/>
+          </a:xfrm>
+          <a:prstGeom prst="rect">
+            <a:avLst/>
+          </a:prstGeom>
+        </p:spPr>
+      </p:pic>
+    </p:spTree>
+    <p:extLst>
+      <p:ext uri="{BB962C8B-B14F-4D97-AF65-F5344CB8AC3E}">
+        <p14:creationId xmlns:p14="http://schemas.microsoft.com/office/powerpoint/2010/main" val="3924847335"/>
+      </p:ext>
+    </p:extLst>
+  </p:cSld>
+  <p:clrMapOvr>
+    <a:masterClrMapping/>
+  </p:clrMapOvr>
+</p:sld>
+</file>
+
+<file path=ppt/slides/slide19.xml><?xml version="1.0" encoding="utf-8"?>
+<p:sld xmlns:a="http://schemas.openxmlformats.org/drawingml/2006/main" xmlns:r="http://schemas.openxmlformats.org/officeDocument/2006/relationships" xmlns:p="http://schemas.openxmlformats.org/presentationml/2006/main">
+  <p:cSld>
+    <p:bg>
+      <p:bgPr>
+        <a:solidFill>
+          <a:schemeClr val="bg1"/>
+        </a:solidFill>
+        <a:effectLst/>
+      </p:bgPr>
+    </p:bg>
+    <p:spTree>
+      <p:nvGrpSpPr>
+        <p:cNvPr id="1" name="">
+          <a:extLst>
+            <a:ext uri="{FF2B5EF4-FFF2-40B4-BE49-F238E27FC236}">
+              <a16:creationId xmlns:a16="http://schemas.microsoft.com/office/drawing/2014/main" id="{796ED428-7B5E-241A-C52C-3BB209A04D5F}"/>
+            </a:ext>
+          </a:extLst>
+        </p:cNvPr>
+        <p:cNvGrpSpPr/>
+        <p:nvPr/>
+      </p:nvGrpSpPr>
+      <p:grpSpPr>
+        <a:xfrm>
+          <a:off x="0" y="0"/>
+          <a:ext cx="0" cy="0"/>
+          <a:chOff x="0" y="0"/>
+          <a:chExt cx="0" cy="0"/>
+        </a:xfrm>
+      </p:grpSpPr>
+      <p:sp>
+        <p:nvSpPr>
+          <p:cNvPr id="8" name="Rectangle 7">
+            <a:extLst>
+              <a:ext uri="{FF2B5EF4-FFF2-40B4-BE49-F238E27FC236}">
+                <a16:creationId xmlns:a16="http://schemas.microsoft.com/office/drawing/2014/main" id="{6291540C-5AD3-D49B-89B3-DA2DCD513113}"/>
+              </a:ext>
+              <a:ext uri="{C183D7F6-B498-43B3-948B-1728B52AA6E4}">
+                <adec:decorative xmlns:adec="http://schemas.microsoft.com/office/drawing/2017/decorative" val="1"/>
+              </a:ext>
+            </a:extLst>
+          </p:cNvPr>
+          <p:cNvSpPr>
+            <a:spLocks noGrp="1" noRot="1" noChangeAspect="1" noMove="1" noResize="1" noEditPoints="1" noAdjustHandles="1" noChangeArrowheads="1" noChangeShapeType="1" noTextEdit="1"/>
+          </p:cNvSpPr>
+          <p:nvPr>
+            <p:extLst>
+              <p:ext uri="{386F3935-93C4-4BCD-93E2-E3B085C9AB24}">
+                <p16:designElem xmlns:p16="http://schemas.microsoft.com/office/powerpoint/2015/main" val="1"/>
+              </p:ext>
+            </p:extLst>
+          </p:nvPr>
+        </p:nvSpPr>
+        <p:spPr>
+          <a:xfrm>
+            <a:off x="0" y="0"/>
+            <a:ext cx="12192000" cy="6858000"/>
+          </a:xfrm>
+          <a:prstGeom prst="rect">
+            <a:avLst/>
+          </a:prstGeom>
+          <a:solidFill>
+            <a:schemeClr val="tx1">
+              <a:lumMod val="95000"/>
+              <a:lumOff val="5000"/>
+            </a:schemeClr>
+          </a:solidFill>
+          <a:ln>
+            <a:noFill/>
+          </a:ln>
+        </p:spPr>
+        <p:style>
+          <a:lnRef idx="2">
+            <a:schemeClr val="accent1">
+              <a:shade val="50000"/>
+            </a:schemeClr>
+          </a:lnRef>
+          <a:fillRef idx="1">
+            <a:schemeClr val="accent1"/>
+          </a:fillRef>
+          <a:effectRef idx="0">
+            <a:schemeClr val="accent1"/>
+          </a:effectRef>
+          <a:fontRef idx="minor">
+            <a:schemeClr val="lt1"/>
+          </a:fontRef>
+        </p:style>
+        <p:txBody>
+          <a:bodyPr rtlCol="0" anchor="ctr"/>
+          <a:lstStyle/>
+          <a:p>
+            <a:pPr algn="ctr"/>
+            <a:endParaRPr lang="en-US" dirty="0">
+              <a:solidFill>
+                <a:schemeClr val="tx1"/>
+              </a:solidFill>
+            </a:endParaRPr>
+          </a:p>
+        </p:txBody>
+      </p:sp>
+      <p:sp>
+        <p:nvSpPr>
+          <p:cNvPr id="2" name="Title 1">
+            <a:extLst>
+              <a:ext uri="{FF2B5EF4-FFF2-40B4-BE49-F238E27FC236}">
+                <a16:creationId xmlns:a16="http://schemas.microsoft.com/office/drawing/2014/main" id="{227158D3-0A3F-DDF0-18D4-0B7B1832AE23}"/>
+              </a:ext>
+            </a:extLst>
+          </p:cNvPr>
+          <p:cNvSpPr>
+            <a:spLocks noGrp="1"/>
+          </p:cNvSpPr>
+          <p:nvPr>
+            <p:ph type="title"/>
+          </p:nvPr>
+        </p:nvSpPr>
+        <p:spPr>
+          <a:xfrm>
+            <a:off x="320339" y="115193"/>
+            <a:ext cx="7015181" cy="990017"/>
+          </a:xfrm>
+        </p:spPr>
+        <p:txBody>
+          <a:bodyPr anchor="b">
+            <a:normAutofit fontScale="90000"/>
+          </a:bodyPr>
+          <a:lstStyle/>
+          <a:p>
+            <a:pPr algn="r"/>
+            <a:r>
+              <a:rPr lang="en-US" dirty="0">
+                <a:solidFill>
+                  <a:schemeClr val="bg1"/>
+                </a:solidFill>
+              </a:rPr>
+              <a:t>Slash Curve (Pd = .75, Pfa = .25)</a:t>
+            </a:r>
+          </a:p>
+        </p:txBody>
+      </p:sp>
+      <p:cxnSp>
+        <p:nvCxnSpPr>
+          <p:cNvPr id="10" name="Straight Connector 9">
+            <a:extLst>
+              <a:ext uri="{FF2B5EF4-FFF2-40B4-BE49-F238E27FC236}">
+                <a16:creationId xmlns:a16="http://schemas.microsoft.com/office/drawing/2014/main" id="{65D26181-3E5D-93FF-A171-38934400A7D1}"/>
+              </a:ext>
+              <a:ext uri="{C183D7F6-B498-43B3-948B-1728B52AA6E4}">
+                <adec:decorative xmlns:adec="http://schemas.microsoft.com/office/drawing/2017/decorative" val="1"/>
+              </a:ext>
+            </a:extLst>
+          </p:cNvPr>
+          <p:cNvCxnSpPr>
+            <a:cxnSpLocks noGrp="1" noRot="1" noChangeAspect="1" noMove="1" noResize="1" noEditPoints="1" noAdjustHandles="1" noChangeArrowheads="1" noChangeShapeType="1"/>
+          </p:cNvCxnSpPr>
+          <p:nvPr>
+            <p:extLst>
+              <p:ext uri="{386F3935-93C4-4BCD-93E2-E3B085C9AB24}">
+                <p16:designElem xmlns:p16="http://schemas.microsoft.com/office/powerpoint/2015/main" val="1"/>
+              </p:ext>
+            </p:extLst>
+          </p:nvPr>
+        </p:nvCxnSpPr>
+        <p:spPr>
+          <a:xfrm flipH="1">
+            <a:off x="126210" y="2026340"/>
+            <a:ext cx="5220936" cy="0"/>
+          </a:xfrm>
+          <a:prstGeom prst="line">
+            <a:avLst/>
+          </a:prstGeom>
+          <a:ln w="12700">
+            <a:solidFill>
+              <a:schemeClr val="accent2"/>
+            </a:solidFill>
+          </a:ln>
+        </p:spPr>
+        <p:style>
+          <a:lnRef idx="1">
+            <a:schemeClr val="accent1"/>
+          </a:lnRef>
+          <a:fillRef idx="0">
+            <a:schemeClr val="accent1"/>
+          </a:fillRef>
+          <a:effectRef idx="0">
+            <a:schemeClr val="accent1"/>
+          </a:effectRef>
+          <a:fontRef idx="minor">
+            <a:schemeClr val="tx1"/>
+          </a:fontRef>
+        </p:style>
+      </p:cxnSp>
+      <p:sp>
+        <p:nvSpPr>
+          <p:cNvPr id="12" name="Rectangle 11">
+            <a:extLst>
+              <a:ext uri="{FF2B5EF4-FFF2-40B4-BE49-F238E27FC236}">
+                <a16:creationId xmlns:a16="http://schemas.microsoft.com/office/drawing/2014/main" id="{C35456D2-6C89-60C7-2342-2F28F387498D}"/>
+              </a:ext>
+              <a:ext uri="{C183D7F6-B498-43B3-948B-1728B52AA6E4}">
+                <adec:decorative xmlns:adec="http://schemas.microsoft.com/office/drawing/2017/decorative" val="1"/>
+              </a:ext>
+            </a:extLst>
+          </p:cNvPr>
+          <p:cNvSpPr>
+            <a:spLocks noGrp="1" noRot="1" noChangeAspect="1" noMove="1" noResize="1" noEditPoints="1" noAdjustHandles="1" noChangeArrowheads="1" noChangeShapeType="1" noTextEdit="1"/>
+          </p:cNvSpPr>
+          <p:nvPr>
+            <p:extLst>
+              <p:ext uri="{386F3935-93C4-4BCD-93E2-E3B085C9AB24}">
+                <p16:designElem xmlns:p16="http://schemas.microsoft.com/office/powerpoint/2015/main" val="1"/>
+              </p:ext>
+            </p:extLst>
+          </p:nvPr>
+        </p:nvSpPr>
+        <p:spPr>
+          <a:xfrm>
+            <a:off x="126206" y="115193"/>
+            <a:ext cx="11939588" cy="6627614"/>
+          </a:xfrm>
+          <a:prstGeom prst="rect">
+            <a:avLst/>
+          </a:prstGeom>
+          <a:noFill/>
+          <a:ln w="12700">
+            <a:solidFill>
+              <a:schemeClr val="accent2"/>
+            </a:solidFill>
+          </a:ln>
+        </p:spPr>
+        <p:style>
+          <a:lnRef idx="2">
+            <a:schemeClr val="accent1">
+              <a:shade val="50000"/>
+            </a:schemeClr>
+          </a:lnRef>
+          <a:fillRef idx="1">
+            <a:schemeClr val="accent1"/>
+          </a:fillRef>
+          <a:effectRef idx="0">
+            <a:schemeClr val="accent1"/>
+          </a:effectRef>
+          <a:fontRef idx="minor">
+            <a:schemeClr val="lt1"/>
+          </a:fontRef>
+        </p:style>
+        <p:txBody>
+          <a:bodyPr rtlCol="0" anchor="ctr"/>
+          <a:lstStyle/>
+          <a:p>
+            <a:pPr algn="ctr"/>
+            <a:endParaRPr lang="en-US"/>
+          </a:p>
+        </p:txBody>
+      </p:sp>
+      <p:sp>
+        <p:nvSpPr>
+          <p:cNvPr id="20" name="Content Placeholder 2">
+            <a:extLst>
+              <a:ext uri="{FF2B5EF4-FFF2-40B4-BE49-F238E27FC236}">
+                <a16:creationId xmlns:a16="http://schemas.microsoft.com/office/drawing/2014/main" id="{2ECFB990-F012-0D62-12B8-113AB8891AFA}"/>
+              </a:ext>
+            </a:extLst>
+          </p:cNvPr>
+          <p:cNvSpPr txBox="1">
+            <a:spLocks/>
+          </p:cNvSpPr>
+          <p:nvPr/>
+        </p:nvSpPr>
+        <p:spPr>
+          <a:xfrm>
+            <a:off x="176582" y="2339862"/>
+            <a:ext cx="6341728" cy="4107656"/>
+          </a:xfrm>
+          <a:prstGeom prst="rect">
+            <a:avLst/>
+          </a:prstGeom>
+        </p:spPr>
+        <p:txBody>
+          <a:bodyPr vert="horz" lIns="91440" tIns="45720" rIns="91440" bIns="45720" rtlCol="0">
+            <a:normAutofit/>
+          </a:bodyPr>
+          <a:lstStyle>
+            <a:lvl1pPr marL="228600" indent="-228600" algn="l" defTabSz="914400" rtl="0" eaLnBrk="1" latinLnBrk="0" hangingPunct="1">
+              <a:lnSpc>
+                <a:spcPct val="90000"/>
+              </a:lnSpc>
+              <a:spcBef>
+                <a:spcPts val="1000"/>
+              </a:spcBef>
+              <a:buFont typeface="Arial" panose="020B0604020202020204" pitchFamily="34" charset="0"/>
+              <a:buChar char="•"/>
+              <a:defRPr sz="2800" kern="1200">
+                <a:solidFill>
+                  <a:schemeClr val="tx1"/>
+                </a:solidFill>
+                <a:latin typeface="+mn-lt"/>
+                <a:ea typeface="+mn-ea"/>
+                <a:cs typeface="+mn-cs"/>
+              </a:defRPr>
+            </a:lvl1pPr>
+            <a:lvl2pPr marL="685800" indent="-228600" algn="l" defTabSz="914400" rtl="0" eaLnBrk="1" latinLnBrk="0" hangingPunct="1">
+              <a:lnSpc>
+                <a:spcPct val="90000"/>
+              </a:lnSpc>
+              <a:spcBef>
+                <a:spcPts val="500"/>
+              </a:spcBef>
+              <a:buFont typeface="Arial" panose="020B0604020202020204" pitchFamily="34" charset="0"/>
+              <a:buChar char="•"/>
+              <a:defRPr sz="2400" kern="1200">
+                <a:solidFill>
+                  <a:schemeClr val="tx1"/>
+                </a:solidFill>
+                <a:latin typeface="+mn-lt"/>
+                <a:ea typeface="+mn-ea"/>
+                <a:cs typeface="+mn-cs"/>
+              </a:defRPr>
+            </a:lvl2pPr>
+            <a:lvl3pPr marL="1143000" indent="-228600" algn="l" defTabSz="914400" rtl="0" eaLnBrk="1" latinLnBrk="0" hangingPunct="1">
+              <a:lnSpc>
+                <a:spcPct val="90000"/>
+              </a:lnSpc>
+              <a:spcBef>
+                <a:spcPts val="500"/>
+              </a:spcBef>
+              <a:buFont typeface="Arial" panose="020B0604020202020204" pitchFamily="34" charset="0"/>
+              <a:buChar char="•"/>
+              <a:defRPr sz="2000" kern="1200">
+                <a:solidFill>
+                  <a:schemeClr val="tx1"/>
+                </a:solidFill>
+                <a:latin typeface="+mn-lt"/>
+                <a:ea typeface="+mn-ea"/>
+                <a:cs typeface="+mn-cs"/>
+              </a:defRPr>
+            </a:lvl3pPr>
+            <a:lvl4pPr marL="1600200" indent="-228600" algn="l" defTabSz="914400" rtl="0" eaLnBrk="1" latinLnBrk="0" hangingPunct="1">
+              <a:lnSpc>
+                <a:spcPct val="90000"/>
+              </a:lnSpc>
+              <a:spcBef>
+                <a:spcPts val="500"/>
+              </a:spcBef>
+              <a:buFont typeface="Arial" panose="020B0604020202020204" pitchFamily="34" charset="0"/>
+              <a:buChar char="•"/>
+              <a:defRPr sz="1800" kern="1200">
+                <a:solidFill>
+                  <a:schemeClr val="tx1"/>
+                </a:solidFill>
+                <a:latin typeface="+mn-lt"/>
+                <a:ea typeface="+mn-ea"/>
+                <a:cs typeface="+mn-cs"/>
+              </a:defRPr>
+            </a:lvl4pPr>
+            <a:lvl5pPr marL="2057400" indent="-228600" algn="l" defTabSz="914400" rtl="0" eaLnBrk="1" latinLnBrk="0" hangingPunct="1">
+              <a:lnSpc>
+                <a:spcPct val="90000"/>
+              </a:lnSpc>
+              <a:spcBef>
+                <a:spcPts val="500"/>
+              </a:spcBef>
+              <a:buFont typeface="Arial" panose="020B0604020202020204" pitchFamily="34" charset="0"/>
+              <a:buChar char="•"/>
+              <a:defRPr sz="1800" kern="1200">
+                <a:solidFill>
+                  <a:schemeClr val="tx1"/>
+                </a:solidFill>
+                <a:latin typeface="+mn-lt"/>
+                <a:ea typeface="+mn-ea"/>
+                <a:cs typeface="+mn-cs"/>
+              </a:defRPr>
+            </a:lvl5pPr>
+            <a:lvl6pPr marL="2514600" indent="-228600" algn="l" defTabSz="914400" rtl="0" eaLnBrk="1" latinLnBrk="0" hangingPunct="1">
+              <a:lnSpc>
+                <a:spcPct val="90000"/>
+              </a:lnSpc>
+              <a:spcBef>
+                <a:spcPts val="500"/>
+              </a:spcBef>
+              <a:buFont typeface="Arial" panose="020B0604020202020204" pitchFamily="34" charset="0"/>
+              <a:buChar char="•"/>
+              <a:defRPr sz="1800" kern="1200">
+                <a:solidFill>
+                  <a:schemeClr val="tx1"/>
+                </a:solidFill>
+                <a:latin typeface="+mn-lt"/>
+                <a:ea typeface="+mn-ea"/>
+                <a:cs typeface="+mn-cs"/>
+              </a:defRPr>
+            </a:lvl6pPr>
+            <a:lvl7pPr marL="2971800" indent="-228600" algn="l" defTabSz="914400" rtl="0" eaLnBrk="1" latinLnBrk="0" hangingPunct="1">
+              <a:lnSpc>
+                <a:spcPct val="90000"/>
+              </a:lnSpc>
+              <a:spcBef>
+                <a:spcPts val="500"/>
+              </a:spcBef>
+              <a:buFont typeface="Arial" panose="020B0604020202020204" pitchFamily="34" charset="0"/>
+              <a:buChar char="•"/>
+              <a:defRPr sz="1800" kern="1200">
+                <a:solidFill>
+                  <a:schemeClr val="tx1"/>
+                </a:solidFill>
+                <a:latin typeface="+mn-lt"/>
+                <a:ea typeface="+mn-ea"/>
+                <a:cs typeface="+mn-cs"/>
+              </a:defRPr>
+            </a:lvl7pPr>
+            <a:lvl8pPr marL="3429000" indent="-228600" algn="l" defTabSz="914400" rtl="0" eaLnBrk="1" latinLnBrk="0" hangingPunct="1">
+              <a:lnSpc>
+                <a:spcPct val="90000"/>
+              </a:lnSpc>
+              <a:spcBef>
+                <a:spcPts val="500"/>
+              </a:spcBef>
+              <a:buFont typeface="Arial" panose="020B0604020202020204" pitchFamily="34" charset="0"/>
+              <a:buChar char="•"/>
+              <a:defRPr sz="1800" kern="1200">
+                <a:solidFill>
+                  <a:schemeClr val="tx1"/>
+                </a:solidFill>
+                <a:latin typeface="+mn-lt"/>
+                <a:ea typeface="+mn-ea"/>
+                <a:cs typeface="+mn-cs"/>
+              </a:defRPr>
+            </a:lvl8pPr>
+            <a:lvl9pPr marL="3886200" indent="-228600" algn="l" defTabSz="914400" rtl="0" eaLnBrk="1" latinLnBrk="0" hangingPunct="1">
+              <a:lnSpc>
+                <a:spcPct val="90000"/>
+              </a:lnSpc>
+              <a:spcBef>
+                <a:spcPts val="500"/>
+              </a:spcBef>
+              <a:buFont typeface="Arial" panose="020B0604020202020204" pitchFamily="34" charset="0"/>
+              <a:buChar char="•"/>
+              <a:defRPr sz="1800" kern="1200">
+                <a:solidFill>
+                  <a:schemeClr val="tx1"/>
+                </a:solidFill>
+                <a:latin typeface="+mn-lt"/>
+                <a:ea typeface="+mn-ea"/>
+                <a:cs typeface="+mn-cs"/>
+              </a:defRPr>
+            </a:lvl9pPr>
+          </a:lstStyle>
+          <a:p>
+            <a:pPr lvl="1">
+              <a:lnSpc>
+                <a:spcPct val="100000"/>
+              </a:lnSpc>
+            </a:pPr>
+            <a:endParaRPr lang="en-US" sz="1800" dirty="0">
+              <a:solidFill>
+                <a:schemeClr val="bg1"/>
+              </a:solidFill>
+            </a:endParaRPr>
+          </a:p>
+          <a:p>
+            <a:pPr marL="457200" lvl="1" indent="0">
+              <a:buFont typeface="Arial" panose="020B0604020202020204" pitchFamily="34" charset="0"/>
+              <a:buNone/>
+            </a:pPr>
+            <a:endParaRPr lang="en-US" sz="2000" dirty="0">
+              <a:solidFill>
+                <a:schemeClr val="bg1"/>
+              </a:solidFill>
+            </a:endParaRPr>
+          </a:p>
+        </p:txBody>
+      </p:sp>
+      <p:pic>
+        <p:nvPicPr>
+          <p:cNvPr id="7" name="Picture 6">
+            <a:extLst>
+              <a:ext uri="{FF2B5EF4-FFF2-40B4-BE49-F238E27FC236}">
+                <a16:creationId xmlns:a16="http://schemas.microsoft.com/office/drawing/2014/main" id="{A8E81336-550B-E30F-F4FA-FFF594D590D8}"/>
+              </a:ext>
+            </a:extLst>
+          </p:cNvPr>
+          <p:cNvPicPr>
+            <a:picLocks noChangeAspect="1"/>
+          </p:cNvPicPr>
+          <p:nvPr/>
+        </p:nvPicPr>
+        <p:blipFill>
+          <a:blip r:embed="rId2">
+            <a:extLst>
+              <a:ext uri="{28A0092B-C50C-407E-A947-70E740481C1C}">
+                <a14:useLocalDpi xmlns:a14="http://schemas.microsoft.com/office/drawing/2010/main" val="0"/>
+              </a:ext>
+            </a:extLst>
+          </a:blip>
+          <a:stretch>
+            <a:fillRect/>
+          </a:stretch>
+        </p:blipFill>
+        <p:spPr>
+          <a:xfrm>
+            <a:off x="1882753" y="1105210"/>
+            <a:ext cx="9208762" cy="5545002"/>
+          </a:xfrm>
+          <a:prstGeom prst="rect">
+            <a:avLst/>
+          </a:prstGeom>
+        </p:spPr>
+      </p:pic>
+    </p:spTree>
+    <p:extLst>
+      <p:ext uri="{BB962C8B-B14F-4D97-AF65-F5344CB8AC3E}">
+        <p14:creationId xmlns:p14="http://schemas.microsoft.com/office/powerpoint/2010/main" val="2149441760"/>
       </p:ext>
     </p:extLst>
   </p:cSld>
@@ -6902,6 +10224,1739 @@
     <p:extLst>
       <p:ext uri="{BB962C8B-B14F-4D97-AF65-F5344CB8AC3E}">
         <p14:creationId xmlns:p14="http://schemas.microsoft.com/office/powerpoint/2010/main" val="1919562461"/>
+      </p:ext>
+    </p:extLst>
+  </p:cSld>
+  <p:clrMapOvr>
+    <a:masterClrMapping/>
+  </p:clrMapOvr>
+</p:sld>
+</file>
+
+<file path=ppt/slides/slide20.xml><?xml version="1.0" encoding="utf-8"?>
+<p:sld xmlns:a="http://schemas.openxmlformats.org/drawingml/2006/main" xmlns:r="http://schemas.openxmlformats.org/officeDocument/2006/relationships" xmlns:p="http://schemas.openxmlformats.org/presentationml/2006/main">
+  <p:cSld>
+    <p:bg>
+      <p:bgPr>
+        <a:solidFill>
+          <a:schemeClr val="bg1"/>
+        </a:solidFill>
+        <a:effectLst/>
+      </p:bgPr>
+    </p:bg>
+    <p:spTree>
+      <p:nvGrpSpPr>
+        <p:cNvPr id="1" name="">
+          <a:extLst>
+            <a:ext uri="{FF2B5EF4-FFF2-40B4-BE49-F238E27FC236}">
+              <a16:creationId xmlns:a16="http://schemas.microsoft.com/office/drawing/2014/main" id="{C8DE2232-7CFD-956A-7BC4-794F026B9CE3}"/>
+            </a:ext>
+          </a:extLst>
+        </p:cNvPr>
+        <p:cNvGrpSpPr/>
+        <p:nvPr/>
+      </p:nvGrpSpPr>
+      <p:grpSpPr>
+        <a:xfrm>
+          <a:off x="0" y="0"/>
+          <a:ext cx="0" cy="0"/>
+          <a:chOff x="0" y="0"/>
+          <a:chExt cx="0" cy="0"/>
+        </a:xfrm>
+      </p:grpSpPr>
+      <p:sp>
+        <p:nvSpPr>
+          <p:cNvPr id="8" name="Rectangle 7">
+            <a:extLst>
+              <a:ext uri="{FF2B5EF4-FFF2-40B4-BE49-F238E27FC236}">
+                <a16:creationId xmlns:a16="http://schemas.microsoft.com/office/drawing/2014/main" id="{5BAB169F-B9D9-A3E2-A087-76FF92CEB7F8}"/>
+              </a:ext>
+              <a:ext uri="{C183D7F6-B498-43B3-948B-1728B52AA6E4}">
+                <adec:decorative xmlns:adec="http://schemas.microsoft.com/office/drawing/2017/decorative" val="1"/>
+              </a:ext>
+            </a:extLst>
+          </p:cNvPr>
+          <p:cNvSpPr>
+            <a:spLocks noGrp="1" noRot="1" noChangeAspect="1" noMove="1" noResize="1" noEditPoints="1" noAdjustHandles="1" noChangeArrowheads="1" noChangeShapeType="1" noTextEdit="1"/>
+          </p:cNvSpPr>
+          <p:nvPr>
+            <p:extLst>
+              <p:ext uri="{386F3935-93C4-4BCD-93E2-E3B085C9AB24}">
+                <p16:designElem xmlns:p16="http://schemas.microsoft.com/office/powerpoint/2015/main" val="1"/>
+              </p:ext>
+            </p:extLst>
+          </p:nvPr>
+        </p:nvSpPr>
+        <p:spPr>
+          <a:xfrm>
+            <a:off x="0" y="0"/>
+            <a:ext cx="12192000" cy="6858000"/>
+          </a:xfrm>
+          <a:prstGeom prst="rect">
+            <a:avLst/>
+          </a:prstGeom>
+          <a:solidFill>
+            <a:schemeClr val="tx1">
+              <a:lumMod val="95000"/>
+              <a:lumOff val="5000"/>
+            </a:schemeClr>
+          </a:solidFill>
+          <a:ln>
+            <a:noFill/>
+          </a:ln>
+        </p:spPr>
+        <p:style>
+          <a:lnRef idx="2">
+            <a:schemeClr val="accent1">
+              <a:shade val="50000"/>
+            </a:schemeClr>
+          </a:lnRef>
+          <a:fillRef idx="1">
+            <a:schemeClr val="accent1"/>
+          </a:fillRef>
+          <a:effectRef idx="0">
+            <a:schemeClr val="accent1"/>
+          </a:effectRef>
+          <a:fontRef idx="minor">
+            <a:schemeClr val="lt1"/>
+          </a:fontRef>
+        </p:style>
+        <p:txBody>
+          <a:bodyPr rtlCol="0" anchor="ctr"/>
+          <a:lstStyle/>
+          <a:p>
+            <a:pPr algn="ctr"/>
+            <a:endParaRPr lang="en-US" dirty="0">
+              <a:solidFill>
+                <a:schemeClr val="tx1"/>
+              </a:solidFill>
+            </a:endParaRPr>
+          </a:p>
+        </p:txBody>
+      </p:sp>
+      <p:sp>
+        <p:nvSpPr>
+          <p:cNvPr id="2" name="Title 1">
+            <a:extLst>
+              <a:ext uri="{FF2B5EF4-FFF2-40B4-BE49-F238E27FC236}">
+                <a16:creationId xmlns:a16="http://schemas.microsoft.com/office/drawing/2014/main" id="{6A0DB7F2-6BDD-391A-C52C-AF6FDD99AA51}"/>
+              </a:ext>
+            </a:extLst>
+          </p:cNvPr>
+          <p:cNvSpPr>
+            <a:spLocks noGrp="1"/>
+          </p:cNvSpPr>
+          <p:nvPr>
+            <p:ph type="title"/>
+          </p:nvPr>
+        </p:nvSpPr>
+        <p:spPr>
+          <a:xfrm>
+            <a:off x="320339" y="115193"/>
+            <a:ext cx="7015181" cy="990017"/>
+          </a:xfrm>
+        </p:spPr>
+        <p:txBody>
+          <a:bodyPr anchor="b">
+            <a:normAutofit fontScale="90000"/>
+          </a:bodyPr>
+          <a:lstStyle/>
+          <a:p>
+            <a:pPr algn="r"/>
+            <a:r>
+              <a:rPr lang="en-US" dirty="0">
+                <a:solidFill>
+                  <a:schemeClr val="bg1"/>
+                </a:solidFill>
+              </a:rPr>
+              <a:t>Slash Curve (Pd = .85, Pfa = .15)</a:t>
+            </a:r>
+          </a:p>
+        </p:txBody>
+      </p:sp>
+      <p:cxnSp>
+        <p:nvCxnSpPr>
+          <p:cNvPr id="10" name="Straight Connector 9">
+            <a:extLst>
+              <a:ext uri="{FF2B5EF4-FFF2-40B4-BE49-F238E27FC236}">
+                <a16:creationId xmlns:a16="http://schemas.microsoft.com/office/drawing/2014/main" id="{0D359F7E-DA6A-38FF-1EEF-2944E8421602}"/>
+              </a:ext>
+              <a:ext uri="{C183D7F6-B498-43B3-948B-1728B52AA6E4}">
+                <adec:decorative xmlns:adec="http://schemas.microsoft.com/office/drawing/2017/decorative" val="1"/>
+              </a:ext>
+            </a:extLst>
+          </p:cNvPr>
+          <p:cNvCxnSpPr>
+            <a:cxnSpLocks noGrp="1" noRot="1" noChangeAspect="1" noMove="1" noResize="1" noEditPoints="1" noAdjustHandles="1" noChangeArrowheads="1" noChangeShapeType="1"/>
+          </p:cNvCxnSpPr>
+          <p:nvPr>
+            <p:extLst>
+              <p:ext uri="{386F3935-93C4-4BCD-93E2-E3B085C9AB24}">
+                <p16:designElem xmlns:p16="http://schemas.microsoft.com/office/powerpoint/2015/main" val="1"/>
+              </p:ext>
+            </p:extLst>
+          </p:nvPr>
+        </p:nvCxnSpPr>
+        <p:spPr>
+          <a:xfrm flipH="1">
+            <a:off x="126210" y="2026340"/>
+            <a:ext cx="5220936" cy="0"/>
+          </a:xfrm>
+          <a:prstGeom prst="line">
+            <a:avLst/>
+          </a:prstGeom>
+          <a:ln w="12700">
+            <a:solidFill>
+              <a:schemeClr val="accent2"/>
+            </a:solidFill>
+          </a:ln>
+        </p:spPr>
+        <p:style>
+          <a:lnRef idx="1">
+            <a:schemeClr val="accent1"/>
+          </a:lnRef>
+          <a:fillRef idx="0">
+            <a:schemeClr val="accent1"/>
+          </a:fillRef>
+          <a:effectRef idx="0">
+            <a:schemeClr val="accent1"/>
+          </a:effectRef>
+          <a:fontRef idx="minor">
+            <a:schemeClr val="tx1"/>
+          </a:fontRef>
+        </p:style>
+      </p:cxnSp>
+      <p:sp>
+        <p:nvSpPr>
+          <p:cNvPr id="12" name="Rectangle 11">
+            <a:extLst>
+              <a:ext uri="{FF2B5EF4-FFF2-40B4-BE49-F238E27FC236}">
+                <a16:creationId xmlns:a16="http://schemas.microsoft.com/office/drawing/2014/main" id="{586CB8D9-E0CC-CF0C-B81C-413B64BE4CF7}"/>
+              </a:ext>
+              <a:ext uri="{C183D7F6-B498-43B3-948B-1728B52AA6E4}">
+                <adec:decorative xmlns:adec="http://schemas.microsoft.com/office/drawing/2017/decorative" val="1"/>
+              </a:ext>
+            </a:extLst>
+          </p:cNvPr>
+          <p:cNvSpPr>
+            <a:spLocks noGrp="1" noRot="1" noChangeAspect="1" noMove="1" noResize="1" noEditPoints="1" noAdjustHandles="1" noChangeArrowheads="1" noChangeShapeType="1" noTextEdit="1"/>
+          </p:cNvSpPr>
+          <p:nvPr>
+            <p:extLst>
+              <p:ext uri="{386F3935-93C4-4BCD-93E2-E3B085C9AB24}">
+                <p16:designElem xmlns:p16="http://schemas.microsoft.com/office/powerpoint/2015/main" val="1"/>
+              </p:ext>
+            </p:extLst>
+          </p:nvPr>
+        </p:nvSpPr>
+        <p:spPr>
+          <a:xfrm>
+            <a:off x="126206" y="115193"/>
+            <a:ext cx="11939588" cy="6627614"/>
+          </a:xfrm>
+          <a:prstGeom prst="rect">
+            <a:avLst/>
+          </a:prstGeom>
+          <a:noFill/>
+          <a:ln w="12700">
+            <a:solidFill>
+              <a:schemeClr val="accent2"/>
+            </a:solidFill>
+          </a:ln>
+        </p:spPr>
+        <p:style>
+          <a:lnRef idx="2">
+            <a:schemeClr val="accent1">
+              <a:shade val="50000"/>
+            </a:schemeClr>
+          </a:lnRef>
+          <a:fillRef idx="1">
+            <a:schemeClr val="accent1"/>
+          </a:fillRef>
+          <a:effectRef idx="0">
+            <a:schemeClr val="accent1"/>
+          </a:effectRef>
+          <a:fontRef idx="minor">
+            <a:schemeClr val="lt1"/>
+          </a:fontRef>
+        </p:style>
+        <p:txBody>
+          <a:bodyPr rtlCol="0" anchor="ctr"/>
+          <a:lstStyle/>
+          <a:p>
+            <a:pPr algn="ctr"/>
+            <a:endParaRPr lang="en-US"/>
+          </a:p>
+        </p:txBody>
+      </p:sp>
+      <p:sp>
+        <p:nvSpPr>
+          <p:cNvPr id="20" name="Content Placeholder 2">
+            <a:extLst>
+              <a:ext uri="{FF2B5EF4-FFF2-40B4-BE49-F238E27FC236}">
+                <a16:creationId xmlns:a16="http://schemas.microsoft.com/office/drawing/2014/main" id="{D1C0CE94-FD25-36C2-BFC4-80FBA32170A0}"/>
+              </a:ext>
+            </a:extLst>
+          </p:cNvPr>
+          <p:cNvSpPr txBox="1">
+            <a:spLocks/>
+          </p:cNvSpPr>
+          <p:nvPr/>
+        </p:nvSpPr>
+        <p:spPr>
+          <a:xfrm>
+            <a:off x="176582" y="2339862"/>
+            <a:ext cx="6341728" cy="4107656"/>
+          </a:xfrm>
+          <a:prstGeom prst="rect">
+            <a:avLst/>
+          </a:prstGeom>
+        </p:spPr>
+        <p:txBody>
+          <a:bodyPr vert="horz" lIns="91440" tIns="45720" rIns="91440" bIns="45720" rtlCol="0">
+            <a:normAutofit/>
+          </a:bodyPr>
+          <a:lstStyle>
+            <a:lvl1pPr marL="228600" indent="-228600" algn="l" defTabSz="914400" rtl="0" eaLnBrk="1" latinLnBrk="0" hangingPunct="1">
+              <a:lnSpc>
+                <a:spcPct val="90000"/>
+              </a:lnSpc>
+              <a:spcBef>
+                <a:spcPts val="1000"/>
+              </a:spcBef>
+              <a:buFont typeface="Arial" panose="020B0604020202020204" pitchFamily="34" charset="0"/>
+              <a:buChar char="•"/>
+              <a:defRPr sz="2800" kern="1200">
+                <a:solidFill>
+                  <a:schemeClr val="tx1"/>
+                </a:solidFill>
+                <a:latin typeface="+mn-lt"/>
+                <a:ea typeface="+mn-ea"/>
+                <a:cs typeface="+mn-cs"/>
+              </a:defRPr>
+            </a:lvl1pPr>
+            <a:lvl2pPr marL="685800" indent="-228600" algn="l" defTabSz="914400" rtl="0" eaLnBrk="1" latinLnBrk="0" hangingPunct="1">
+              <a:lnSpc>
+                <a:spcPct val="90000"/>
+              </a:lnSpc>
+              <a:spcBef>
+                <a:spcPts val="500"/>
+              </a:spcBef>
+              <a:buFont typeface="Arial" panose="020B0604020202020204" pitchFamily="34" charset="0"/>
+              <a:buChar char="•"/>
+              <a:defRPr sz="2400" kern="1200">
+                <a:solidFill>
+                  <a:schemeClr val="tx1"/>
+                </a:solidFill>
+                <a:latin typeface="+mn-lt"/>
+                <a:ea typeface="+mn-ea"/>
+                <a:cs typeface="+mn-cs"/>
+              </a:defRPr>
+            </a:lvl2pPr>
+            <a:lvl3pPr marL="1143000" indent="-228600" algn="l" defTabSz="914400" rtl="0" eaLnBrk="1" latinLnBrk="0" hangingPunct="1">
+              <a:lnSpc>
+                <a:spcPct val="90000"/>
+              </a:lnSpc>
+              <a:spcBef>
+                <a:spcPts val="500"/>
+              </a:spcBef>
+              <a:buFont typeface="Arial" panose="020B0604020202020204" pitchFamily="34" charset="0"/>
+              <a:buChar char="•"/>
+              <a:defRPr sz="2000" kern="1200">
+                <a:solidFill>
+                  <a:schemeClr val="tx1"/>
+                </a:solidFill>
+                <a:latin typeface="+mn-lt"/>
+                <a:ea typeface="+mn-ea"/>
+                <a:cs typeface="+mn-cs"/>
+              </a:defRPr>
+            </a:lvl3pPr>
+            <a:lvl4pPr marL="1600200" indent="-228600" algn="l" defTabSz="914400" rtl="0" eaLnBrk="1" latinLnBrk="0" hangingPunct="1">
+              <a:lnSpc>
+                <a:spcPct val="90000"/>
+              </a:lnSpc>
+              <a:spcBef>
+                <a:spcPts val="500"/>
+              </a:spcBef>
+              <a:buFont typeface="Arial" panose="020B0604020202020204" pitchFamily="34" charset="0"/>
+              <a:buChar char="•"/>
+              <a:defRPr sz="1800" kern="1200">
+                <a:solidFill>
+                  <a:schemeClr val="tx1"/>
+                </a:solidFill>
+                <a:latin typeface="+mn-lt"/>
+                <a:ea typeface="+mn-ea"/>
+                <a:cs typeface="+mn-cs"/>
+              </a:defRPr>
+            </a:lvl4pPr>
+            <a:lvl5pPr marL="2057400" indent="-228600" algn="l" defTabSz="914400" rtl="0" eaLnBrk="1" latinLnBrk="0" hangingPunct="1">
+              <a:lnSpc>
+                <a:spcPct val="90000"/>
+              </a:lnSpc>
+              <a:spcBef>
+                <a:spcPts val="500"/>
+              </a:spcBef>
+              <a:buFont typeface="Arial" panose="020B0604020202020204" pitchFamily="34" charset="0"/>
+              <a:buChar char="•"/>
+              <a:defRPr sz="1800" kern="1200">
+                <a:solidFill>
+                  <a:schemeClr val="tx1"/>
+                </a:solidFill>
+                <a:latin typeface="+mn-lt"/>
+                <a:ea typeface="+mn-ea"/>
+                <a:cs typeface="+mn-cs"/>
+              </a:defRPr>
+            </a:lvl5pPr>
+            <a:lvl6pPr marL="2514600" indent="-228600" algn="l" defTabSz="914400" rtl="0" eaLnBrk="1" latinLnBrk="0" hangingPunct="1">
+              <a:lnSpc>
+                <a:spcPct val="90000"/>
+              </a:lnSpc>
+              <a:spcBef>
+                <a:spcPts val="500"/>
+              </a:spcBef>
+              <a:buFont typeface="Arial" panose="020B0604020202020204" pitchFamily="34" charset="0"/>
+              <a:buChar char="•"/>
+              <a:defRPr sz="1800" kern="1200">
+                <a:solidFill>
+                  <a:schemeClr val="tx1"/>
+                </a:solidFill>
+                <a:latin typeface="+mn-lt"/>
+                <a:ea typeface="+mn-ea"/>
+                <a:cs typeface="+mn-cs"/>
+              </a:defRPr>
+            </a:lvl6pPr>
+            <a:lvl7pPr marL="2971800" indent="-228600" algn="l" defTabSz="914400" rtl="0" eaLnBrk="1" latinLnBrk="0" hangingPunct="1">
+              <a:lnSpc>
+                <a:spcPct val="90000"/>
+              </a:lnSpc>
+              <a:spcBef>
+                <a:spcPts val="500"/>
+              </a:spcBef>
+              <a:buFont typeface="Arial" panose="020B0604020202020204" pitchFamily="34" charset="0"/>
+              <a:buChar char="•"/>
+              <a:defRPr sz="1800" kern="1200">
+                <a:solidFill>
+                  <a:schemeClr val="tx1"/>
+                </a:solidFill>
+                <a:latin typeface="+mn-lt"/>
+                <a:ea typeface="+mn-ea"/>
+                <a:cs typeface="+mn-cs"/>
+              </a:defRPr>
+            </a:lvl7pPr>
+            <a:lvl8pPr marL="3429000" indent="-228600" algn="l" defTabSz="914400" rtl="0" eaLnBrk="1" latinLnBrk="0" hangingPunct="1">
+              <a:lnSpc>
+                <a:spcPct val="90000"/>
+              </a:lnSpc>
+              <a:spcBef>
+                <a:spcPts val="500"/>
+              </a:spcBef>
+              <a:buFont typeface="Arial" panose="020B0604020202020204" pitchFamily="34" charset="0"/>
+              <a:buChar char="•"/>
+              <a:defRPr sz="1800" kern="1200">
+                <a:solidFill>
+                  <a:schemeClr val="tx1"/>
+                </a:solidFill>
+                <a:latin typeface="+mn-lt"/>
+                <a:ea typeface="+mn-ea"/>
+                <a:cs typeface="+mn-cs"/>
+              </a:defRPr>
+            </a:lvl8pPr>
+            <a:lvl9pPr marL="3886200" indent="-228600" algn="l" defTabSz="914400" rtl="0" eaLnBrk="1" latinLnBrk="0" hangingPunct="1">
+              <a:lnSpc>
+                <a:spcPct val="90000"/>
+              </a:lnSpc>
+              <a:spcBef>
+                <a:spcPts val="500"/>
+              </a:spcBef>
+              <a:buFont typeface="Arial" panose="020B0604020202020204" pitchFamily="34" charset="0"/>
+              <a:buChar char="•"/>
+              <a:defRPr sz="1800" kern="1200">
+                <a:solidFill>
+                  <a:schemeClr val="tx1"/>
+                </a:solidFill>
+                <a:latin typeface="+mn-lt"/>
+                <a:ea typeface="+mn-ea"/>
+                <a:cs typeface="+mn-cs"/>
+              </a:defRPr>
+            </a:lvl9pPr>
+          </a:lstStyle>
+          <a:p>
+            <a:pPr lvl="1">
+              <a:lnSpc>
+                <a:spcPct val="100000"/>
+              </a:lnSpc>
+            </a:pPr>
+            <a:endParaRPr lang="en-US" sz="1800" dirty="0">
+              <a:solidFill>
+                <a:schemeClr val="bg1"/>
+              </a:solidFill>
+            </a:endParaRPr>
+          </a:p>
+          <a:p>
+            <a:pPr marL="457200" lvl="1" indent="0">
+              <a:buFont typeface="Arial" panose="020B0604020202020204" pitchFamily="34" charset="0"/>
+              <a:buNone/>
+            </a:pPr>
+            <a:endParaRPr lang="en-US" sz="2000" dirty="0">
+              <a:solidFill>
+                <a:schemeClr val="bg1"/>
+              </a:solidFill>
+            </a:endParaRPr>
+          </a:p>
+        </p:txBody>
+      </p:sp>
+      <p:pic>
+        <p:nvPicPr>
+          <p:cNvPr id="4" name="Picture 3">
+            <a:extLst>
+              <a:ext uri="{FF2B5EF4-FFF2-40B4-BE49-F238E27FC236}">
+                <a16:creationId xmlns:a16="http://schemas.microsoft.com/office/drawing/2014/main" id="{AE004873-638D-9991-BA02-C5D22B3B2868}"/>
+              </a:ext>
+            </a:extLst>
+          </p:cNvPr>
+          <p:cNvPicPr>
+            <a:picLocks noChangeAspect="1"/>
+          </p:cNvPicPr>
+          <p:nvPr/>
+        </p:nvPicPr>
+        <p:blipFill>
+          <a:blip r:embed="rId2">
+            <a:extLst>
+              <a:ext uri="{28A0092B-C50C-407E-A947-70E740481C1C}">
+                <a14:useLocalDpi xmlns:a14="http://schemas.microsoft.com/office/drawing/2010/main" val="0"/>
+              </a:ext>
+            </a:extLst>
+          </a:blip>
+          <a:stretch>
+            <a:fillRect/>
+          </a:stretch>
+        </p:blipFill>
+        <p:spPr>
+          <a:xfrm>
+            <a:off x="1998627" y="1220403"/>
+            <a:ext cx="8950994" cy="5389788"/>
+          </a:xfrm>
+          <a:prstGeom prst="rect">
+            <a:avLst/>
+          </a:prstGeom>
+        </p:spPr>
+      </p:pic>
+      <p:cxnSp>
+        <p:nvCxnSpPr>
+          <p:cNvPr id="14" name="Straight Connector 13">
+            <a:extLst>
+              <a:ext uri="{FF2B5EF4-FFF2-40B4-BE49-F238E27FC236}">
+                <a16:creationId xmlns:a16="http://schemas.microsoft.com/office/drawing/2014/main" id="{D9F8F0B0-8788-042F-2493-D1B476265230}"/>
+              </a:ext>
+            </a:extLst>
+          </p:cNvPr>
+          <p:cNvCxnSpPr/>
+          <p:nvPr/>
+        </p:nvCxnSpPr>
+        <p:spPr>
+          <a:xfrm flipV="1">
+            <a:off x="6638544" y="3816096"/>
+            <a:ext cx="0" cy="2084832"/>
+          </a:xfrm>
+          <a:prstGeom prst="line">
+            <a:avLst/>
+          </a:prstGeom>
+          <a:ln>
+            <a:solidFill>
+              <a:srgbClr val="FF0000"/>
+            </a:solidFill>
+          </a:ln>
+        </p:spPr>
+        <p:style>
+          <a:lnRef idx="2">
+            <a:schemeClr val="accent1"/>
+          </a:lnRef>
+          <a:fillRef idx="0">
+            <a:schemeClr val="accent1"/>
+          </a:fillRef>
+          <a:effectRef idx="1">
+            <a:schemeClr val="accent1"/>
+          </a:effectRef>
+          <a:fontRef idx="minor">
+            <a:schemeClr val="tx1"/>
+          </a:fontRef>
+        </p:style>
+      </p:cxnSp>
+      <p:cxnSp>
+        <p:nvCxnSpPr>
+          <p:cNvPr id="15" name="Straight Connector 14">
+            <a:extLst>
+              <a:ext uri="{FF2B5EF4-FFF2-40B4-BE49-F238E27FC236}">
+                <a16:creationId xmlns:a16="http://schemas.microsoft.com/office/drawing/2014/main" id="{998329FF-10FF-A76F-6712-2C0AD620DC41}"/>
+              </a:ext>
+            </a:extLst>
+          </p:cNvPr>
+          <p:cNvCxnSpPr>
+            <a:cxnSpLocks/>
+          </p:cNvCxnSpPr>
+          <p:nvPr/>
+        </p:nvCxnSpPr>
+        <p:spPr>
+          <a:xfrm>
+            <a:off x="3133344" y="3816096"/>
+            <a:ext cx="3505200" cy="0"/>
+          </a:xfrm>
+          <a:prstGeom prst="line">
+            <a:avLst/>
+          </a:prstGeom>
+          <a:ln>
+            <a:solidFill>
+              <a:srgbClr val="FF0000"/>
+            </a:solidFill>
+          </a:ln>
+        </p:spPr>
+        <p:style>
+          <a:lnRef idx="2">
+            <a:schemeClr val="accent1"/>
+          </a:lnRef>
+          <a:fillRef idx="0">
+            <a:schemeClr val="accent1"/>
+          </a:fillRef>
+          <a:effectRef idx="1">
+            <a:schemeClr val="accent1"/>
+          </a:effectRef>
+          <a:fontRef idx="minor">
+            <a:schemeClr val="tx1"/>
+          </a:fontRef>
+        </p:style>
+      </p:cxnSp>
+    </p:spTree>
+    <p:extLst>
+      <p:ext uri="{BB962C8B-B14F-4D97-AF65-F5344CB8AC3E}">
+        <p14:creationId xmlns:p14="http://schemas.microsoft.com/office/powerpoint/2010/main" val="3738567225"/>
+      </p:ext>
+    </p:extLst>
+  </p:cSld>
+  <p:clrMapOvr>
+    <a:masterClrMapping/>
+  </p:clrMapOvr>
+</p:sld>
+</file>
+
+<file path=ppt/slides/slide21.xml><?xml version="1.0" encoding="utf-8"?>
+<p:sld xmlns:a="http://schemas.openxmlformats.org/drawingml/2006/main" xmlns:r="http://schemas.openxmlformats.org/officeDocument/2006/relationships" xmlns:p="http://schemas.openxmlformats.org/presentationml/2006/main">
+  <p:cSld>
+    <p:bg>
+      <p:bgPr>
+        <a:solidFill>
+          <a:schemeClr val="bg1"/>
+        </a:solidFill>
+        <a:effectLst/>
+      </p:bgPr>
+    </p:bg>
+    <p:spTree>
+      <p:nvGrpSpPr>
+        <p:cNvPr id="1" name="">
+          <a:extLst>
+            <a:ext uri="{FF2B5EF4-FFF2-40B4-BE49-F238E27FC236}">
+              <a16:creationId xmlns:a16="http://schemas.microsoft.com/office/drawing/2014/main" id="{4A5B1D89-2DE6-577C-E833-406F56545A85}"/>
+            </a:ext>
+          </a:extLst>
+        </p:cNvPr>
+        <p:cNvGrpSpPr/>
+        <p:nvPr/>
+      </p:nvGrpSpPr>
+      <p:grpSpPr>
+        <a:xfrm>
+          <a:off x="0" y="0"/>
+          <a:ext cx="0" cy="0"/>
+          <a:chOff x="0" y="0"/>
+          <a:chExt cx="0" cy="0"/>
+        </a:xfrm>
+      </p:grpSpPr>
+      <p:sp>
+        <p:nvSpPr>
+          <p:cNvPr id="8" name="Rectangle 7">
+            <a:extLst>
+              <a:ext uri="{FF2B5EF4-FFF2-40B4-BE49-F238E27FC236}">
+                <a16:creationId xmlns:a16="http://schemas.microsoft.com/office/drawing/2014/main" id="{D98AF6B2-23F0-526D-D40A-9E18D26E0FD7}"/>
+              </a:ext>
+              <a:ext uri="{C183D7F6-B498-43B3-948B-1728B52AA6E4}">
+                <adec:decorative xmlns:adec="http://schemas.microsoft.com/office/drawing/2017/decorative" val="1"/>
+              </a:ext>
+            </a:extLst>
+          </p:cNvPr>
+          <p:cNvSpPr>
+            <a:spLocks noGrp="1" noRot="1" noChangeAspect="1" noMove="1" noResize="1" noEditPoints="1" noAdjustHandles="1" noChangeArrowheads="1" noChangeShapeType="1" noTextEdit="1"/>
+          </p:cNvSpPr>
+          <p:nvPr>
+            <p:extLst>
+              <p:ext uri="{386F3935-93C4-4BCD-93E2-E3B085C9AB24}">
+                <p16:designElem xmlns:p16="http://schemas.microsoft.com/office/powerpoint/2015/main" val="1"/>
+              </p:ext>
+            </p:extLst>
+          </p:nvPr>
+        </p:nvSpPr>
+        <p:spPr>
+          <a:xfrm>
+            <a:off x="0" y="0"/>
+            <a:ext cx="12192000" cy="6858000"/>
+          </a:xfrm>
+          <a:prstGeom prst="rect">
+            <a:avLst/>
+          </a:prstGeom>
+          <a:solidFill>
+            <a:schemeClr val="tx1">
+              <a:lumMod val="95000"/>
+              <a:lumOff val="5000"/>
+            </a:schemeClr>
+          </a:solidFill>
+          <a:ln>
+            <a:noFill/>
+          </a:ln>
+        </p:spPr>
+        <p:style>
+          <a:lnRef idx="2">
+            <a:schemeClr val="accent1">
+              <a:shade val="50000"/>
+            </a:schemeClr>
+          </a:lnRef>
+          <a:fillRef idx="1">
+            <a:schemeClr val="accent1"/>
+          </a:fillRef>
+          <a:effectRef idx="0">
+            <a:schemeClr val="accent1"/>
+          </a:effectRef>
+          <a:fontRef idx="minor">
+            <a:schemeClr val="lt1"/>
+          </a:fontRef>
+        </p:style>
+        <p:txBody>
+          <a:bodyPr rtlCol="0" anchor="ctr"/>
+          <a:lstStyle/>
+          <a:p>
+            <a:pPr algn="ctr"/>
+            <a:endParaRPr lang="en-US" dirty="0">
+              <a:solidFill>
+                <a:schemeClr val="tx1"/>
+              </a:solidFill>
+            </a:endParaRPr>
+          </a:p>
+        </p:txBody>
+      </p:sp>
+      <p:sp>
+        <p:nvSpPr>
+          <p:cNvPr id="2" name="Title 1">
+            <a:extLst>
+              <a:ext uri="{FF2B5EF4-FFF2-40B4-BE49-F238E27FC236}">
+                <a16:creationId xmlns:a16="http://schemas.microsoft.com/office/drawing/2014/main" id="{1D006A73-C446-C1D9-B110-C8DAE6B7BD4D}"/>
+              </a:ext>
+            </a:extLst>
+          </p:cNvPr>
+          <p:cNvSpPr>
+            <a:spLocks noGrp="1"/>
+          </p:cNvSpPr>
+          <p:nvPr>
+            <p:ph type="title"/>
+          </p:nvPr>
+        </p:nvSpPr>
+        <p:spPr>
+          <a:xfrm>
+            <a:off x="320339" y="115193"/>
+            <a:ext cx="6054213" cy="990017"/>
+          </a:xfrm>
+        </p:spPr>
+        <p:txBody>
+          <a:bodyPr anchor="b">
+            <a:normAutofit/>
+          </a:bodyPr>
+          <a:lstStyle/>
+          <a:p>
+            <a:pPr algn="r"/>
+            <a:r>
+              <a:rPr lang="en-US" dirty="0">
+                <a:solidFill>
+                  <a:schemeClr val="bg1"/>
+                </a:solidFill>
+              </a:rPr>
+              <a:t>ROC Curve (-10dB SNR)</a:t>
+            </a:r>
+          </a:p>
+        </p:txBody>
+      </p:sp>
+      <p:cxnSp>
+        <p:nvCxnSpPr>
+          <p:cNvPr id="10" name="Straight Connector 9">
+            <a:extLst>
+              <a:ext uri="{FF2B5EF4-FFF2-40B4-BE49-F238E27FC236}">
+                <a16:creationId xmlns:a16="http://schemas.microsoft.com/office/drawing/2014/main" id="{E008131D-922A-B6E6-08D6-1FC60CF9B2DE}"/>
+              </a:ext>
+              <a:ext uri="{C183D7F6-B498-43B3-948B-1728B52AA6E4}">
+                <adec:decorative xmlns:adec="http://schemas.microsoft.com/office/drawing/2017/decorative" val="1"/>
+              </a:ext>
+            </a:extLst>
+          </p:cNvPr>
+          <p:cNvCxnSpPr>
+            <a:cxnSpLocks noGrp="1" noRot="1" noChangeAspect="1" noMove="1" noResize="1" noEditPoints="1" noAdjustHandles="1" noChangeArrowheads="1" noChangeShapeType="1"/>
+          </p:cNvCxnSpPr>
+          <p:nvPr>
+            <p:extLst>
+              <p:ext uri="{386F3935-93C4-4BCD-93E2-E3B085C9AB24}">
+                <p16:designElem xmlns:p16="http://schemas.microsoft.com/office/powerpoint/2015/main" val="1"/>
+              </p:ext>
+            </p:extLst>
+          </p:nvPr>
+        </p:nvCxnSpPr>
+        <p:spPr>
+          <a:xfrm flipH="1">
+            <a:off x="126210" y="2026340"/>
+            <a:ext cx="5220936" cy="0"/>
+          </a:xfrm>
+          <a:prstGeom prst="line">
+            <a:avLst/>
+          </a:prstGeom>
+          <a:ln w="12700">
+            <a:solidFill>
+              <a:schemeClr val="accent2"/>
+            </a:solidFill>
+          </a:ln>
+        </p:spPr>
+        <p:style>
+          <a:lnRef idx="1">
+            <a:schemeClr val="accent1"/>
+          </a:lnRef>
+          <a:fillRef idx="0">
+            <a:schemeClr val="accent1"/>
+          </a:fillRef>
+          <a:effectRef idx="0">
+            <a:schemeClr val="accent1"/>
+          </a:effectRef>
+          <a:fontRef idx="minor">
+            <a:schemeClr val="tx1"/>
+          </a:fontRef>
+        </p:style>
+      </p:cxnSp>
+      <p:sp>
+        <p:nvSpPr>
+          <p:cNvPr id="12" name="Rectangle 11">
+            <a:extLst>
+              <a:ext uri="{FF2B5EF4-FFF2-40B4-BE49-F238E27FC236}">
+                <a16:creationId xmlns:a16="http://schemas.microsoft.com/office/drawing/2014/main" id="{DCB4DA13-8C09-7CFA-BF57-6A7CEA3E6FF8}"/>
+              </a:ext>
+              <a:ext uri="{C183D7F6-B498-43B3-948B-1728B52AA6E4}">
+                <adec:decorative xmlns:adec="http://schemas.microsoft.com/office/drawing/2017/decorative" val="1"/>
+              </a:ext>
+            </a:extLst>
+          </p:cNvPr>
+          <p:cNvSpPr>
+            <a:spLocks noGrp="1" noRot="1" noChangeAspect="1" noMove="1" noResize="1" noEditPoints="1" noAdjustHandles="1" noChangeArrowheads="1" noChangeShapeType="1" noTextEdit="1"/>
+          </p:cNvSpPr>
+          <p:nvPr>
+            <p:extLst>
+              <p:ext uri="{386F3935-93C4-4BCD-93E2-E3B085C9AB24}">
+                <p16:designElem xmlns:p16="http://schemas.microsoft.com/office/powerpoint/2015/main" val="1"/>
+              </p:ext>
+            </p:extLst>
+          </p:nvPr>
+        </p:nvSpPr>
+        <p:spPr>
+          <a:xfrm>
+            <a:off x="126206" y="115193"/>
+            <a:ext cx="11939588" cy="6627614"/>
+          </a:xfrm>
+          <a:prstGeom prst="rect">
+            <a:avLst/>
+          </a:prstGeom>
+          <a:noFill/>
+          <a:ln w="12700">
+            <a:solidFill>
+              <a:schemeClr val="accent2"/>
+            </a:solidFill>
+          </a:ln>
+        </p:spPr>
+        <p:style>
+          <a:lnRef idx="2">
+            <a:schemeClr val="accent1">
+              <a:shade val="50000"/>
+            </a:schemeClr>
+          </a:lnRef>
+          <a:fillRef idx="1">
+            <a:schemeClr val="accent1"/>
+          </a:fillRef>
+          <a:effectRef idx="0">
+            <a:schemeClr val="accent1"/>
+          </a:effectRef>
+          <a:fontRef idx="minor">
+            <a:schemeClr val="lt1"/>
+          </a:fontRef>
+        </p:style>
+        <p:txBody>
+          <a:bodyPr rtlCol="0" anchor="ctr"/>
+          <a:lstStyle/>
+          <a:p>
+            <a:pPr algn="ctr"/>
+            <a:endParaRPr lang="en-US"/>
+          </a:p>
+        </p:txBody>
+      </p:sp>
+      <p:sp>
+        <p:nvSpPr>
+          <p:cNvPr id="20" name="Content Placeholder 2">
+            <a:extLst>
+              <a:ext uri="{FF2B5EF4-FFF2-40B4-BE49-F238E27FC236}">
+                <a16:creationId xmlns:a16="http://schemas.microsoft.com/office/drawing/2014/main" id="{0B2C8362-38B8-7510-CDCB-5A32A2800FFF}"/>
+              </a:ext>
+            </a:extLst>
+          </p:cNvPr>
+          <p:cNvSpPr txBox="1">
+            <a:spLocks/>
+          </p:cNvSpPr>
+          <p:nvPr/>
+        </p:nvSpPr>
+        <p:spPr>
+          <a:xfrm>
+            <a:off x="176582" y="2339862"/>
+            <a:ext cx="6341728" cy="4107656"/>
+          </a:xfrm>
+          <a:prstGeom prst="rect">
+            <a:avLst/>
+          </a:prstGeom>
+        </p:spPr>
+        <p:txBody>
+          <a:bodyPr vert="horz" lIns="91440" tIns="45720" rIns="91440" bIns="45720" rtlCol="0">
+            <a:normAutofit/>
+          </a:bodyPr>
+          <a:lstStyle>
+            <a:lvl1pPr marL="228600" indent="-228600" algn="l" defTabSz="914400" rtl="0" eaLnBrk="1" latinLnBrk="0" hangingPunct="1">
+              <a:lnSpc>
+                <a:spcPct val="90000"/>
+              </a:lnSpc>
+              <a:spcBef>
+                <a:spcPts val="1000"/>
+              </a:spcBef>
+              <a:buFont typeface="Arial" panose="020B0604020202020204" pitchFamily="34" charset="0"/>
+              <a:buChar char="•"/>
+              <a:defRPr sz="2800" kern="1200">
+                <a:solidFill>
+                  <a:schemeClr val="tx1"/>
+                </a:solidFill>
+                <a:latin typeface="+mn-lt"/>
+                <a:ea typeface="+mn-ea"/>
+                <a:cs typeface="+mn-cs"/>
+              </a:defRPr>
+            </a:lvl1pPr>
+            <a:lvl2pPr marL="685800" indent="-228600" algn="l" defTabSz="914400" rtl="0" eaLnBrk="1" latinLnBrk="0" hangingPunct="1">
+              <a:lnSpc>
+                <a:spcPct val="90000"/>
+              </a:lnSpc>
+              <a:spcBef>
+                <a:spcPts val="500"/>
+              </a:spcBef>
+              <a:buFont typeface="Arial" panose="020B0604020202020204" pitchFamily="34" charset="0"/>
+              <a:buChar char="•"/>
+              <a:defRPr sz="2400" kern="1200">
+                <a:solidFill>
+                  <a:schemeClr val="tx1"/>
+                </a:solidFill>
+                <a:latin typeface="+mn-lt"/>
+                <a:ea typeface="+mn-ea"/>
+                <a:cs typeface="+mn-cs"/>
+              </a:defRPr>
+            </a:lvl2pPr>
+            <a:lvl3pPr marL="1143000" indent="-228600" algn="l" defTabSz="914400" rtl="0" eaLnBrk="1" latinLnBrk="0" hangingPunct="1">
+              <a:lnSpc>
+                <a:spcPct val="90000"/>
+              </a:lnSpc>
+              <a:spcBef>
+                <a:spcPts val="500"/>
+              </a:spcBef>
+              <a:buFont typeface="Arial" panose="020B0604020202020204" pitchFamily="34" charset="0"/>
+              <a:buChar char="•"/>
+              <a:defRPr sz="2000" kern="1200">
+                <a:solidFill>
+                  <a:schemeClr val="tx1"/>
+                </a:solidFill>
+                <a:latin typeface="+mn-lt"/>
+                <a:ea typeface="+mn-ea"/>
+                <a:cs typeface="+mn-cs"/>
+              </a:defRPr>
+            </a:lvl3pPr>
+            <a:lvl4pPr marL="1600200" indent="-228600" algn="l" defTabSz="914400" rtl="0" eaLnBrk="1" latinLnBrk="0" hangingPunct="1">
+              <a:lnSpc>
+                <a:spcPct val="90000"/>
+              </a:lnSpc>
+              <a:spcBef>
+                <a:spcPts val="500"/>
+              </a:spcBef>
+              <a:buFont typeface="Arial" panose="020B0604020202020204" pitchFamily="34" charset="0"/>
+              <a:buChar char="•"/>
+              <a:defRPr sz="1800" kern="1200">
+                <a:solidFill>
+                  <a:schemeClr val="tx1"/>
+                </a:solidFill>
+                <a:latin typeface="+mn-lt"/>
+                <a:ea typeface="+mn-ea"/>
+                <a:cs typeface="+mn-cs"/>
+              </a:defRPr>
+            </a:lvl4pPr>
+            <a:lvl5pPr marL="2057400" indent="-228600" algn="l" defTabSz="914400" rtl="0" eaLnBrk="1" latinLnBrk="0" hangingPunct="1">
+              <a:lnSpc>
+                <a:spcPct val="90000"/>
+              </a:lnSpc>
+              <a:spcBef>
+                <a:spcPts val="500"/>
+              </a:spcBef>
+              <a:buFont typeface="Arial" panose="020B0604020202020204" pitchFamily="34" charset="0"/>
+              <a:buChar char="•"/>
+              <a:defRPr sz="1800" kern="1200">
+                <a:solidFill>
+                  <a:schemeClr val="tx1"/>
+                </a:solidFill>
+                <a:latin typeface="+mn-lt"/>
+                <a:ea typeface="+mn-ea"/>
+                <a:cs typeface="+mn-cs"/>
+              </a:defRPr>
+            </a:lvl5pPr>
+            <a:lvl6pPr marL="2514600" indent="-228600" algn="l" defTabSz="914400" rtl="0" eaLnBrk="1" latinLnBrk="0" hangingPunct="1">
+              <a:lnSpc>
+                <a:spcPct val="90000"/>
+              </a:lnSpc>
+              <a:spcBef>
+                <a:spcPts val="500"/>
+              </a:spcBef>
+              <a:buFont typeface="Arial" panose="020B0604020202020204" pitchFamily="34" charset="0"/>
+              <a:buChar char="•"/>
+              <a:defRPr sz="1800" kern="1200">
+                <a:solidFill>
+                  <a:schemeClr val="tx1"/>
+                </a:solidFill>
+                <a:latin typeface="+mn-lt"/>
+                <a:ea typeface="+mn-ea"/>
+                <a:cs typeface="+mn-cs"/>
+              </a:defRPr>
+            </a:lvl6pPr>
+            <a:lvl7pPr marL="2971800" indent="-228600" algn="l" defTabSz="914400" rtl="0" eaLnBrk="1" latinLnBrk="0" hangingPunct="1">
+              <a:lnSpc>
+                <a:spcPct val="90000"/>
+              </a:lnSpc>
+              <a:spcBef>
+                <a:spcPts val="500"/>
+              </a:spcBef>
+              <a:buFont typeface="Arial" panose="020B0604020202020204" pitchFamily="34" charset="0"/>
+              <a:buChar char="•"/>
+              <a:defRPr sz="1800" kern="1200">
+                <a:solidFill>
+                  <a:schemeClr val="tx1"/>
+                </a:solidFill>
+                <a:latin typeface="+mn-lt"/>
+                <a:ea typeface="+mn-ea"/>
+                <a:cs typeface="+mn-cs"/>
+              </a:defRPr>
+            </a:lvl7pPr>
+            <a:lvl8pPr marL="3429000" indent="-228600" algn="l" defTabSz="914400" rtl="0" eaLnBrk="1" latinLnBrk="0" hangingPunct="1">
+              <a:lnSpc>
+                <a:spcPct val="90000"/>
+              </a:lnSpc>
+              <a:spcBef>
+                <a:spcPts val="500"/>
+              </a:spcBef>
+              <a:buFont typeface="Arial" panose="020B0604020202020204" pitchFamily="34" charset="0"/>
+              <a:buChar char="•"/>
+              <a:defRPr sz="1800" kern="1200">
+                <a:solidFill>
+                  <a:schemeClr val="tx1"/>
+                </a:solidFill>
+                <a:latin typeface="+mn-lt"/>
+                <a:ea typeface="+mn-ea"/>
+                <a:cs typeface="+mn-cs"/>
+              </a:defRPr>
+            </a:lvl8pPr>
+            <a:lvl9pPr marL="3886200" indent="-228600" algn="l" defTabSz="914400" rtl="0" eaLnBrk="1" latinLnBrk="0" hangingPunct="1">
+              <a:lnSpc>
+                <a:spcPct val="90000"/>
+              </a:lnSpc>
+              <a:spcBef>
+                <a:spcPts val="500"/>
+              </a:spcBef>
+              <a:buFont typeface="Arial" panose="020B0604020202020204" pitchFamily="34" charset="0"/>
+              <a:buChar char="•"/>
+              <a:defRPr sz="1800" kern="1200">
+                <a:solidFill>
+                  <a:schemeClr val="tx1"/>
+                </a:solidFill>
+                <a:latin typeface="+mn-lt"/>
+                <a:ea typeface="+mn-ea"/>
+                <a:cs typeface="+mn-cs"/>
+              </a:defRPr>
+            </a:lvl9pPr>
+          </a:lstStyle>
+          <a:p>
+            <a:pPr lvl="1">
+              <a:lnSpc>
+                <a:spcPct val="100000"/>
+              </a:lnSpc>
+            </a:pPr>
+            <a:endParaRPr lang="en-US" sz="1800" dirty="0">
+              <a:solidFill>
+                <a:schemeClr val="bg1"/>
+              </a:solidFill>
+            </a:endParaRPr>
+          </a:p>
+          <a:p>
+            <a:pPr marL="457200" lvl="1" indent="0">
+              <a:buFont typeface="Arial" panose="020B0604020202020204" pitchFamily="34" charset="0"/>
+              <a:buNone/>
+            </a:pPr>
+            <a:endParaRPr lang="en-US" sz="2000" dirty="0">
+              <a:solidFill>
+                <a:schemeClr val="bg1"/>
+              </a:solidFill>
+            </a:endParaRPr>
+          </a:p>
+        </p:txBody>
+      </p:sp>
+      <p:pic>
+        <p:nvPicPr>
+          <p:cNvPr id="4" name="Picture 3">
+            <a:extLst>
+              <a:ext uri="{FF2B5EF4-FFF2-40B4-BE49-F238E27FC236}">
+                <a16:creationId xmlns:a16="http://schemas.microsoft.com/office/drawing/2014/main" id="{03DB2C6C-95F0-1E89-D75A-AFEF67AB7B4C}"/>
+              </a:ext>
+            </a:extLst>
+          </p:cNvPr>
+          <p:cNvPicPr>
+            <a:picLocks noChangeAspect="1"/>
+          </p:cNvPicPr>
+          <p:nvPr/>
+        </p:nvPicPr>
+        <p:blipFill>
+          <a:blip r:embed="rId2">
+            <a:extLst>
+              <a:ext uri="{28A0092B-C50C-407E-A947-70E740481C1C}">
+                <a14:useLocalDpi xmlns:a14="http://schemas.microsoft.com/office/drawing/2010/main" val="0"/>
+              </a:ext>
+            </a:extLst>
+          </a:blip>
+          <a:stretch>
+            <a:fillRect/>
+          </a:stretch>
+        </p:blipFill>
+        <p:spPr>
+          <a:xfrm>
+            <a:off x="1772950" y="1220403"/>
+            <a:ext cx="8874730" cy="5343866"/>
+          </a:xfrm>
+          <a:prstGeom prst="rect">
+            <a:avLst/>
+          </a:prstGeom>
+        </p:spPr>
+      </p:pic>
+      <p:cxnSp>
+        <p:nvCxnSpPr>
+          <p:cNvPr id="6" name="Straight Connector 5">
+            <a:extLst>
+              <a:ext uri="{FF2B5EF4-FFF2-40B4-BE49-F238E27FC236}">
+                <a16:creationId xmlns:a16="http://schemas.microsoft.com/office/drawing/2014/main" id="{09F4C042-5C07-FE40-8738-C765FFE7DA2E}"/>
+              </a:ext>
+            </a:extLst>
+          </p:cNvPr>
+          <p:cNvCxnSpPr>
+            <a:cxnSpLocks/>
+          </p:cNvCxnSpPr>
+          <p:nvPr/>
+        </p:nvCxnSpPr>
+        <p:spPr>
+          <a:xfrm>
+            <a:off x="2950464" y="2267712"/>
+            <a:ext cx="961136" cy="0"/>
+          </a:xfrm>
+          <a:prstGeom prst="line">
+            <a:avLst/>
+          </a:prstGeom>
+          <a:ln>
+            <a:solidFill>
+              <a:srgbClr val="FF0000"/>
+            </a:solidFill>
+          </a:ln>
+        </p:spPr>
+        <p:style>
+          <a:lnRef idx="2">
+            <a:schemeClr val="accent1"/>
+          </a:lnRef>
+          <a:fillRef idx="0">
+            <a:schemeClr val="accent1"/>
+          </a:fillRef>
+          <a:effectRef idx="1">
+            <a:schemeClr val="accent1"/>
+          </a:effectRef>
+          <a:fontRef idx="minor">
+            <a:schemeClr val="tx1"/>
+          </a:fontRef>
+        </p:style>
+      </p:cxnSp>
+      <p:cxnSp>
+        <p:nvCxnSpPr>
+          <p:cNvPr id="11" name="Straight Connector 10">
+            <a:extLst>
+              <a:ext uri="{FF2B5EF4-FFF2-40B4-BE49-F238E27FC236}">
+                <a16:creationId xmlns:a16="http://schemas.microsoft.com/office/drawing/2014/main" id="{EB462DA8-3D41-7A1E-4EC6-AD3BCC0C252C}"/>
+              </a:ext>
+            </a:extLst>
+          </p:cNvPr>
+          <p:cNvCxnSpPr>
+            <a:cxnSpLocks/>
+          </p:cNvCxnSpPr>
+          <p:nvPr/>
+        </p:nvCxnSpPr>
+        <p:spPr>
+          <a:xfrm>
+            <a:off x="3911600" y="2267712"/>
+            <a:ext cx="0" cy="3631643"/>
+          </a:xfrm>
+          <a:prstGeom prst="line">
+            <a:avLst/>
+          </a:prstGeom>
+          <a:ln>
+            <a:solidFill>
+              <a:srgbClr val="FF0000"/>
+            </a:solidFill>
+          </a:ln>
+        </p:spPr>
+        <p:style>
+          <a:lnRef idx="2">
+            <a:schemeClr val="accent1"/>
+          </a:lnRef>
+          <a:fillRef idx="0">
+            <a:schemeClr val="accent1"/>
+          </a:fillRef>
+          <a:effectRef idx="1">
+            <a:schemeClr val="accent1"/>
+          </a:effectRef>
+          <a:fontRef idx="minor">
+            <a:schemeClr val="tx1"/>
+          </a:fontRef>
+        </p:style>
+      </p:cxnSp>
+    </p:spTree>
+    <p:extLst>
+      <p:ext uri="{BB962C8B-B14F-4D97-AF65-F5344CB8AC3E}">
+        <p14:creationId xmlns:p14="http://schemas.microsoft.com/office/powerpoint/2010/main" val="301013694"/>
+      </p:ext>
+    </p:extLst>
+  </p:cSld>
+  <p:clrMapOvr>
+    <a:masterClrMapping/>
+  </p:clrMapOvr>
+</p:sld>
+</file>
+
+<file path=ppt/slides/slide22.xml><?xml version="1.0" encoding="utf-8"?>
+<p:sld xmlns:a="http://schemas.openxmlformats.org/drawingml/2006/main" xmlns:r="http://schemas.openxmlformats.org/officeDocument/2006/relationships" xmlns:p="http://schemas.openxmlformats.org/presentationml/2006/main">
+  <p:cSld>
+    <p:bg>
+      <p:bgPr>
+        <a:solidFill>
+          <a:schemeClr val="bg1"/>
+        </a:solidFill>
+        <a:effectLst/>
+      </p:bgPr>
+    </p:bg>
+    <p:spTree>
+      <p:nvGrpSpPr>
+        <p:cNvPr id="1" name="">
+          <a:extLst>
+            <a:ext uri="{FF2B5EF4-FFF2-40B4-BE49-F238E27FC236}">
+              <a16:creationId xmlns:a16="http://schemas.microsoft.com/office/drawing/2014/main" id="{20A59971-9206-512B-1D06-53C59ED6AEB6}"/>
+            </a:ext>
+          </a:extLst>
+        </p:cNvPr>
+        <p:cNvGrpSpPr/>
+        <p:nvPr/>
+      </p:nvGrpSpPr>
+      <p:grpSpPr>
+        <a:xfrm>
+          <a:off x="0" y="0"/>
+          <a:ext cx="0" cy="0"/>
+          <a:chOff x="0" y="0"/>
+          <a:chExt cx="0" cy="0"/>
+        </a:xfrm>
+      </p:grpSpPr>
+      <p:sp>
+        <p:nvSpPr>
+          <p:cNvPr id="8" name="Rectangle 7">
+            <a:extLst>
+              <a:ext uri="{FF2B5EF4-FFF2-40B4-BE49-F238E27FC236}">
+                <a16:creationId xmlns:a16="http://schemas.microsoft.com/office/drawing/2014/main" id="{E505220D-8C1D-FB53-3B92-0755CE53EEAA}"/>
+              </a:ext>
+              <a:ext uri="{C183D7F6-B498-43B3-948B-1728B52AA6E4}">
+                <adec:decorative xmlns:adec="http://schemas.microsoft.com/office/drawing/2017/decorative" val="1"/>
+              </a:ext>
+            </a:extLst>
+          </p:cNvPr>
+          <p:cNvSpPr>
+            <a:spLocks noGrp="1" noRot="1" noChangeAspect="1" noMove="1" noResize="1" noEditPoints="1" noAdjustHandles="1" noChangeArrowheads="1" noChangeShapeType="1" noTextEdit="1"/>
+          </p:cNvSpPr>
+          <p:nvPr>
+            <p:extLst>
+              <p:ext uri="{386F3935-93C4-4BCD-93E2-E3B085C9AB24}">
+                <p16:designElem xmlns:p16="http://schemas.microsoft.com/office/powerpoint/2015/main" val="1"/>
+              </p:ext>
+            </p:extLst>
+          </p:nvPr>
+        </p:nvSpPr>
+        <p:spPr>
+          <a:xfrm>
+            <a:off x="0" y="0"/>
+            <a:ext cx="12192000" cy="6858000"/>
+          </a:xfrm>
+          <a:prstGeom prst="rect">
+            <a:avLst/>
+          </a:prstGeom>
+          <a:solidFill>
+            <a:schemeClr val="tx1">
+              <a:lumMod val="95000"/>
+              <a:lumOff val="5000"/>
+            </a:schemeClr>
+          </a:solidFill>
+          <a:ln>
+            <a:noFill/>
+          </a:ln>
+        </p:spPr>
+        <p:style>
+          <a:lnRef idx="2">
+            <a:schemeClr val="accent1">
+              <a:shade val="50000"/>
+            </a:schemeClr>
+          </a:lnRef>
+          <a:fillRef idx="1">
+            <a:schemeClr val="accent1"/>
+          </a:fillRef>
+          <a:effectRef idx="0">
+            <a:schemeClr val="accent1"/>
+          </a:effectRef>
+          <a:fontRef idx="minor">
+            <a:schemeClr val="lt1"/>
+          </a:fontRef>
+        </p:style>
+        <p:txBody>
+          <a:bodyPr rtlCol="0" anchor="ctr"/>
+          <a:lstStyle/>
+          <a:p>
+            <a:pPr algn="ctr"/>
+            <a:endParaRPr lang="en-US" dirty="0">
+              <a:solidFill>
+                <a:schemeClr val="tx1"/>
+              </a:solidFill>
+            </a:endParaRPr>
+          </a:p>
+        </p:txBody>
+      </p:sp>
+      <p:sp>
+        <p:nvSpPr>
+          <p:cNvPr id="2" name="Title 1">
+            <a:extLst>
+              <a:ext uri="{FF2B5EF4-FFF2-40B4-BE49-F238E27FC236}">
+                <a16:creationId xmlns:a16="http://schemas.microsoft.com/office/drawing/2014/main" id="{38C57AE7-E6E4-34E7-D9B7-67D33488DBDD}"/>
+              </a:ext>
+            </a:extLst>
+          </p:cNvPr>
+          <p:cNvSpPr>
+            <a:spLocks noGrp="1"/>
+          </p:cNvSpPr>
+          <p:nvPr>
+            <p:ph type="title"/>
+          </p:nvPr>
+        </p:nvSpPr>
+        <p:spPr>
+          <a:xfrm>
+            <a:off x="320339" y="115193"/>
+            <a:ext cx="7015181" cy="990017"/>
+          </a:xfrm>
+        </p:spPr>
+        <p:txBody>
+          <a:bodyPr anchor="b">
+            <a:normAutofit fontScale="90000"/>
+          </a:bodyPr>
+          <a:lstStyle/>
+          <a:p>
+            <a:pPr algn="r"/>
+            <a:r>
+              <a:rPr lang="en-US" dirty="0">
+                <a:solidFill>
+                  <a:schemeClr val="bg1"/>
+                </a:solidFill>
+              </a:rPr>
+              <a:t>Slash Curve (Pd = .95, Pfa = .05)</a:t>
+            </a:r>
+          </a:p>
+        </p:txBody>
+      </p:sp>
+      <p:cxnSp>
+        <p:nvCxnSpPr>
+          <p:cNvPr id="10" name="Straight Connector 9">
+            <a:extLst>
+              <a:ext uri="{FF2B5EF4-FFF2-40B4-BE49-F238E27FC236}">
+                <a16:creationId xmlns:a16="http://schemas.microsoft.com/office/drawing/2014/main" id="{E823738D-0DB9-6D5D-FE64-A061C15ECD5E}"/>
+              </a:ext>
+              <a:ext uri="{C183D7F6-B498-43B3-948B-1728B52AA6E4}">
+                <adec:decorative xmlns:adec="http://schemas.microsoft.com/office/drawing/2017/decorative" val="1"/>
+              </a:ext>
+            </a:extLst>
+          </p:cNvPr>
+          <p:cNvCxnSpPr>
+            <a:cxnSpLocks noGrp="1" noRot="1" noChangeAspect="1" noMove="1" noResize="1" noEditPoints="1" noAdjustHandles="1" noChangeArrowheads="1" noChangeShapeType="1"/>
+          </p:cNvCxnSpPr>
+          <p:nvPr>
+            <p:extLst>
+              <p:ext uri="{386F3935-93C4-4BCD-93E2-E3B085C9AB24}">
+                <p16:designElem xmlns:p16="http://schemas.microsoft.com/office/powerpoint/2015/main" val="1"/>
+              </p:ext>
+            </p:extLst>
+          </p:nvPr>
+        </p:nvCxnSpPr>
+        <p:spPr>
+          <a:xfrm flipH="1">
+            <a:off x="126210" y="2026340"/>
+            <a:ext cx="5220936" cy="0"/>
+          </a:xfrm>
+          <a:prstGeom prst="line">
+            <a:avLst/>
+          </a:prstGeom>
+          <a:ln w="12700">
+            <a:solidFill>
+              <a:schemeClr val="accent2"/>
+            </a:solidFill>
+          </a:ln>
+        </p:spPr>
+        <p:style>
+          <a:lnRef idx="1">
+            <a:schemeClr val="accent1"/>
+          </a:lnRef>
+          <a:fillRef idx="0">
+            <a:schemeClr val="accent1"/>
+          </a:fillRef>
+          <a:effectRef idx="0">
+            <a:schemeClr val="accent1"/>
+          </a:effectRef>
+          <a:fontRef idx="minor">
+            <a:schemeClr val="tx1"/>
+          </a:fontRef>
+        </p:style>
+      </p:cxnSp>
+      <p:sp>
+        <p:nvSpPr>
+          <p:cNvPr id="12" name="Rectangle 11">
+            <a:extLst>
+              <a:ext uri="{FF2B5EF4-FFF2-40B4-BE49-F238E27FC236}">
+                <a16:creationId xmlns:a16="http://schemas.microsoft.com/office/drawing/2014/main" id="{10F26BAA-C8E8-5E7F-AF77-78EB407AB621}"/>
+              </a:ext>
+              <a:ext uri="{C183D7F6-B498-43B3-948B-1728B52AA6E4}">
+                <adec:decorative xmlns:adec="http://schemas.microsoft.com/office/drawing/2017/decorative" val="1"/>
+              </a:ext>
+            </a:extLst>
+          </p:cNvPr>
+          <p:cNvSpPr>
+            <a:spLocks noGrp="1" noRot="1" noChangeAspect="1" noMove="1" noResize="1" noEditPoints="1" noAdjustHandles="1" noChangeArrowheads="1" noChangeShapeType="1" noTextEdit="1"/>
+          </p:cNvSpPr>
+          <p:nvPr>
+            <p:extLst>
+              <p:ext uri="{386F3935-93C4-4BCD-93E2-E3B085C9AB24}">
+                <p16:designElem xmlns:p16="http://schemas.microsoft.com/office/powerpoint/2015/main" val="1"/>
+              </p:ext>
+            </p:extLst>
+          </p:nvPr>
+        </p:nvSpPr>
+        <p:spPr>
+          <a:xfrm>
+            <a:off x="126206" y="115193"/>
+            <a:ext cx="11939588" cy="6627614"/>
+          </a:xfrm>
+          <a:prstGeom prst="rect">
+            <a:avLst/>
+          </a:prstGeom>
+          <a:noFill/>
+          <a:ln w="12700">
+            <a:solidFill>
+              <a:schemeClr val="accent2"/>
+            </a:solidFill>
+          </a:ln>
+        </p:spPr>
+        <p:style>
+          <a:lnRef idx="2">
+            <a:schemeClr val="accent1">
+              <a:shade val="50000"/>
+            </a:schemeClr>
+          </a:lnRef>
+          <a:fillRef idx="1">
+            <a:schemeClr val="accent1"/>
+          </a:fillRef>
+          <a:effectRef idx="0">
+            <a:schemeClr val="accent1"/>
+          </a:effectRef>
+          <a:fontRef idx="minor">
+            <a:schemeClr val="lt1"/>
+          </a:fontRef>
+        </p:style>
+        <p:txBody>
+          <a:bodyPr rtlCol="0" anchor="ctr"/>
+          <a:lstStyle/>
+          <a:p>
+            <a:pPr algn="ctr"/>
+            <a:endParaRPr lang="en-US"/>
+          </a:p>
+        </p:txBody>
+      </p:sp>
+      <p:sp>
+        <p:nvSpPr>
+          <p:cNvPr id="20" name="Content Placeholder 2">
+            <a:extLst>
+              <a:ext uri="{FF2B5EF4-FFF2-40B4-BE49-F238E27FC236}">
+                <a16:creationId xmlns:a16="http://schemas.microsoft.com/office/drawing/2014/main" id="{2CD1F7B5-81A4-D448-B360-54F00616064C}"/>
+              </a:ext>
+            </a:extLst>
+          </p:cNvPr>
+          <p:cNvSpPr txBox="1">
+            <a:spLocks/>
+          </p:cNvSpPr>
+          <p:nvPr/>
+        </p:nvSpPr>
+        <p:spPr>
+          <a:xfrm>
+            <a:off x="176582" y="2339862"/>
+            <a:ext cx="6341728" cy="4107656"/>
+          </a:xfrm>
+          <a:prstGeom prst="rect">
+            <a:avLst/>
+          </a:prstGeom>
+        </p:spPr>
+        <p:txBody>
+          <a:bodyPr vert="horz" lIns="91440" tIns="45720" rIns="91440" bIns="45720" rtlCol="0">
+            <a:normAutofit/>
+          </a:bodyPr>
+          <a:lstStyle>
+            <a:lvl1pPr marL="228600" indent="-228600" algn="l" defTabSz="914400" rtl="0" eaLnBrk="1" latinLnBrk="0" hangingPunct="1">
+              <a:lnSpc>
+                <a:spcPct val="90000"/>
+              </a:lnSpc>
+              <a:spcBef>
+                <a:spcPts val="1000"/>
+              </a:spcBef>
+              <a:buFont typeface="Arial" panose="020B0604020202020204" pitchFamily="34" charset="0"/>
+              <a:buChar char="•"/>
+              <a:defRPr sz="2800" kern="1200">
+                <a:solidFill>
+                  <a:schemeClr val="tx1"/>
+                </a:solidFill>
+                <a:latin typeface="+mn-lt"/>
+                <a:ea typeface="+mn-ea"/>
+                <a:cs typeface="+mn-cs"/>
+              </a:defRPr>
+            </a:lvl1pPr>
+            <a:lvl2pPr marL="685800" indent="-228600" algn="l" defTabSz="914400" rtl="0" eaLnBrk="1" latinLnBrk="0" hangingPunct="1">
+              <a:lnSpc>
+                <a:spcPct val="90000"/>
+              </a:lnSpc>
+              <a:spcBef>
+                <a:spcPts val="500"/>
+              </a:spcBef>
+              <a:buFont typeface="Arial" panose="020B0604020202020204" pitchFamily="34" charset="0"/>
+              <a:buChar char="•"/>
+              <a:defRPr sz="2400" kern="1200">
+                <a:solidFill>
+                  <a:schemeClr val="tx1"/>
+                </a:solidFill>
+                <a:latin typeface="+mn-lt"/>
+                <a:ea typeface="+mn-ea"/>
+                <a:cs typeface="+mn-cs"/>
+              </a:defRPr>
+            </a:lvl2pPr>
+            <a:lvl3pPr marL="1143000" indent="-228600" algn="l" defTabSz="914400" rtl="0" eaLnBrk="1" latinLnBrk="0" hangingPunct="1">
+              <a:lnSpc>
+                <a:spcPct val="90000"/>
+              </a:lnSpc>
+              <a:spcBef>
+                <a:spcPts val="500"/>
+              </a:spcBef>
+              <a:buFont typeface="Arial" panose="020B0604020202020204" pitchFamily="34" charset="0"/>
+              <a:buChar char="•"/>
+              <a:defRPr sz="2000" kern="1200">
+                <a:solidFill>
+                  <a:schemeClr val="tx1"/>
+                </a:solidFill>
+                <a:latin typeface="+mn-lt"/>
+                <a:ea typeface="+mn-ea"/>
+                <a:cs typeface="+mn-cs"/>
+              </a:defRPr>
+            </a:lvl3pPr>
+            <a:lvl4pPr marL="1600200" indent="-228600" algn="l" defTabSz="914400" rtl="0" eaLnBrk="1" latinLnBrk="0" hangingPunct="1">
+              <a:lnSpc>
+                <a:spcPct val="90000"/>
+              </a:lnSpc>
+              <a:spcBef>
+                <a:spcPts val="500"/>
+              </a:spcBef>
+              <a:buFont typeface="Arial" panose="020B0604020202020204" pitchFamily="34" charset="0"/>
+              <a:buChar char="•"/>
+              <a:defRPr sz="1800" kern="1200">
+                <a:solidFill>
+                  <a:schemeClr val="tx1"/>
+                </a:solidFill>
+                <a:latin typeface="+mn-lt"/>
+                <a:ea typeface="+mn-ea"/>
+                <a:cs typeface="+mn-cs"/>
+              </a:defRPr>
+            </a:lvl4pPr>
+            <a:lvl5pPr marL="2057400" indent="-228600" algn="l" defTabSz="914400" rtl="0" eaLnBrk="1" latinLnBrk="0" hangingPunct="1">
+              <a:lnSpc>
+                <a:spcPct val="90000"/>
+              </a:lnSpc>
+              <a:spcBef>
+                <a:spcPts val="500"/>
+              </a:spcBef>
+              <a:buFont typeface="Arial" panose="020B0604020202020204" pitchFamily="34" charset="0"/>
+              <a:buChar char="•"/>
+              <a:defRPr sz="1800" kern="1200">
+                <a:solidFill>
+                  <a:schemeClr val="tx1"/>
+                </a:solidFill>
+                <a:latin typeface="+mn-lt"/>
+                <a:ea typeface="+mn-ea"/>
+                <a:cs typeface="+mn-cs"/>
+              </a:defRPr>
+            </a:lvl5pPr>
+            <a:lvl6pPr marL="2514600" indent="-228600" algn="l" defTabSz="914400" rtl="0" eaLnBrk="1" latinLnBrk="0" hangingPunct="1">
+              <a:lnSpc>
+                <a:spcPct val="90000"/>
+              </a:lnSpc>
+              <a:spcBef>
+                <a:spcPts val="500"/>
+              </a:spcBef>
+              <a:buFont typeface="Arial" panose="020B0604020202020204" pitchFamily="34" charset="0"/>
+              <a:buChar char="•"/>
+              <a:defRPr sz="1800" kern="1200">
+                <a:solidFill>
+                  <a:schemeClr val="tx1"/>
+                </a:solidFill>
+                <a:latin typeface="+mn-lt"/>
+                <a:ea typeface="+mn-ea"/>
+                <a:cs typeface="+mn-cs"/>
+              </a:defRPr>
+            </a:lvl6pPr>
+            <a:lvl7pPr marL="2971800" indent="-228600" algn="l" defTabSz="914400" rtl="0" eaLnBrk="1" latinLnBrk="0" hangingPunct="1">
+              <a:lnSpc>
+                <a:spcPct val="90000"/>
+              </a:lnSpc>
+              <a:spcBef>
+                <a:spcPts val="500"/>
+              </a:spcBef>
+              <a:buFont typeface="Arial" panose="020B0604020202020204" pitchFamily="34" charset="0"/>
+              <a:buChar char="•"/>
+              <a:defRPr sz="1800" kern="1200">
+                <a:solidFill>
+                  <a:schemeClr val="tx1"/>
+                </a:solidFill>
+                <a:latin typeface="+mn-lt"/>
+                <a:ea typeface="+mn-ea"/>
+                <a:cs typeface="+mn-cs"/>
+              </a:defRPr>
+            </a:lvl7pPr>
+            <a:lvl8pPr marL="3429000" indent="-228600" algn="l" defTabSz="914400" rtl="0" eaLnBrk="1" latinLnBrk="0" hangingPunct="1">
+              <a:lnSpc>
+                <a:spcPct val="90000"/>
+              </a:lnSpc>
+              <a:spcBef>
+                <a:spcPts val="500"/>
+              </a:spcBef>
+              <a:buFont typeface="Arial" panose="020B0604020202020204" pitchFamily="34" charset="0"/>
+              <a:buChar char="•"/>
+              <a:defRPr sz="1800" kern="1200">
+                <a:solidFill>
+                  <a:schemeClr val="tx1"/>
+                </a:solidFill>
+                <a:latin typeface="+mn-lt"/>
+                <a:ea typeface="+mn-ea"/>
+                <a:cs typeface="+mn-cs"/>
+              </a:defRPr>
+            </a:lvl8pPr>
+            <a:lvl9pPr marL="3886200" indent="-228600" algn="l" defTabSz="914400" rtl="0" eaLnBrk="1" latinLnBrk="0" hangingPunct="1">
+              <a:lnSpc>
+                <a:spcPct val="90000"/>
+              </a:lnSpc>
+              <a:spcBef>
+                <a:spcPts val="500"/>
+              </a:spcBef>
+              <a:buFont typeface="Arial" panose="020B0604020202020204" pitchFamily="34" charset="0"/>
+              <a:buChar char="•"/>
+              <a:defRPr sz="1800" kern="1200">
+                <a:solidFill>
+                  <a:schemeClr val="tx1"/>
+                </a:solidFill>
+                <a:latin typeface="+mn-lt"/>
+                <a:ea typeface="+mn-ea"/>
+                <a:cs typeface="+mn-cs"/>
+              </a:defRPr>
+            </a:lvl9pPr>
+          </a:lstStyle>
+          <a:p>
+            <a:pPr lvl="1">
+              <a:lnSpc>
+                <a:spcPct val="100000"/>
+              </a:lnSpc>
+            </a:pPr>
+            <a:endParaRPr lang="en-US" sz="1800" dirty="0">
+              <a:solidFill>
+                <a:schemeClr val="bg1"/>
+              </a:solidFill>
+            </a:endParaRPr>
+          </a:p>
+          <a:p>
+            <a:pPr marL="457200" lvl="1" indent="0">
+              <a:buFont typeface="Arial" panose="020B0604020202020204" pitchFamily="34" charset="0"/>
+              <a:buNone/>
+            </a:pPr>
+            <a:endParaRPr lang="en-US" sz="2000" dirty="0">
+              <a:solidFill>
+                <a:schemeClr val="bg1"/>
+              </a:solidFill>
+            </a:endParaRPr>
+          </a:p>
+        </p:txBody>
+      </p:sp>
+      <p:pic>
+        <p:nvPicPr>
+          <p:cNvPr id="4" name="Picture 3">
+            <a:extLst>
+              <a:ext uri="{FF2B5EF4-FFF2-40B4-BE49-F238E27FC236}">
+                <a16:creationId xmlns:a16="http://schemas.microsoft.com/office/drawing/2014/main" id="{1D921FF2-4969-7299-CD8C-AA7C0E55C29F}"/>
+              </a:ext>
+            </a:extLst>
+          </p:cNvPr>
+          <p:cNvPicPr>
+            <a:picLocks noChangeAspect="1"/>
+          </p:cNvPicPr>
+          <p:nvPr/>
+        </p:nvPicPr>
+        <p:blipFill>
+          <a:blip r:embed="rId2">
+            <a:extLst>
+              <a:ext uri="{28A0092B-C50C-407E-A947-70E740481C1C}">
+                <a14:useLocalDpi xmlns:a14="http://schemas.microsoft.com/office/drawing/2010/main" val="0"/>
+              </a:ext>
+            </a:extLst>
+          </a:blip>
+          <a:stretch>
+            <a:fillRect/>
+          </a:stretch>
+        </p:blipFill>
+        <p:spPr>
+          <a:xfrm>
+            <a:off x="1624826" y="1220403"/>
+            <a:ext cx="8942347" cy="5384582"/>
+          </a:xfrm>
+          <a:prstGeom prst="rect">
+            <a:avLst/>
+          </a:prstGeom>
+        </p:spPr>
+      </p:pic>
+    </p:spTree>
+    <p:extLst>
+      <p:ext uri="{BB962C8B-B14F-4D97-AF65-F5344CB8AC3E}">
+        <p14:creationId xmlns:p14="http://schemas.microsoft.com/office/powerpoint/2010/main" val="918727068"/>
       </p:ext>
     </p:extLst>
   </p:cSld>

--- a/Capstone Mid-Quarter Update_Bryce Rooney.pptx
+++ b/Capstone Mid-Quarter Update_Bryce Rooney.pptx
@@ -4,6 +4,9 @@
   <p:sldMasterIdLst>
     <p:sldMasterId id="2147483648" r:id="rId1"/>
   </p:sldMasterIdLst>
+  <p:notesMasterIdLst>
+    <p:notesMasterId r:id="rId24"/>
+  </p:notesMasterIdLst>
   <p:sldIdLst>
     <p:sldId id="256" r:id="rId2"/>
     <p:sldId id="257" r:id="rId3"/>
@@ -347,6 +350,847 @@
 </pc:chgInfo>
 </file>
 
+<file path=ppt/notesMasters/notesMaster1.xml><?xml version="1.0" encoding="utf-8"?>
+<p:notesMaster xmlns:a="http://schemas.openxmlformats.org/drawingml/2006/main" xmlns:r="http://schemas.openxmlformats.org/officeDocument/2006/relationships" xmlns:p="http://schemas.openxmlformats.org/presentationml/2006/main">
+  <p:cSld>
+    <p:bg>
+      <p:bgRef idx="1001">
+        <a:schemeClr val="bg1"/>
+      </p:bgRef>
+    </p:bg>
+    <p:spTree>
+      <p:nvGrpSpPr>
+        <p:cNvPr id="1" name=""/>
+        <p:cNvGrpSpPr/>
+        <p:nvPr/>
+      </p:nvGrpSpPr>
+      <p:grpSpPr>
+        <a:xfrm>
+          <a:off x="0" y="0"/>
+          <a:ext cx="0" cy="0"/>
+          <a:chOff x="0" y="0"/>
+          <a:chExt cx="0" cy="0"/>
+        </a:xfrm>
+      </p:grpSpPr>
+      <p:sp>
+        <p:nvSpPr>
+          <p:cNvPr id="2" name="Header Placeholder 1"/>
+          <p:cNvSpPr>
+            <a:spLocks noGrp="1"/>
+          </p:cNvSpPr>
+          <p:nvPr>
+            <p:ph type="hdr" sz="quarter"/>
+          </p:nvPr>
+        </p:nvSpPr>
+        <p:spPr>
+          <a:xfrm>
+            <a:off x="0" y="0"/>
+            <a:ext cx="2971800" cy="458788"/>
+          </a:xfrm>
+          <a:prstGeom prst="rect">
+            <a:avLst/>
+          </a:prstGeom>
+        </p:spPr>
+        <p:txBody>
+          <a:bodyPr vert="horz" lIns="91440" tIns="45720" rIns="91440" bIns="45720" rtlCol="0"/>
+          <a:lstStyle>
+            <a:lvl1pPr algn="l">
+              <a:defRPr sz="1200"/>
+            </a:lvl1pPr>
+          </a:lstStyle>
+          <a:p>
+            <a:endParaRPr lang="en-US"/>
+          </a:p>
+        </p:txBody>
+      </p:sp>
+      <p:sp>
+        <p:nvSpPr>
+          <p:cNvPr id="3" name="Date Placeholder 2"/>
+          <p:cNvSpPr>
+            <a:spLocks noGrp="1"/>
+          </p:cNvSpPr>
+          <p:nvPr>
+            <p:ph type="dt" idx="1"/>
+          </p:nvPr>
+        </p:nvSpPr>
+        <p:spPr>
+          <a:xfrm>
+            <a:off x="3884613" y="0"/>
+            <a:ext cx="2971800" cy="458788"/>
+          </a:xfrm>
+          <a:prstGeom prst="rect">
+            <a:avLst/>
+          </a:prstGeom>
+        </p:spPr>
+        <p:txBody>
+          <a:bodyPr vert="horz" lIns="91440" tIns="45720" rIns="91440" bIns="45720" rtlCol="0"/>
+          <a:lstStyle>
+            <a:lvl1pPr algn="r">
+              <a:defRPr sz="1200"/>
+            </a:lvl1pPr>
+          </a:lstStyle>
+          <a:p>
+            <a:fld id="{3FC87381-5F87-4AAF-8B41-540099760EE8}" type="datetimeFigureOut">
+              <a:rPr lang="en-US" smtClean="0"/>
+              <a:t>5/8/2026</a:t>
+            </a:fld>
+            <a:endParaRPr lang="en-US"/>
+          </a:p>
+        </p:txBody>
+      </p:sp>
+      <p:sp>
+        <p:nvSpPr>
+          <p:cNvPr id="4" name="Slide Image Placeholder 3"/>
+          <p:cNvSpPr>
+            <a:spLocks noGrp="1" noRot="1" noChangeAspect="1"/>
+          </p:cNvSpPr>
+          <p:nvPr>
+            <p:ph type="sldImg" idx="2"/>
+          </p:nvPr>
+        </p:nvSpPr>
+        <p:spPr>
+          <a:xfrm>
+            <a:off x="685800" y="1143000"/>
+            <a:ext cx="5486400" cy="3086100"/>
+          </a:xfrm>
+          <a:prstGeom prst="rect">
+            <a:avLst/>
+          </a:prstGeom>
+          <a:noFill/>
+          <a:ln w="12700">
+            <a:solidFill>
+              <a:prstClr val="black"/>
+            </a:solidFill>
+          </a:ln>
+        </p:spPr>
+        <p:txBody>
+          <a:bodyPr vert="horz" lIns="91440" tIns="45720" rIns="91440" bIns="45720" rtlCol="0" anchor="ctr"/>
+          <a:lstStyle/>
+          <a:p>
+            <a:endParaRPr lang="en-US"/>
+          </a:p>
+        </p:txBody>
+      </p:sp>
+      <p:sp>
+        <p:nvSpPr>
+          <p:cNvPr id="5" name="Notes Placeholder 4"/>
+          <p:cNvSpPr>
+            <a:spLocks noGrp="1"/>
+          </p:cNvSpPr>
+          <p:nvPr>
+            <p:ph type="body" sz="quarter" idx="3"/>
+          </p:nvPr>
+        </p:nvSpPr>
+        <p:spPr>
+          <a:xfrm>
+            <a:off x="685800" y="4400550"/>
+            <a:ext cx="5486400" cy="3600450"/>
+          </a:xfrm>
+          <a:prstGeom prst="rect">
+            <a:avLst/>
+          </a:prstGeom>
+        </p:spPr>
+        <p:txBody>
+          <a:bodyPr vert="horz" lIns="91440" tIns="45720" rIns="91440" bIns="45720" rtlCol="0"/>
+          <a:lstStyle/>
+          <a:p>
+            <a:pPr lvl="0"/>
+            <a:r>
+              <a:rPr lang="en-US"/>
+              <a:t>Click to edit Master text styles</a:t>
+            </a:r>
+          </a:p>
+          <a:p>
+            <a:pPr lvl="1"/>
+            <a:r>
+              <a:rPr lang="en-US"/>
+              <a:t>Second level</a:t>
+            </a:r>
+          </a:p>
+          <a:p>
+            <a:pPr lvl="2"/>
+            <a:r>
+              <a:rPr lang="en-US"/>
+              <a:t>Third level</a:t>
+            </a:r>
+          </a:p>
+          <a:p>
+            <a:pPr lvl="3"/>
+            <a:r>
+              <a:rPr lang="en-US"/>
+              <a:t>Fourth level</a:t>
+            </a:r>
+          </a:p>
+          <a:p>
+            <a:pPr lvl="4"/>
+            <a:r>
+              <a:rPr lang="en-US"/>
+              <a:t>Fifth level</a:t>
+            </a:r>
+          </a:p>
+        </p:txBody>
+      </p:sp>
+      <p:sp>
+        <p:nvSpPr>
+          <p:cNvPr id="6" name="Footer Placeholder 5"/>
+          <p:cNvSpPr>
+            <a:spLocks noGrp="1"/>
+          </p:cNvSpPr>
+          <p:nvPr>
+            <p:ph type="ftr" sz="quarter" idx="4"/>
+          </p:nvPr>
+        </p:nvSpPr>
+        <p:spPr>
+          <a:xfrm>
+            <a:off x="0" y="8685213"/>
+            <a:ext cx="2971800" cy="458787"/>
+          </a:xfrm>
+          <a:prstGeom prst="rect">
+            <a:avLst/>
+          </a:prstGeom>
+        </p:spPr>
+        <p:txBody>
+          <a:bodyPr vert="horz" lIns="91440" tIns="45720" rIns="91440" bIns="45720" rtlCol="0" anchor="b"/>
+          <a:lstStyle>
+            <a:lvl1pPr algn="l">
+              <a:defRPr sz="1200"/>
+            </a:lvl1pPr>
+          </a:lstStyle>
+          <a:p>
+            <a:endParaRPr lang="en-US"/>
+          </a:p>
+        </p:txBody>
+      </p:sp>
+      <p:sp>
+        <p:nvSpPr>
+          <p:cNvPr id="7" name="Slide Number Placeholder 6"/>
+          <p:cNvSpPr>
+            <a:spLocks noGrp="1"/>
+          </p:cNvSpPr>
+          <p:nvPr>
+            <p:ph type="sldNum" sz="quarter" idx="5"/>
+          </p:nvPr>
+        </p:nvSpPr>
+        <p:spPr>
+          <a:xfrm>
+            <a:off x="3884613" y="8685213"/>
+            <a:ext cx="2971800" cy="458787"/>
+          </a:xfrm>
+          <a:prstGeom prst="rect">
+            <a:avLst/>
+          </a:prstGeom>
+        </p:spPr>
+        <p:txBody>
+          <a:bodyPr vert="horz" lIns="91440" tIns="45720" rIns="91440" bIns="45720" rtlCol="0" anchor="b"/>
+          <a:lstStyle>
+            <a:lvl1pPr algn="r">
+              <a:defRPr sz="1200"/>
+            </a:lvl1pPr>
+          </a:lstStyle>
+          <a:p>
+            <a:fld id="{6C420E48-8229-437F-BCF6-DF44AFB63BF0}" type="slidenum">
+              <a:rPr lang="en-US" smtClean="0"/>
+              <a:t>‹#›</a:t>
+            </a:fld>
+            <a:endParaRPr lang="en-US"/>
+          </a:p>
+        </p:txBody>
+      </p:sp>
+    </p:spTree>
+    <p:extLst>
+      <p:ext uri="{BB962C8B-B14F-4D97-AF65-F5344CB8AC3E}">
+        <p14:creationId xmlns:p14="http://schemas.microsoft.com/office/powerpoint/2010/main" val="1346520193"/>
+      </p:ext>
+    </p:extLst>
+  </p:cSld>
+  <p:clrMap bg1="lt1" tx1="dk1" bg2="lt2" tx2="dk2" accent1="accent1" accent2="accent2" accent3="accent3" accent4="accent4" accent5="accent5" accent6="accent6" hlink="hlink" folHlink="folHlink"/>
+  <p:notesStyle>
+    <a:lvl1pPr marL="0" algn="l" defTabSz="914400" rtl="0" eaLnBrk="1" latinLnBrk="0" hangingPunct="1">
+      <a:defRPr sz="1200" kern="1200">
+        <a:solidFill>
+          <a:schemeClr val="tx1"/>
+        </a:solidFill>
+        <a:latin typeface="+mn-lt"/>
+        <a:ea typeface="+mn-ea"/>
+        <a:cs typeface="+mn-cs"/>
+      </a:defRPr>
+    </a:lvl1pPr>
+    <a:lvl2pPr marL="457200" algn="l" defTabSz="914400" rtl="0" eaLnBrk="1" latinLnBrk="0" hangingPunct="1">
+      <a:defRPr sz="1200" kern="1200">
+        <a:solidFill>
+          <a:schemeClr val="tx1"/>
+        </a:solidFill>
+        <a:latin typeface="+mn-lt"/>
+        <a:ea typeface="+mn-ea"/>
+        <a:cs typeface="+mn-cs"/>
+      </a:defRPr>
+    </a:lvl2pPr>
+    <a:lvl3pPr marL="914400" algn="l" defTabSz="914400" rtl="0" eaLnBrk="1" latinLnBrk="0" hangingPunct="1">
+      <a:defRPr sz="1200" kern="1200">
+        <a:solidFill>
+          <a:schemeClr val="tx1"/>
+        </a:solidFill>
+        <a:latin typeface="+mn-lt"/>
+        <a:ea typeface="+mn-ea"/>
+        <a:cs typeface="+mn-cs"/>
+      </a:defRPr>
+    </a:lvl3pPr>
+    <a:lvl4pPr marL="1371600" algn="l" defTabSz="914400" rtl="0" eaLnBrk="1" latinLnBrk="0" hangingPunct="1">
+      <a:defRPr sz="1200" kern="1200">
+        <a:solidFill>
+          <a:schemeClr val="tx1"/>
+        </a:solidFill>
+        <a:latin typeface="+mn-lt"/>
+        <a:ea typeface="+mn-ea"/>
+        <a:cs typeface="+mn-cs"/>
+      </a:defRPr>
+    </a:lvl4pPr>
+    <a:lvl5pPr marL="1828800" algn="l" defTabSz="914400" rtl="0" eaLnBrk="1" latinLnBrk="0" hangingPunct="1">
+      <a:defRPr sz="1200" kern="1200">
+        <a:solidFill>
+          <a:schemeClr val="tx1"/>
+        </a:solidFill>
+        <a:latin typeface="+mn-lt"/>
+        <a:ea typeface="+mn-ea"/>
+        <a:cs typeface="+mn-cs"/>
+      </a:defRPr>
+    </a:lvl5pPr>
+    <a:lvl6pPr marL="2286000" algn="l" defTabSz="914400" rtl="0" eaLnBrk="1" latinLnBrk="0" hangingPunct="1">
+      <a:defRPr sz="1200" kern="1200">
+        <a:solidFill>
+          <a:schemeClr val="tx1"/>
+        </a:solidFill>
+        <a:latin typeface="+mn-lt"/>
+        <a:ea typeface="+mn-ea"/>
+        <a:cs typeface="+mn-cs"/>
+      </a:defRPr>
+    </a:lvl6pPr>
+    <a:lvl7pPr marL="2743200" algn="l" defTabSz="914400" rtl="0" eaLnBrk="1" latinLnBrk="0" hangingPunct="1">
+      <a:defRPr sz="1200" kern="1200">
+        <a:solidFill>
+          <a:schemeClr val="tx1"/>
+        </a:solidFill>
+        <a:latin typeface="+mn-lt"/>
+        <a:ea typeface="+mn-ea"/>
+        <a:cs typeface="+mn-cs"/>
+      </a:defRPr>
+    </a:lvl7pPr>
+    <a:lvl8pPr marL="3200400" algn="l" defTabSz="914400" rtl="0" eaLnBrk="1" latinLnBrk="0" hangingPunct="1">
+      <a:defRPr sz="1200" kern="1200">
+        <a:solidFill>
+          <a:schemeClr val="tx1"/>
+        </a:solidFill>
+        <a:latin typeface="+mn-lt"/>
+        <a:ea typeface="+mn-ea"/>
+        <a:cs typeface="+mn-cs"/>
+      </a:defRPr>
+    </a:lvl8pPr>
+    <a:lvl9pPr marL="3657600" algn="l" defTabSz="914400" rtl="0" eaLnBrk="1" latinLnBrk="0" hangingPunct="1">
+      <a:defRPr sz="1200" kern="1200">
+        <a:solidFill>
+          <a:schemeClr val="tx1"/>
+        </a:solidFill>
+        <a:latin typeface="+mn-lt"/>
+        <a:ea typeface="+mn-ea"/>
+        <a:cs typeface="+mn-cs"/>
+      </a:defRPr>
+    </a:lvl9pPr>
+  </p:notesStyle>
+</p:notesMaster>
+</file>
+
+<file path=ppt/notesSlides/notesSlide1.xml><?xml version="1.0" encoding="utf-8"?>
+<p:notes xmlns:a="http://schemas.openxmlformats.org/drawingml/2006/main" xmlns:r="http://schemas.openxmlformats.org/officeDocument/2006/relationships" xmlns:p="http://schemas.openxmlformats.org/presentationml/2006/main">
+  <p:cSld>
+    <p:spTree>
+      <p:nvGrpSpPr>
+        <p:cNvPr id="1" name=""/>
+        <p:cNvGrpSpPr/>
+        <p:nvPr/>
+      </p:nvGrpSpPr>
+      <p:grpSpPr>
+        <a:xfrm>
+          <a:off x="0" y="0"/>
+          <a:ext cx="0" cy="0"/>
+          <a:chOff x="0" y="0"/>
+          <a:chExt cx="0" cy="0"/>
+        </a:xfrm>
+      </p:grpSpPr>
+      <p:sp>
+        <p:nvSpPr>
+          <p:cNvPr id="2" name="Slide Image Placeholder 1"/>
+          <p:cNvSpPr>
+            <a:spLocks noGrp="1" noRot="1" noChangeAspect="1"/>
+          </p:cNvSpPr>
+          <p:nvPr>
+            <p:ph type="sldImg"/>
+          </p:nvPr>
+        </p:nvSpPr>
+        <p:spPr/>
+      </p:sp>
+      <p:sp>
+        <p:nvSpPr>
+          <p:cNvPr id="3" name="Notes Placeholder 2"/>
+          <p:cNvSpPr>
+            <a:spLocks noGrp="1"/>
+          </p:cNvSpPr>
+          <p:nvPr>
+            <p:ph type="body" idx="1"/>
+          </p:nvPr>
+        </p:nvSpPr>
+        <p:spPr/>
+        <p:txBody>
+          <a:bodyPr/>
+          <a:lstStyle/>
+          <a:p>
+            <a:r>
+              <a:rPr lang="en-US" dirty="0"/>
+              <a:t>What noise types. </a:t>
+            </a:r>
+          </a:p>
+          <a:p>
+            <a:endParaRPr lang="en-US" dirty="0"/>
+          </a:p>
+        </p:txBody>
+      </p:sp>
+      <p:sp>
+        <p:nvSpPr>
+          <p:cNvPr id="4" name="Slide Number Placeholder 3"/>
+          <p:cNvSpPr>
+            <a:spLocks noGrp="1"/>
+          </p:cNvSpPr>
+          <p:nvPr>
+            <p:ph type="sldNum" sz="quarter" idx="5"/>
+          </p:nvPr>
+        </p:nvSpPr>
+        <p:spPr/>
+        <p:txBody>
+          <a:bodyPr/>
+          <a:lstStyle/>
+          <a:p>
+            <a:fld id="{6C420E48-8229-437F-BCF6-DF44AFB63BF0}" type="slidenum">
+              <a:rPr lang="en-US" smtClean="0"/>
+              <a:t>7</a:t>
+            </a:fld>
+            <a:endParaRPr lang="en-US"/>
+          </a:p>
+        </p:txBody>
+      </p:sp>
+    </p:spTree>
+    <p:extLst>
+      <p:ext uri="{BB962C8B-B14F-4D97-AF65-F5344CB8AC3E}">
+        <p14:creationId xmlns:p14="http://schemas.microsoft.com/office/powerpoint/2010/main" val="941478841"/>
+      </p:ext>
+    </p:extLst>
+  </p:cSld>
+  <p:clrMapOvr>
+    <a:masterClrMapping/>
+  </p:clrMapOvr>
+</p:notes>
+</file>
+
+<file path=ppt/notesSlides/notesSlide2.xml><?xml version="1.0" encoding="utf-8"?>
+<p:notes xmlns:a="http://schemas.openxmlformats.org/drawingml/2006/main" xmlns:r="http://schemas.openxmlformats.org/officeDocument/2006/relationships" xmlns:p="http://schemas.openxmlformats.org/presentationml/2006/main">
+  <p:cSld>
+    <p:spTree>
+      <p:nvGrpSpPr>
+        <p:cNvPr id="1" name=""/>
+        <p:cNvGrpSpPr/>
+        <p:nvPr/>
+      </p:nvGrpSpPr>
+      <p:grpSpPr>
+        <a:xfrm>
+          <a:off x="0" y="0"/>
+          <a:ext cx="0" cy="0"/>
+          <a:chOff x="0" y="0"/>
+          <a:chExt cx="0" cy="0"/>
+        </a:xfrm>
+      </p:grpSpPr>
+      <p:sp>
+        <p:nvSpPr>
+          <p:cNvPr id="2" name="Slide Image Placeholder 1"/>
+          <p:cNvSpPr>
+            <a:spLocks noGrp="1" noRot="1" noChangeAspect="1"/>
+          </p:cNvSpPr>
+          <p:nvPr>
+            <p:ph type="sldImg"/>
+          </p:nvPr>
+        </p:nvSpPr>
+        <p:spPr/>
+      </p:sp>
+      <p:sp>
+        <p:nvSpPr>
+          <p:cNvPr id="3" name="Notes Placeholder 2"/>
+          <p:cNvSpPr>
+            <a:spLocks noGrp="1"/>
+          </p:cNvSpPr>
+          <p:nvPr>
+            <p:ph type="body" idx="1"/>
+          </p:nvPr>
+        </p:nvSpPr>
+        <p:spPr/>
+        <p:txBody>
+          <a:bodyPr/>
+          <a:lstStyle/>
+          <a:p>
+            <a:r>
+              <a:rPr lang="en-US" dirty="0"/>
+              <a:t>Published results to find. Google scholar</a:t>
+            </a:r>
+          </a:p>
+          <a:p>
+            <a:endParaRPr lang="en-US" dirty="0"/>
+          </a:p>
+          <a:p>
+            <a:r>
+              <a:rPr lang="en-US" dirty="0"/>
+              <a:t>Connected papers</a:t>
+            </a:r>
+          </a:p>
+          <a:p>
+            <a:endParaRPr lang="en-US" dirty="0"/>
+          </a:p>
+          <a:p>
+            <a:r>
+              <a:rPr lang="en-US" dirty="0"/>
+              <a:t>This weekend. </a:t>
+            </a:r>
+          </a:p>
+        </p:txBody>
+      </p:sp>
+      <p:sp>
+        <p:nvSpPr>
+          <p:cNvPr id="4" name="Slide Number Placeholder 3"/>
+          <p:cNvSpPr>
+            <a:spLocks noGrp="1"/>
+          </p:cNvSpPr>
+          <p:nvPr>
+            <p:ph type="sldNum" sz="quarter" idx="5"/>
+          </p:nvPr>
+        </p:nvSpPr>
+        <p:spPr/>
+        <p:txBody>
+          <a:bodyPr/>
+          <a:lstStyle/>
+          <a:p>
+            <a:fld id="{6C420E48-8229-437F-BCF6-DF44AFB63BF0}" type="slidenum">
+              <a:rPr lang="en-US" smtClean="0"/>
+              <a:t>12</a:t>
+            </a:fld>
+            <a:endParaRPr lang="en-US"/>
+          </a:p>
+        </p:txBody>
+      </p:sp>
+    </p:spTree>
+    <p:extLst>
+      <p:ext uri="{BB962C8B-B14F-4D97-AF65-F5344CB8AC3E}">
+        <p14:creationId xmlns:p14="http://schemas.microsoft.com/office/powerpoint/2010/main" val="837175825"/>
+      </p:ext>
+    </p:extLst>
+  </p:cSld>
+  <p:clrMapOvr>
+    <a:masterClrMapping/>
+  </p:clrMapOvr>
+</p:notes>
+</file>
+
+<file path=ppt/notesSlides/notesSlide3.xml><?xml version="1.0" encoding="utf-8"?>
+<p:notes xmlns:a="http://schemas.openxmlformats.org/drawingml/2006/main" xmlns:r="http://schemas.openxmlformats.org/officeDocument/2006/relationships" xmlns:p="http://schemas.openxmlformats.org/presentationml/2006/main">
+  <p:cSld>
+    <p:spTree>
+      <p:nvGrpSpPr>
+        <p:cNvPr id="1" name=""/>
+        <p:cNvGrpSpPr/>
+        <p:nvPr/>
+      </p:nvGrpSpPr>
+      <p:grpSpPr>
+        <a:xfrm>
+          <a:off x="0" y="0"/>
+          <a:ext cx="0" cy="0"/>
+          <a:chOff x="0" y="0"/>
+          <a:chExt cx="0" cy="0"/>
+        </a:xfrm>
+      </p:grpSpPr>
+      <p:sp>
+        <p:nvSpPr>
+          <p:cNvPr id="2" name="Slide Image Placeholder 1"/>
+          <p:cNvSpPr>
+            <a:spLocks noGrp="1" noRot="1" noChangeAspect="1"/>
+          </p:cNvSpPr>
+          <p:nvPr>
+            <p:ph type="sldImg"/>
+          </p:nvPr>
+        </p:nvSpPr>
+        <p:spPr/>
+      </p:sp>
+      <p:sp>
+        <p:nvSpPr>
+          <p:cNvPr id="3" name="Notes Placeholder 2"/>
+          <p:cNvSpPr>
+            <a:spLocks noGrp="1"/>
+          </p:cNvSpPr>
+          <p:nvPr>
+            <p:ph type="body" idx="1"/>
+          </p:nvPr>
+        </p:nvSpPr>
+        <p:spPr/>
+        <p:txBody>
+          <a:bodyPr/>
+          <a:lstStyle/>
+          <a:p>
+            <a:r>
+              <a:rPr lang="en-US" dirty="0"/>
+              <a:t>EW cert</a:t>
+            </a:r>
+          </a:p>
+          <a:p>
+            <a:endParaRPr lang="en-US" dirty="0"/>
+          </a:p>
+          <a:p>
+            <a:r>
+              <a:rPr lang="en-US" dirty="0"/>
+              <a:t>RSSI values in ACK, SNR</a:t>
+            </a:r>
+          </a:p>
+          <a:p>
+            <a:endParaRPr lang="en-US" dirty="0"/>
+          </a:p>
+          <a:p>
+            <a:r>
+              <a:rPr lang="en-US" dirty="0"/>
+              <a:t>Other values</a:t>
+            </a:r>
+          </a:p>
+        </p:txBody>
+      </p:sp>
+      <p:sp>
+        <p:nvSpPr>
+          <p:cNvPr id="4" name="Slide Number Placeholder 3"/>
+          <p:cNvSpPr>
+            <a:spLocks noGrp="1"/>
+          </p:cNvSpPr>
+          <p:nvPr>
+            <p:ph type="sldNum" sz="quarter" idx="5"/>
+          </p:nvPr>
+        </p:nvSpPr>
+        <p:spPr/>
+        <p:txBody>
+          <a:bodyPr/>
+          <a:lstStyle/>
+          <a:p>
+            <a:fld id="{6C420E48-8229-437F-BCF6-DF44AFB63BF0}" type="slidenum">
+              <a:rPr lang="en-US" smtClean="0"/>
+              <a:t>13</a:t>
+            </a:fld>
+            <a:endParaRPr lang="en-US"/>
+          </a:p>
+        </p:txBody>
+      </p:sp>
+    </p:spTree>
+    <p:extLst>
+      <p:ext uri="{BB962C8B-B14F-4D97-AF65-F5344CB8AC3E}">
+        <p14:creationId xmlns:p14="http://schemas.microsoft.com/office/powerpoint/2010/main" val="2112952272"/>
+      </p:ext>
+    </p:extLst>
+  </p:cSld>
+  <p:clrMapOvr>
+    <a:masterClrMapping/>
+  </p:clrMapOvr>
+</p:notes>
+</file>
+
+<file path=ppt/notesSlides/notesSlide4.xml><?xml version="1.0" encoding="utf-8"?>
+<p:notes xmlns:a="http://schemas.openxmlformats.org/drawingml/2006/main" xmlns:r="http://schemas.openxmlformats.org/officeDocument/2006/relationships" xmlns:p="http://schemas.openxmlformats.org/presentationml/2006/main">
+  <p:cSld>
+    <p:spTree>
+      <p:nvGrpSpPr>
+        <p:cNvPr id="1" name=""/>
+        <p:cNvGrpSpPr/>
+        <p:nvPr/>
+      </p:nvGrpSpPr>
+      <p:grpSpPr>
+        <a:xfrm>
+          <a:off x="0" y="0"/>
+          <a:ext cx="0" cy="0"/>
+          <a:chOff x="0" y="0"/>
+          <a:chExt cx="0" cy="0"/>
+        </a:xfrm>
+      </p:grpSpPr>
+      <p:sp>
+        <p:nvSpPr>
+          <p:cNvPr id="2" name="Slide Image Placeholder 1"/>
+          <p:cNvSpPr>
+            <a:spLocks noGrp="1" noRot="1" noChangeAspect="1"/>
+          </p:cNvSpPr>
+          <p:nvPr>
+            <p:ph type="sldImg"/>
+          </p:nvPr>
+        </p:nvSpPr>
+        <p:spPr/>
+      </p:sp>
+      <p:sp>
+        <p:nvSpPr>
+          <p:cNvPr id="3" name="Notes Placeholder 2"/>
+          <p:cNvSpPr>
+            <a:spLocks noGrp="1"/>
+          </p:cNvSpPr>
+          <p:nvPr>
+            <p:ph type="body" idx="1"/>
+          </p:nvPr>
+        </p:nvSpPr>
+        <p:spPr/>
+        <p:txBody>
+          <a:bodyPr/>
+          <a:lstStyle/>
+          <a:p>
+            <a:endParaRPr lang="en-US" dirty="0"/>
+          </a:p>
+        </p:txBody>
+      </p:sp>
+      <p:sp>
+        <p:nvSpPr>
+          <p:cNvPr id="4" name="Slide Number Placeholder 3"/>
+          <p:cNvSpPr>
+            <a:spLocks noGrp="1"/>
+          </p:cNvSpPr>
+          <p:nvPr>
+            <p:ph type="sldNum" sz="quarter" idx="5"/>
+          </p:nvPr>
+        </p:nvSpPr>
+        <p:spPr/>
+        <p:txBody>
+          <a:bodyPr/>
+          <a:lstStyle/>
+          <a:p>
+            <a:fld id="{6C420E48-8229-437F-BCF6-DF44AFB63BF0}" type="slidenum">
+              <a:rPr lang="en-US" smtClean="0"/>
+              <a:t>15</a:t>
+            </a:fld>
+            <a:endParaRPr lang="en-US"/>
+          </a:p>
+        </p:txBody>
+      </p:sp>
+    </p:spTree>
+    <p:extLst>
+      <p:ext uri="{BB962C8B-B14F-4D97-AF65-F5344CB8AC3E}">
+        <p14:creationId xmlns:p14="http://schemas.microsoft.com/office/powerpoint/2010/main" val="1907252219"/>
+      </p:ext>
+    </p:extLst>
+  </p:cSld>
+  <p:clrMapOvr>
+    <a:masterClrMapping/>
+  </p:clrMapOvr>
+</p:notes>
+</file>
+
+<file path=ppt/notesSlides/notesSlide5.xml><?xml version="1.0" encoding="utf-8"?>
+<p:notes xmlns:a="http://schemas.openxmlformats.org/drawingml/2006/main" xmlns:r="http://schemas.openxmlformats.org/officeDocument/2006/relationships" xmlns:p="http://schemas.openxmlformats.org/presentationml/2006/main">
+  <p:cSld>
+    <p:spTree>
+      <p:nvGrpSpPr>
+        <p:cNvPr id="1" name=""/>
+        <p:cNvGrpSpPr/>
+        <p:nvPr/>
+      </p:nvGrpSpPr>
+      <p:grpSpPr>
+        <a:xfrm>
+          <a:off x="0" y="0"/>
+          <a:ext cx="0" cy="0"/>
+          <a:chOff x="0" y="0"/>
+          <a:chExt cx="0" cy="0"/>
+        </a:xfrm>
+      </p:grpSpPr>
+      <p:sp>
+        <p:nvSpPr>
+          <p:cNvPr id="2" name="Slide Image Placeholder 1"/>
+          <p:cNvSpPr>
+            <a:spLocks noGrp="1" noRot="1" noChangeAspect="1"/>
+          </p:cNvSpPr>
+          <p:nvPr>
+            <p:ph type="sldImg"/>
+          </p:nvPr>
+        </p:nvSpPr>
+        <p:spPr/>
+      </p:sp>
+      <p:sp>
+        <p:nvSpPr>
+          <p:cNvPr id="3" name="Notes Placeholder 2"/>
+          <p:cNvSpPr>
+            <a:spLocks noGrp="1"/>
+          </p:cNvSpPr>
+          <p:nvPr>
+            <p:ph type="body" idx="1"/>
+          </p:nvPr>
+        </p:nvSpPr>
+        <p:spPr/>
+        <p:txBody>
+          <a:bodyPr/>
+          <a:lstStyle/>
+          <a:p>
+            <a:r>
+              <a:rPr lang="en-US" dirty="0"/>
+              <a:t>Wiki </a:t>
+            </a:r>
+            <a:r>
+              <a:rPr lang="en-US" dirty="0" err="1"/>
+              <a:t>pedia</a:t>
+            </a:r>
+            <a:r>
+              <a:rPr lang="en-US" dirty="0"/>
+              <a:t> on ROC</a:t>
+            </a:r>
+          </a:p>
+          <a:p>
+            <a:endParaRPr lang="en-US" dirty="0"/>
+          </a:p>
+          <a:p>
+            <a:r>
+              <a:rPr lang="en-US" dirty="0" err="1"/>
+              <a:t>Threshhold</a:t>
+            </a:r>
+            <a:r>
+              <a:rPr lang="en-US" dirty="0"/>
+              <a:t> details</a:t>
+            </a:r>
+          </a:p>
+        </p:txBody>
+      </p:sp>
+      <p:sp>
+        <p:nvSpPr>
+          <p:cNvPr id="4" name="Slide Number Placeholder 3"/>
+          <p:cNvSpPr>
+            <a:spLocks noGrp="1"/>
+          </p:cNvSpPr>
+          <p:nvPr>
+            <p:ph type="sldNum" sz="quarter" idx="5"/>
+          </p:nvPr>
+        </p:nvSpPr>
+        <p:spPr/>
+        <p:txBody>
+          <a:bodyPr/>
+          <a:lstStyle/>
+          <a:p>
+            <a:fld id="{6C420E48-8229-437F-BCF6-DF44AFB63BF0}" type="slidenum">
+              <a:rPr lang="en-US" smtClean="0"/>
+              <a:t>17</a:t>
+            </a:fld>
+            <a:endParaRPr lang="en-US"/>
+          </a:p>
+        </p:txBody>
+      </p:sp>
+    </p:spTree>
+    <p:extLst>
+      <p:ext uri="{BB962C8B-B14F-4D97-AF65-F5344CB8AC3E}">
+        <p14:creationId xmlns:p14="http://schemas.microsoft.com/office/powerpoint/2010/main" val="3041393315"/>
+      </p:ext>
+    </p:extLst>
+  </p:cSld>
+  <p:clrMapOvr>
+    <a:masterClrMapping/>
+  </p:clrMapOvr>
+</p:notes>
+</file>
+
 <file path=ppt/slideLayouts/slideLayout1.xml><?xml version="1.0" encoding="utf-8"?>
 <p:sldLayout xmlns:a="http://schemas.openxmlformats.org/drawingml/2006/main" xmlns:r="http://schemas.openxmlformats.org/officeDocument/2006/relationships" xmlns:p="http://schemas.openxmlformats.org/presentationml/2006/main" type="title" preserve="1">
   <p:cSld name="Title Slide">
@@ -494,7 +1338,7 @@
           <a:p>
             <a:fld id="{F55AF960-87D0-487C-BD50-BC6BA87EEF29}" type="datetimeFigureOut">
               <a:rPr lang="en-US" smtClean="0"/>
-              <a:t>5/7/2026</a:t>
+              <a:t>5/8/2026</a:t>
             </a:fld>
             <a:endParaRPr lang="en-US"/>
           </a:p>
@@ -692,7 +1536,7 @@
           <a:p>
             <a:fld id="{F55AF960-87D0-487C-BD50-BC6BA87EEF29}" type="datetimeFigureOut">
               <a:rPr lang="en-US" smtClean="0"/>
-              <a:t>5/7/2026</a:t>
+              <a:t>5/8/2026</a:t>
             </a:fld>
             <a:endParaRPr lang="en-US"/>
           </a:p>
@@ -900,7 +1744,7 @@
           <a:p>
             <a:fld id="{F55AF960-87D0-487C-BD50-BC6BA87EEF29}" type="datetimeFigureOut">
               <a:rPr lang="en-US" smtClean="0"/>
-              <a:t>5/7/2026</a:t>
+              <a:t>5/8/2026</a:t>
             </a:fld>
             <a:endParaRPr lang="en-US"/>
           </a:p>
@@ -1098,7 +1942,7 @@
           <a:p>
             <a:fld id="{F55AF960-87D0-487C-BD50-BC6BA87EEF29}" type="datetimeFigureOut">
               <a:rPr lang="en-US" smtClean="0"/>
-              <a:t>5/7/2026</a:t>
+              <a:t>5/8/2026</a:t>
             </a:fld>
             <a:endParaRPr lang="en-US"/>
           </a:p>
@@ -1373,7 +2217,7 @@
           <a:p>
             <a:fld id="{F55AF960-87D0-487C-BD50-BC6BA87EEF29}" type="datetimeFigureOut">
               <a:rPr lang="en-US" smtClean="0"/>
-              <a:t>5/7/2026</a:t>
+              <a:t>5/8/2026</a:t>
             </a:fld>
             <a:endParaRPr lang="en-US"/>
           </a:p>
@@ -1638,7 +2482,7 @@
           <a:p>
             <a:fld id="{F55AF960-87D0-487C-BD50-BC6BA87EEF29}" type="datetimeFigureOut">
               <a:rPr lang="en-US" smtClean="0"/>
-              <a:t>5/7/2026</a:t>
+              <a:t>5/8/2026</a:t>
             </a:fld>
             <a:endParaRPr lang="en-US"/>
           </a:p>
@@ -2050,7 +2894,7 @@
           <a:p>
             <a:fld id="{F55AF960-87D0-487C-BD50-BC6BA87EEF29}" type="datetimeFigureOut">
               <a:rPr lang="en-US" smtClean="0"/>
-              <a:t>5/7/2026</a:t>
+              <a:t>5/8/2026</a:t>
             </a:fld>
             <a:endParaRPr lang="en-US"/>
           </a:p>
@@ -2191,7 +3035,7 @@
           <a:p>
             <a:fld id="{F55AF960-87D0-487C-BD50-BC6BA87EEF29}" type="datetimeFigureOut">
               <a:rPr lang="en-US" smtClean="0"/>
-              <a:t>5/7/2026</a:t>
+              <a:t>5/8/2026</a:t>
             </a:fld>
             <a:endParaRPr lang="en-US"/>
           </a:p>
@@ -2304,7 +3148,7 @@
           <a:p>
             <a:fld id="{F55AF960-87D0-487C-BD50-BC6BA87EEF29}" type="datetimeFigureOut">
               <a:rPr lang="en-US" smtClean="0"/>
-              <a:t>5/7/2026</a:t>
+              <a:t>5/8/2026</a:t>
             </a:fld>
             <a:endParaRPr lang="en-US"/>
           </a:p>
@@ -2615,7 +3459,7 @@
           <a:p>
             <a:fld id="{F55AF960-87D0-487C-BD50-BC6BA87EEF29}" type="datetimeFigureOut">
               <a:rPr lang="en-US" smtClean="0"/>
-              <a:t>5/7/2026</a:t>
+              <a:t>5/8/2026</a:t>
             </a:fld>
             <a:endParaRPr lang="en-US"/>
           </a:p>
@@ -2903,7 +3747,7 @@
           <a:p>
             <a:fld id="{F55AF960-87D0-487C-BD50-BC6BA87EEF29}" type="datetimeFigureOut">
               <a:rPr lang="en-US" smtClean="0"/>
-              <a:t>5/7/2026</a:t>
+              <a:t>5/8/2026</a:t>
             </a:fld>
             <a:endParaRPr lang="en-US"/>
           </a:p>
@@ -3144,7 +3988,7 @@
           <a:p>
             <a:fld id="{F55AF960-87D0-487C-BD50-BC6BA87EEF29}" type="datetimeFigureOut">
               <a:rPr lang="en-US" smtClean="0"/>
-              <a:t>5/7/2026</a:t>
+              <a:t>5/8/2026</a:t>
             </a:fld>
             <a:endParaRPr lang="en-US"/>
           </a:p>
@@ -5503,7 +6347,7 @@
           <p:nvPr/>
         </p:nvPicPr>
         <p:blipFill>
-          <a:blip r:embed="rId2"/>
+          <a:blip r:embed="rId3"/>
           <a:stretch>
             <a:fillRect/>
           </a:stretch>
@@ -5533,7 +6377,7 @@
           <p:nvPr/>
         </p:nvPicPr>
         <p:blipFill>
-          <a:blip r:embed="rId3"/>
+          <a:blip r:embed="rId4"/>
           <a:stretch>
             <a:fillRect/>
           </a:stretch>
@@ -6214,7 +7058,7 @@
           <p:nvPr/>
         </p:nvPicPr>
         <p:blipFill>
-          <a:blip r:embed="rId2"/>
+          <a:blip r:embed="rId3"/>
           <a:stretch>
             <a:fillRect/>
           </a:stretch>
@@ -7186,7 +8030,7 @@
           <p:nvPr/>
         </p:nvPicPr>
         <p:blipFill>
-          <a:blip r:embed="rId2">
+          <a:blip r:embed="rId3">
             <a:extLst>
               <a:ext uri="{28A0092B-C50C-407E-A947-70E740481C1C}">
                 <a14:useLocalDpi xmlns:a14="http://schemas.microsoft.com/office/drawing/2010/main" val="0"/>
@@ -7213,42 +8057,6 @@
             <a:extLst>
               <a:ext uri="{FF2B5EF4-FFF2-40B4-BE49-F238E27FC236}">
                 <a16:creationId xmlns:a16="http://schemas.microsoft.com/office/drawing/2014/main" id="{0D14E056-C06F-79EC-0BD7-49514EDB00BA}"/>
-              </a:ext>
-            </a:extLst>
-          </p:cNvPr>
-          <p:cNvPicPr>
-            <a:picLocks noChangeAspect="1"/>
-          </p:cNvPicPr>
-          <p:nvPr/>
-        </p:nvPicPr>
-        <p:blipFill>
-          <a:blip r:embed="rId3">
-            <a:extLst>
-              <a:ext uri="{28A0092B-C50C-407E-A947-70E740481C1C}">
-                <a14:useLocalDpi xmlns:a14="http://schemas.microsoft.com/office/drawing/2010/main" val="0"/>
-              </a:ext>
-            </a:extLst>
-          </a:blip>
-          <a:stretch>
-            <a:fillRect/>
-          </a:stretch>
-        </p:blipFill>
-        <p:spPr>
-          <a:xfrm>
-            <a:off x="3520440" y="2228980"/>
-            <a:ext cx="3119617" cy="1878459"/>
-          </a:xfrm>
-          <a:prstGeom prst="rect">
-            <a:avLst/>
-          </a:prstGeom>
-        </p:spPr>
-      </p:pic>
-      <p:pic>
-        <p:nvPicPr>
-          <p:cNvPr id="15" name="Picture 14">
-            <a:extLst>
-              <a:ext uri="{FF2B5EF4-FFF2-40B4-BE49-F238E27FC236}">
-                <a16:creationId xmlns:a16="http://schemas.microsoft.com/office/drawing/2014/main" id="{5B9BB08F-C0F2-0E32-B5AC-669EE9CC30E4}"/>
               </a:ext>
             </a:extLst>
           </p:cNvPr>
@@ -7271,8 +8079,8 @@
         </p:blipFill>
         <p:spPr>
           <a:xfrm>
-            <a:off x="6986045" y="2235811"/>
-            <a:ext cx="3119614" cy="1878457"/>
+            <a:off x="3520440" y="2228980"/>
+            <a:ext cx="3119617" cy="1878459"/>
           </a:xfrm>
           <a:prstGeom prst="rect">
             <a:avLst/>
@@ -7281,10 +8089,10 @@
       </p:pic>
       <p:pic>
         <p:nvPicPr>
-          <p:cNvPr id="17" name="Picture 16">
-            <a:extLst>
-              <a:ext uri="{FF2B5EF4-FFF2-40B4-BE49-F238E27FC236}">
-                <a16:creationId xmlns:a16="http://schemas.microsoft.com/office/drawing/2014/main" id="{8B26FE9B-C4F1-E59B-BE63-D81621849142}"/>
+          <p:cNvPr id="15" name="Picture 14">
+            <a:extLst>
+              <a:ext uri="{FF2B5EF4-FFF2-40B4-BE49-F238E27FC236}">
+                <a16:creationId xmlns:a16="http://schemas.microsoft.com/office/drawing/2014/main" id="{5B9BB08F-C0F2-0E32-B5AC-669EE9CC30E4}"/>
               </a:ext>
             </a:extLst>
           </p:cNvPr>
@@ -7307,8 +8115,8 @@
         </p:blipFill>
         <p:spPr>
           <a:xfrm>
-            <a:off x="1960633" y="4629020"/>
-            <a:ext cx="3119615" cy="1878458"/>
+            <a:off x="6986045" y="2235811"/>
+            <a:ext cx="3119614" cy="1878457"/>
           </a:xfrm>
           <a:prstGeom prst="rect">
             <a:avLst/>
@@ -7317,10 +8125,10 @@
       </p:pic>
       <p:pic>
         <p:nvPicPr>
-          <p:cNvPr id="19" name="Picture 18">
-            <a:extLst>
-              <a:ext uri="{FF2B5EF4-FFF2-40B4-BE49-F238E27FC236}">
-                <a16:creationId xmlns:a16="http://schemas.microsoft.com/office/drawing/2014/main" id="{F7E0140A-29EB-5093-FEEA-B2D7DD46E9C3}"/>
+          <p:cNvPr id="17" name="Picture 16">
+            <a:extLst>
+              <a:ext uri="{FF2B5EF4-FFF2-40B4-BE49-F238E27FC236}">
+                <a16:creationId xmlns:a16="http://schemas.microsoft.com/office/drawing/2014/main" id="{8B26FE9B-C4F1-E59B-BE63-D81621849142}"/>
               </a:ext>
             </a:extLst>
           </p:cNvPr>
@@ -7331,6 +8139,42 @@
         </p:nvPicPr>
         <p:blipFill>
           <a:blip r:embed="rId6">
+            <a:extLst>
+              <a:ext uri="{28A0092B-C50C-407E-A947-70E740481C1C}">
+                <a14:useLocalDpi xmlns:a14="http://schemas.microsoft.com/office/drawing/2010/main" val="0"/>
+              </a:ext>
+            </a:extLst>
+          </a:blip>
+          <a:stretch>
+            <a:fillRect/>
+          </a:stretch>
+        </p:blipFill>
+        <p:spPr>
+          <a:xfrm>
+            <a:off x="1960633" y="4629020"/>
+            <a:ext cx="3119615" cy="1878458"/>
+          </a:xfrm>
+          <a:prstGeom prst="rect">
+            <a:avLst/>
+          </a:prstGeom>
+        </p:spPr>
+      </p:pic>
+      <p:pic>
+        <p:nvPicPr>
+          <p:cNvPr id="19" name="Picture 18">
+            <a:extLst>
+              <a:ext uri="{FF2B5EF4-FFF2-40B4-BE49-F238E27FC236}">
+                <a16:creationId xmlns:a16="http://schemas.microsoft.com/office/drawing/2014/main" id="{F7E0140A-29EB-5093-FEEA-B2D7DD46E9C3}"/>
+              </a:ext>
+            </a:extLst>
+          </p:cNvPr>
+          <p:cNvPicPr>
+            <a:picLocks noChangeAspect="1"/>
+          </p:cNvPicPr>
+          <p:nvPr/>
+        </p:nvPicPr>
+        <p:blipFill>
+          <a:blip r:embed="rId7">
             <a:extLst>
               <a:ext uri="{28A0092B-C50C-407E-A947-70E740481C1C}">
                 <a14:useLocalDpi xmlns:a14="http://schemas.microsoft.com/office/drawing/2010/main" val="0"/>
@@ -8663,7 +9507,7 @@
           <p:nvPr/>
         </p:nvPicPr>
         <p:blipFill>
-          <a:blip r:embed="rId2">
+          <a:blip r:embed="rId3">
             <a:extLst>
               <a:ext uri="{28A0092B-C50C-407E-A947-70E740481C1C}">
                 <a14:useLocalDpi xmlns:a14="http://schemas.microsoft.com/office/drawing/2010/main" val="0"/>
@@ -14227,7 +15071,7 @@
           <p:nvPr/>
         </p:nvPicPr>
         <p:blipFill>
-          <a:blip r:embed="rId2"/>
+          <a:blip r:embed="rId3"/>
           <a:stretch>
             <a:fillRect/>
           </a:stretch>
@@ -15394,6 +16238,321 @@
 </a:theme>
 </file>
 
+<file path=ppt/theme/theme2.xml><?xml version="1.0" encoding="utf-8"?>
+<a:theme xmlns:a="http://schemas.openxmlformats.org/drawingml/2006/main" name="Office Theme">
+  <a:themeElements>
+    <a:clrScheme name="Office">
+      <a:dk1>
+        <a:sysClr val="windowText" lastClr="000000"/>
+      </a:dk1>
+      <a:lt1>
+        <a:sysClr val="window" lastClr="FFFFFF"/>
+      </a:lt1>
+      <a:dk2>
+        <a:srgbClr val="0E2841"/>
+      </a:dk2>
+      <a:lt2>
+        <a:srgbClr val="E8E8E8"/>
+      </a:lt2>
+      <a:accent1>
+        <a:srgbClr val="156082"/>
+      </a:accent1>
+      <a:accent2>
+        <a:srgbClr val="E97132"/>
+      </a:accent2>
+      <a:accent3>
+        <a:srgbClr val="196B24"/>
+      </a:accent3>
+      <a:accent4>
+        <a:srgbClr val="0F9ED5"/>
+      </a:accent4>
+      <a:accent5>
+        <a:srgbClr val="A02B93"/>
+      </a:accent5>
+      <a:accent6>
+        <a:srgbClr val="4EA72E"/>
+      </a:accent6>
+      <a:hlink>
+        <a:srgbClr val="467886"/>
+      </a:hlink>
+      <a:folHlink>
+        <a:srgbClr val="96607D"/>
+      </a:folHlink>
+    </a:clrScheme>
+    <a:fontScheme name="Office">
+      <a:majorFont>
+        <a:latin typeface="Aptos Display" panose="02110004020202020204"/>
+        <a:ea typeface=""/>
+        <a:cs typeface=""/>
+        <a:font script="Jpan" typeface="游ゴシック Light"/>
+        <a:font script="Hang" typeface="맑은 고딕"/>
+        <a:font script="Hans" typeface="等线 Light"/>
+        <a:font script="Hant" typeface="新細明體"/>
+        <a:font script="Arab" typeface="Times New Roman"/>
+        <a:font script="Hebr" typeface="Times New Roman"/>
+        <a:font script="Thai" typeface="Angsana New"/>
+        <a:font script="Ethi" typeface="Nyala"/>
+        <a:font script="Beng" typeface="Vrinda"/>
+        <a:font script="Gujr" typeface="Shruti"/>
+        <a:font script="Khmr" typeface="MoolBoran"/>
+        <a:font script="Knda" typeface="Tunga"/>
+        <a:font script="Guru" typeface="Raavi"/>
+        <a:font script="Cans" typeface="Euphemia"/>
+        <a:font script="Cher" typeface="Plantagenet Cherokee"/>
+        <a:font script="Yiii" typeface="Microsoft Yi Baiti"/>
+        <a:font script="Tibt" typeface="Microsoft Himalaya"/>
+        <a:font script="Thaa" typeface="MV Boli"/>
+        <a:font script="Deva" typeface="Mangal"/>
+        <a:font script="Telu" typeface="Gautami"/>
+        <a:font script="Taml" typeface="Latha"/>
+        <a:font script="Syrc" typeface="Estrangelo Edessa"/>
+        <a:font script="Orya" typeface="Kalinga"/>
+        <a:font script="Mlym" typeface="Kartika"/>
+        <a:font script="Laoo" typeface="DokChampa"/>
+        <a:font script="Sinh" typeface="Iskoola Pota"/>
+        <a:font script="Mong" typeface="Mongolian Baiti"/>
+        <a:font script="Viet" typeface="Times New Roman"/>
+        <a:font script="Uigh" typeface="Microsoft Uighur"/>
+        <a:font script="Geor" typeface="Sylfaen"/>
+        <a:font script="Armn" typeface="Arial"/>
+        <a:font script="Bugi" typeface="Leelawadee UI"/>
+        <a:font script="Bopo" typeface="Microsoft JhengHei"/>
+        <a:font script="Java" typeface="Javanese Text"/>
+        <a:font script="Lisu" typeface="Segoe UI"/>
+        <a:font script="Mymr" typeface="Myanmar Text"/>
+        <a:font script="Nkoo" typeface="Ebrima"/>
+        <a:font script="Olck" typeface="Nirmala UI"/>
+        <a:font script="Osma" typeface="Ebrima"/>
+        <a:font script="Phag" typeface="Phagspa"/>
+        <a:font script="Syrn" typeface="Estrangelo Edessa"/>
+        <a:font script="Syrj" typeface="Estrangelo Edessa"/>
+        <a:font script="Syre" typeface="Estrangelo Edessa"/>
+        <a:font script="Sora" typeface="Nirmala UI"/>
+        <a:font script="Tale" typeface="Microsoft Tai Le"/>
+        <a:font script="Talu" typeface="Microsoft New Tai Lue"/>
+        <a:font script="Tfng" typeface="Ebrima"/>
+      </a:majorFont>
+      <a:minorFont>
+        <a:latin typeface="Aptos" panose="02110004020202020204"/>
+        <a:ea typeface=""/>
+        <a:cs typeface=""/>
+        <a:font script="Jpan" typeface="游ゴシック"/>
+        <a:font script="Hang" typeface="맑은 고딕"/>
+        <a:font script="Hans" typeface="等线"/>
+        <a:font script="Hant" typeface="新細明體"/>
+        <a:font script="Arab" typeface="Arial"/>
+        <a:font script="Hebr" typeface="Arial"/>
+        <a:font script="Thai" typeface="Cordia New"/>
+        <a:font script="Ethi" typeface="Nyala"/>
+        <a:font script="Beng" typeface="Vrinda"/>
+        <a:font script="Gujr" typeface="Shruti"/>
+        <a:font script="Khmr" typeface="DaunPenh"/>
+        <a:font script="Knda" typeface="Tunga"/>
+        <a:font script="Guru" typeface="Raavi"/>
+        <a:font script="Cans" typeface="Euphemia"/>
+        <a:font script="Cher" typeface="Plantagenet Cherokee"/>
+        <a:font script="Yiii" typeface="Microsoft Yi Baiti"/>
+        <a:font script="Tibt" typeface="Microsoft Himalaya"/>
+        <a:font script="Thaa" typeface="MV Boli"/>
+        <a:font script="Deva" typeface="Mangal"/>
+        <a:font script="Telu" typeface="Gautami"/>
+        <a:font script="Taml" typeface="Latha"/>
+        <a:font script="Syrc" typeface="Estrangelo Edessa"/>
+        <a:font script="Orya" typeface="Kalinga"/>
+        <a:font script="Mlym" typeface="Kartika"/>
+        <a:font script="Laoo" typeface="DokChampa"/>
+        <a:font script="Sinh" typeface="Iskoola Pota"/>
+        <a:font script="Mong" typeface="Mongolian Baiti"/>
+        <a:font script="Viet" typeface="Arial"/>
+        <a:font script="Uigh" typeface="Microsoft Uighur"/>
+        <a:font script="Geor" typeface="Sylfaen"/>
+        <a:font script="Armn" typeface="Arial"/>
+        <a:font script="Bugi" typeface="Leelawadee UI"/>
+        <a:font script="Bopo" typeface="Microsoft JhengHei"/>
+        <a:font script="Java" typeface="Javanese Text"/>
+        <a:font script="Lisu" typeface="Segoe UI"/>
+        <a:font script="Mymr" typeface="Myanmar Text"/>
+        <a:font script="Nkoo" typeface="Ebrima"/>
+        <a:font script="Olck" typeface="Nirmala UI"/>
+        <a:font script="Osma" typeface="Ebrima"/>
+        <a:font script="Phag" typeface="Phagspa"/>
+        <a:font script="Syrn" typeface="Estrangelo Edessa"/>
+        <a:font script="Syrj" typeface="Estrangelo Edessa"/>
+        <a:font script="Syre" typeface="Estrangelo Edessa"/>
+        <a:font script="Sora" typeface="Nirmala UI"/>
+        <a:font script="Tale" typeface="Microsoft Tai Le"/>
+        <a:font script="Talu" typeface="Microsoft New Tai Lue"/>
+        <a:font script="Tfng" typeface="Ebrima"/>
+      </a:minorFont>
+    </a:fontScheme>
+    <a:fmtScheme name="Office">
+      <a:fillStyleLst>
+        <a:solidFill>
+          <a:schemeClr val="phClr"/>
+        </a:solidFill>
+        <a:gradFill rotWithShape="1">
+          <a:gsLst>
+            <a:gs pos="0">
+              <a:schemeClr val="phClr">
+                <a:lumMod val="110000"/>
+                <a:satMod val="105000"/>
+                <a:tint val="67000"/>
+              </a:schemeClr>
+            </a:gs>
+            <a:gs pos="50000">
+              <a:schemeClr val="phClr">
+                <a:lumMod val="105000"/>
+                <a:satMod val="103000"/>
+                <a:tint val="73000"/>
+              </a:schemeClr>
+            </a:gs>
+            <a:gs pos="100000">
+              <a:schemeClr val="phClr">
+                <a:lumMod val="105000"/>
+                <a:satMod val="109000"/>
+                <a:tint val="81000"/>
+              </a:schemeClr>
+            </a:gs>
+          </a:gsLst>
+          <a:lin ang="5400000" scaled="0"/>
+        </a:gradFill>
+        <a:gradFill rotWithShape="1">
+          <a:gsLst>
+            <a:gs pos="0">
+              <a:schemeClr val="phClr">
+                <a:satMod val="103000"/>
+                <a:lumMod val="102000"/>
+                <a:tint val="94000"/>
+              </a:schemeClr>
+            </a:gs>
+            <a:gs pos="50000">
+              <a:schemeClr val="phClr">
+                <a:satMod val="110000"/>
+                <a:lumMod val="100000"/>
+                <a:shade val="100000"/>
+              </a:schemeClr>
+            </a:gs>
+            <a:gs pos="100000">
+              <a:schemeClr val="phClr">
+                <a:lumMod val="99000"/>
+                <a:satMod val="120000"/>
+                <a:shade val="78000"/>
+              </a:schemeClr>
+            </a:gs>
+          </a:gsLst>
+          <a:lin ang="5400000" scaled="0"/>
+        </a:gradFill>
+      </a:fillStyleLst>
+      <a:lnStyleLst>
+        <a:ln w="12700" cap="flat" cmpd="sng" algn="ctr">
+          <a:solidFill>
+            <a:schemeClr val="phClr"/>
+          </a:solidFill>
+          <a:prstDash val="solid"/>
+          <a:miter lim="800000"/>
+        </a:ln>
+        <a:ln w="19050" cap="flat" cmpd="sng" algn="ctr">
+          <a:solidFill>
+            <a:schemeClr val="phClr"/>
+          </a:solidFill>
+          <a:prstDash val="solid"/>
+          <a:miter lim="800000"/>
+        </a:ln>
+        <a:ln w="25400" cap="flat" cmpd="sng" algn="ctr">
+          <a:solidFill>
+            <a:schemeClr val="phClr"/>
+          </a:solidFill>
+          <a:prstDash val="solid"/>
+          <a:miter lim="800000"/>
+        </a:ln>
+      </a:lnStyleLst>
+      <a:effectStyleLst>
+        <a:effectStyle>
+          <a:effectLst/>
+        </a:effectStyle>
+        <a:effectStyle>
+          <a:effectLst/>
+        </a:effectStyle>
+        <a:effectStyle>
+          <a:effectLst>
+            <a:outerShdw blurRad="57150" dist="19050" dir="5400000" algn="ctr" rotWithShape="0">
+              <a:srgbClr val="000000">
+                <a:alpha val="63000"/>
+              </a:srgbClr>
+            </a:outerShdw>
+          </a:effectLst>
+        </a:effectStyle>
+      </a:effectStyleLst>
+      <a:bgFillStyleLst>
+        <a:solidFill>
+          <a:schemeClr val="phClr"/>
+        </a:solidFill>
+        <a:solidFill>
+          <a:schemeClr val="phClr">
+            <a:tint val="95000"/>
+            <a:satMod val="170000"/>
+          </a:schemeClr>
+        </a:solidFill>
+        <a:gradFill rotWithShape="1">
+          <a:gsLst>
+            <a:gs pos="0">
+              <a:schemeClr val="phClr">
+                <a:tint val="93000"/>
+                <a:satMod val="150000"/>
+                <a:shade val="98000"/>
+                <a:lumMod val="102000"/>
+              </a:schemeClr>
+            </a:gs>
+            <a:gs pos="50000">
+              <a:schemeClr val="phClr">
+                <a:tint val="98000"/>
+                <a:satMod val="130000"/>
+                <a:shade val="90000"/>
+                <a:lumMod val="103000"/>
+              </a:schemeClr>
+            </a:gs>
+            <a:gs pos="100000">
+              <a:schemeClr val="phClr">
+                <a:shade val="63000"/>
+                <a:satMod val="120000"/>
+              </a:schemeClr>
+            </a:gs>
+          </a:gsLst>
+          <a:lin ang="5400000" scaled="0"/>
+        </a:gradFill>
+      </a:bgFillStyleLst>
+    </a:fmtScheme>
+  </a:themeElements>
+  <a:objectDefaults>
+    <a:lnDef>
+      <a:spPr/>
+      <a:bodyPr/>
+      <a:lstStyle/>
+      <a:style>
+        <a:lnRef idx="2">
+          <a:schemeClr val="accent1"/>
+        </a:lnRef>
+        <a:fillRef idx="0">
+          <a:schemeClr val="accent1"/>
+        </a:fillRef>
+        <a:effectRef idx="1">
+          <a:schemeClr val="accent1"/>
+        </a:effectRef>
+        <a:fontRef idx="minor">
+          <a:schemeClr val="tx1"/>
+        </a:fontRef>
+      </a:style>
+    </a:lnDef>
+  </a:objectDefaults>
+  <a:extraClrSchemeLst/>
+  <a:extLst>
+    <a:ext uri="{05A4C25C-085E-4340-85A3-A5531E510DB2}">
+      <thm15:themeFamily xmlns:thm15="http://schemas.microsoft.com/office/thememl/2012/main" name="Office Theme" id="{2E142A2C-CD16-42D6-873A-C26D2A0506FA}" vid="{1BDDFF52-6CD6-40A5-AB3C-68EB2F1E4D0A}"/>
+    </a:ext>
+  </a:extLst>
+</a:theme>
+</file>
+
 <file path=docMetadata/LabelInfo.xml><?xml version="1.0" encoding="utf-8"?>
 <clbl:labelList xmlns:clbl="http://schemas.microsoft.com/office/2020/mipLabelMetadata">
   <clbl:label id="{b27ac744-d744-4b94-baa9-948b89b4017a}" enabled="1" method="Standard" siteId="{e3333e00-c877-4b87-b6ad-45e942de1750}" removed="0"/>

--- a/Capstone Mid-Quarter Update_Bryce Rooney.pptx
+++ b/Capstone Mid-Quarter Update_Bryce Rooney.pptx
@@ -432,7 +432,7 @@
           <a:p>
             <a:fld id="{3FC87381-5F87-4AAF-8B41-540099760EE8}" type="datetimeFigureOut">
               <a:rPr lang="en-US" smtClean="0"/>
-              <a:t>5/8/2026</a:t>
+              <a:t>5/18/2026</a:t>
             </a:fld>
             <a:endParaRPr lang="en-US"/>
           </a:p>
@@ -1338,7 +1338,7 @@
           <a:p>
             <a:fld id="{F55AF960-87D0-487C-BD50-BC6BA87EEF29}" type="datetimeFigureOut">
               <a:rPr lang="en-US" smtClean="0"/>
-              <a:t>5/8/2026</a:t>
+              <a:t>5/18/2026</a:t>
             </a:fld>
             <a:endParaRPr lang="en-US"/>
           </a:p>
@@ -1536,7 +1536,7 @@
           <a:p>
             <a:fld id="{F55AF960-87D0-487C-BD50-BC6BA87EEF29}" type="datetimeFigureOut">
               <a:rPr lang="en-US" smtClean="0"/>
-              <a:t>5/8/2026</a:t>
+              <a:t>5/18/2026</a:t>
             </a:fld>
             <a:endParaRPr lang="en-US"/>
           </a:p>
@@ -1744,7 +1744,7 @@
           <a:p>
             <a:fld id="{F55AF960-87D0-487C-BD50-BC6BA87EEF29}" type="datetimeFigureOut">
               <a:rPr lang="en-US" smtClean="0"/>
-              <a:t>5/8/2026</a:t>
+              <a:t>5/18/2026</a:t>
             </a:fld>
             <a:endParaRPr lang="en-US"/>
           </a:p>
@@ -1942,7 +1942,7 @@
           <a:p>
             <a:fld id="{F55AF960-87D0-487C-BD50-BC6BA87EEF29}" type="datetimeFigureOut">
               <a:rPr lang="en-US" smtClean="0"/>
-              <a:t>5/8/2026</a:t>
+              <a:t>5/18/2026</a:t>
             </a:fld>
             <a:endParaRPr lang="en-US"/>
           </a:p>
@@ -2217,7 +2217,7 @@
           <a:p>
             <a:fld id="{F55AF960-87D0-487C-BD50-BC6BA87EEF29}" type="datetimeFigureOut">
               <a:rPr lang="en-US" smtClean="0"/>
-              <a:t>5/8/2026</a:t>
+              <a:t>5/18/2026</a:t>
             </a:fld>
             <a:endParaRPr lang="en-US"/>
           </a:p>
@@ -2482,7 +2482,7 @@
           <a:p>
             <a:fld id="{F55AF960-87D0-487C-BD50-BC6BA87EEF29}" type="datetimeFigureOut">
               <a:rPr lang="en-US" smtClean="0"/>
-              <a:t>5/8/2026</a:t>
+              <a:t>5/18/2026</a:t>
             </a:fld>
             <a:endParaRPr lang="en-US"/>
           </a:p>
@@ -2894,7 +2894,7 @@
           <a:p>
             <a:fld id="{F55AF960-87D0-487C-BD50-BC6BA87EEF29}" type="datetimeFigureOut">
               <a:rPr lang="en-US" smtClean="0"/>
-              <a:t>5/8/2026</a:t>
+              <a:t>5/18/2026</a:t>
             </a:fld>
             <a:endParaRPr lang="en-US"/>
           </a:p>
@@ -3035,7 +3035,7 @@
           <a:p>
             <a:fld id="{F55AF960-87D0-487C-BD50-BC6BA87EEF29}" type="datetimeFigureOut">
               <a:rPr lang="en-US" smtClean="0"/>
-              <a:t>5/8/2026</a:t>
+              <a:t>5/18/2026</a:t>
             </a:fld>
             <a:endParaRPr lang="en-US"/>
           </a:p>
@@ -3148,7 +3148,7 @@
           <a:p>
             <a:fld id="{F55AF960-87D0-487C-BD50-BC6BA87EEF29}" type="datetimeFigureOut">
               <a:rPr lang="en-US" smtClean="0"/>
-              <a:t>5/8/2026</a:t>
+              <a:t>5/18/2026</a:t>
             </a:fld>
             <a:endParaRPr lang="en-US"/>
           </a:p>
@@ -3459,7 +3459,7 @@
           <a:p>
             <a:fld id="{F55AF960-87D0-487C-BD50-BC6BA87EEF29}" type="datetimeFigureOut">
               <a:rPr lang="en-US" smtClean="0"/>
-              <a:t>5/8/2026</a:t>
+              <a:t>5/18/2026</a:t>
             </a:fld>
             <a:endParaRPr lang="en-US"/>
           </a:p>
@@ -3747,7 +3747,7 @@
           <a:p>
             <a:fld id="{F55AF960-87D0-487C-BD50-BC6BA87EEF29}" type="datetimeFigureOut">
               <a:rPr lang="en-US" smtClean="0"/>
-              <a:t>5/8/2026</a:t>
+              <a:t>5/18/2026</a:t>
             </a:fld>
             <a:endParaRPr lang="en-US"/>
           </a:p>
@@ -3988,7 +3988,7 @@
           <a:p>
             <a:fld id="{F55AF960-87D0-487C-BD50-BC6BA87EEF29}" type="datetimeFigureOut">
               <a:rPr lang="en-US" smtClean="0"/>
-              <a:t>5/8/2026</a:t>
+              <a:t>5/18/2026</a:t>
             </a:fld>
             <a:endParaRPr lang="en-US"/>
           </a:p>

--- a/Capstone Mid-Quarter Update_Bryce Rooney.pptx
+++ b/Capstone Mid-Quarter Update_Bryce Rooney.pptx
@@ -432,7 +432,7 @@
           <a:p>
             <a:fld id="{3FC87381-5F87-4AAF-8B41-540099760EE8}" type="datetimeFigureOut">
               <a:rPr lang="en-US" smtClean="0"/>
-              <a:t>5/18/2026</a:t>
+              <a:t>5/29/2026</a:t>
             </a:fld>
             <a:endParaRPr lang="en-US"/>
           </a:p>
@@ -1338,7 +1338,7 @@
           <a:p>
             <a:fld id="{F55AF960-87D0-487C-BD50-BC6BA87EEF29}" type="datetimeFigureOut">
               <a:rPr lang="en-US" smtClean="0"/>
-              <a:t>5/18/2026</a:t>
+              <a:t>5/29/2026</a:t>
             </a:fld>
             <a:endParaRPr lang="en-US"/>
           </a:p>
@@ -1536,7 +1536,7 @@
           <a:p>
             <a:fld id="{F55AF960-87D0-487C-BD50-BC6BA87EEF29}" type="datetimeFigureOut">
               <a:rPr lang="en-US" smtClean="0"/>
-              <a:t>5/18/2026</a:t>
+              <a:t>5/29/2026</a:t>
             </a:fld>
             <a:endParaRPr lang="en-US"/>
           </a:p>
@@ -1744,7 +1744,7 @@
           <a:p>
             <a:fld id="{F55AF960-87D0-487C-BD50-BC6BA87EEF29}" type="datetimeFigureOut">
               <a:rPr lang="en-US" smtClean="0"/>
-              <a:t>5/18/2026</a:t>
+              <a:t>5/29/2026</a:t>
             </a:fld>
             <a:endParaRPr lang="en-US"/>
           </a:p>
@@ -1942,7 +1942,7 @@
           <a:p>
             <a:fld id="{F55AF960-87D0-487C-BD50-BC6BA87EEF29}" type="datetimeFigureOut">
               <a:rPr lang="en-US" smtClean="0"/>
-              <a:t>5/18/2026</a:t>
+              <a:t>5/29/2026</a:t>
             </a:fld>
             <a:endParaRPr lang="en-US"/>
           </a:p>
@@ -2217,7 +2217,7 @@
           <a:p>
             <a:fld id="{F55AF960-87D0-487C-BD50-BC6BA87EEF29}" type="datetimeFigureOut">
               <a:rPr lang="en-US" smtClean="0"/>
-              <a:t>5/18/2026</a:t>
+              <a:t>5/29/2026</a:t>
             </a:fld>
             <a:endParaRPr lang="en-US"/>
           </a:p>
@@ -2482,7 +2482,7 @@
           <a:p>
             <a:fld id="{F55AF960-87D0-487C-BD50-BC6BA87EEF29}" type="datetimeFigureOut">
               <a:rPr lang="en-US" smtClean="0"/>
-              <a:t>5/18/2026</a:t>
+              <a:t>5/29/2026</a:t>
             </a:fld>
             <a:endParaRPr lang="en-US"/>
           </a:p>
@@ -2894,7 +2894,7 @@
           <a:p>
             <a:fld id="{F55AF960-87D0-487C-BD50-BC6BA87EEF29}" type="datetimeFigureOut">
               <a:rPr lang="en-US" smtClean="0"/>
-              <a:t>5/18/2026</a:t>
+              <a:t>5/29/2026</a:t>
             </a:fld>
             <a:endParaRPr lang="en-US"/>
           </a:p>
@@ -3035,7 +3035,7 @@
           <a:p>
             <a:fld id="{F55AF960-87D0-487C-BD50-BC6BA87EEF29}" type="datetimeFigureOut">
               <a:rPr lang="en-US" smtClean="0"/>
-              <a:t>5/18/2026</a:t>
+              <a:t>5/29/2026</a:t>
             </a:fld>
             <a:endParaRPr lang="en-US"/>
           </a:p>
@@ -3148,7 +3148,7 @@
           <a:p>
             <a:fld id="{F55AF960-87D0-487C-BD50-BC6BA87EEF29}" type="datetimeFigureOut">
               <a:rPr lang="en-US" smtClean="0"/>
-              <a:t>5/18/2026</a:t>
+              <a:t>5/29/2026</a:t>
             </a:fld>
             <a:endParaRPr lang="en-US"/>
           </a:p>
@@ -3459,7 +3459,7 @@
           <a:p>
             <a:fld id="{F55AF960-87D0-487C-BD50-BC6BA87EEF29}" type="datetimeFigureOut">
               <a:rPr lang="en-US" smtClean="0"/>
-              <a:t>5/18/2026</a:t>
+              <a:t>5/29/2026</a:t>
             </a:fld>
             <a:endParaRPr lang="en-US"/>
           </a:p>
@@ -3747,7 +3747,7 @@
           <a:p>
             <a:fld id="{F55AF960-87D0-487C-BD50-BC6BA87EEF29}" type="datetimeFigureOut">
               <a:rPr lang="en-US" smtClean="0"/>
-              <a:t>5/18/2026</a:t>
+              <a:t>5/29/2026</a:t>
             </a:fld>
             <a:endParaRPr lang="en-US"/>
           </a:p>
@@ -3988,7 +3988,7 @@
           <a:p>
             <a:fld id="{F55AF960-87D0-487C-BD50-BC6BA87EEF29}" type="datetimeFigureOut">
               <a:rPr lang="en-US" smtClean="0"/>
-              <a:t>5/18/2026</a:t>
+              <a:t>5/29/2026</a:t>
             </a:fld>
             <a:endParaRPr lang="en-US"/>
           </a:p>
